--- a/poc/data_harness/Ascension Agentic Harness - Data Harness (white).pptx
+++ b/poc/data_harness/Ascension Agentic Harness - Data Harness (white).pptx
@@ -19,6 +19,7 @@
     <p:sldId id="261" r:id="rId15"/>
     <p:sldId id="264" r:id="rId18"/>
     <p:sldId id="265" r:id="rId19"/>
+    <p:sldId id="266" r:id="rId20"/>
   </p:sldIdLst>
   <p:sldSz cx="12192000" cy="6858000"/>
   <p:notesSz cx="6858000" cy="12192000"/>
@@ -1468,6 +1469,104 @@
           <a:lstStyle/>
           <a:p>
             <a:r>
+              <a:t>SLIDE: Platform fit   (about 2-3 minutes)</a:t>
+            </a:r>
+          </a:p>
+          <a:p/>
+          <a:p>
+            <a:r>
+              <a:t>KEY MESSAGE</a:t>
+            </a:r>
+          </a:p>
+          <a:p>
+            <a:r>
+              <a:t>One harness serves every pod and three jobs: delivery, campaigns and the Sierra voice agent. Each agent is built once, scales across pods without losing accuracy, and stays under the same controls.</a:t>
+            </a:r>
+          </a:p>
+          <a:p/>
+          <a:p>
+            <a:r>
+              <a:t>WALK IT</a:t>
+            </a:r>
+          </a:p>
+          <a:p>
+            <a:r>
+              <a:t>- Top: one harness, three jobs, sharing the knowledge graph, governance, evals, approvals and the change passport.</a:t>
+            </a:r>
+          </a:p>
+          <a:p>
+            <a:r>
+              <a:t>- How we build: one definition per agent plus pod skill packs; versioned prompts, skills and model; an eval gate before any new version ships; pods onboard one at a time.</a:t>
+            </a:r>
+          </a:p>
+          <a:p>
+            <a:r>
+              <a:t>- How it scales (concurrency): each request is its own isolated run; up to 3 runs per pod so no pod crowds out another; about 30 at once, set by model and API quotas (proposed, sized in the Phase 0 load test); extra requests wait, none are dropped.</a:t>
+            </a:r>
+          </a:p>
+          <a:p>
+            <a:r>
+              <a:t>- How it stays accurate: cited facts only; the same eval bar for every pod, max 5 retries then an owner; load changes the wait, not the answer, because runs share no memory; measured every run.</a:t>
+            </a:r>
+          </a:p>
+          <a:p>
+            <a:r>
+              <a:t>- How we protect data (measured): share of sensitive fields classified by DLP and approved in Collibra (target 100% before use); masking policy tags verified against the schema every run, drift flagged; negative-access tests each release prove agent identities cannot read raw PHI (target zero); every PHI access logged, releases reconciled, access reviewed each quarter.</a:t>
+            </a:r>
+          </a:p>
+          <a:p>
+            <a:r>
+              <a:t>- How we control: no production access, guardrails, people decide at the gates, quotas and a kill switch.</a:t>
+            </a:r>
+          </a:p>
+          <a:p>
+            <a:r>
+              <a:t>- Bottom: the core benefits beyond cost: consistency, reuse, knowledge kept, quality, auditability, safe by design.</a:t>
+            </a:r>
+          </a:p>
+        </p:txBody>
+      </p:sp>
+    </p:spTree>
+  </p:cSld>
+  <p:clrMapOvr>
+    <a:masterClrMapping/>
+  </p:clrMapOvr>
+</p:notes>
+</file>
+
+<file path=ppt/notesSlides/notesSlide11.xml><?xml version="1.0" encoding="utf-8"?>
+<p:notes xmlns:a="http://schemas.openxmlformats.org/drawingml/2006/main" xmlns:p="http://schemas.openxmlformats.org/presentationml/2006/main" xmlns:r="http://schemas.openxmlformats.org/officeDocument/2006/relationships">
+  <p:cSld>
+    <p:spTree>
+      <p:nvGrpSpPr>
+        <p:cNvPr id="1" name=""/>
+        <p:cNvGrpSpPr/>
+        <p:nvPr/>
+      </p:nvGrpSpPr>
+      <p:grpSpPr>
+        <a:xfrm>
+          <a:off x="0" y="0"/>
+          <a:ext cx="0" cy="0"/>
+          <a:chOff x="0" y="0"/>
+          <a:chExt cx="0" cy="0"/>
+        </a:xfrm>
+      </p:grpSpPr>
+      <p:sp>
+        <p:nvSpPr>
+          <p:cNvPr id="3" name="Notes Placeholder 2"/>
+          <p:cNvSpPr>
+            <a:spLocks noGrp="1"/>
+          </p:cNvSpPr>
+          <p:nvPr>
+            <p:ph type="body" idx="1"/>
+          </p:nvPr>
+        </p:nvSpPr>
+        <p:spPr/>
+        <p:txBody>
+          <a:bodyPr/>
+          <a:lstStyle/>
+          <a:p>
+            <a:r>
               <a:t>SLIDE: Lean team and cost saving   (about 2-3 minutes)</a:t>
             </a:r>
           </a:p>
@@ -3796,6 +3895,4927 @@
 </file>
 
 <file path=ppt/slides/slide10.xml><?xml version="1.0" encoding="utf-8"?>
+<p:sld xmlns:a="http://schemas.openxmlformats.org/drawingml/2006/main" xmlns:p="http://schemas.openxmlformats.org/presentationml/2006/main" xmlns:r="http://schemas.openxmlformats.org/officeDocument/2006/relationships">
+  <p:cSld>
+    <p:bg>
+      <p:bgPr>
+        <a:solidFill>
+          <a:srgbClr val="FFFFFF"/>
+        </a:solidFill>
+        <a:effectLst/>
+      </p:bgPr>
+    </p:bg>
+    <p:spTree>
+      <p:nvGrpSpPr>
+        <p:cNvPr id="1" name=""/>
+        <p:cNvGrpSpPr/>
+        <p:nvPr/>
+      </p:nvGrpSpPr>
+      <p:grpSpPr/>
+      <p:sp>
+        <p:nvSpPr>
+          <p:cNvPr id="2" name="Text 1"/>
+          <p:cNvSpPr txBox="1"/>
+          <p:nvPr/>
+        </p:nvSpPr>
+        <p:spPr>
+          <a:xfrm>
+            <a:off x="411480" y="201168"/>
+            <a:ext cx="8229600" cy="182880"/>
+          </a:xfrm>
+          <a:prstGeom prst="rect">
+            <a:avLst/>
+          </a:prstGeom>
+          <a:noFill/>
+        </p:spPr>
+        <p:txBody>
+          <a:bodyPr wrap="square" lIns="0" rIns="0" tIns="0" bIns="0" anchor="ctr">
+            <a:spAutoFit/>
+          </a:bodyPr>
+          <a:lstStyle/>
+          <a:p>
+            <a:r>
+              <a:rPr sz="800" b="1" i="0" spc="300">
+                <a:solidFill>
+                  <a:srgbClr val="0089A0"/>
+                </a:solidFill>
+                <a:latin typeface="Trenda IG Text"/>
+              </a:rPr>
+              <a:t>ASCENSION AGENTIC HARNESS · PLATFORM FIT</a:t>
+            </a:r>
+          </a:p>
+        </p:txBody>
+      </p:sp>
+      <p:sp>
+        <p:nvSpPr>
+          <p:cNvPr id="3" name="Text 2"/>
+          <p:cNvSpPr txBox="1"/>
+          <p:nvPr/>
+        </p:nvSpPr>
+        <p:spPr>
+          <a:xfrm>
+            <a:off x="411480" y="384048"/>
+            <a:ext cx="11365992" cy="411480"/>
+          </a:xfrm>
+          <a:prstGeom prst="rect">
+            <a:avLst/>
+          </a:prstGeom>
+          <a:noFill/>
+        </p:spPr>
+        <p:txBody>
+          <a:bodyPr wrap="square" lIns="0" rIns="0" tIns="0" bIns="0" anchor="ctr">
+            <a:spAutoFit/>
+          </a:bodyPr>
+          <a:lstStyle/>
+          <a:p>
+            <a:r>
+              <a:rPr sz="2200" b="1" i="0">
+                <a:solidFill>
+                  <a:srgbClr val="1A1A1A"/>
+                </a:solidFill>
+                <a:latin typeface="Trenda IG Text"/>
+              </a:rPr>
+              <a:t>Platform fit: one harness for every pod, every job</a:t>
+            </a:r>
+          </a:p>
+        </p:txBody>
+      </p:sp>
+      <p:sp>
+        <p:nvSpPr>
+          <p:cNvPr id="4" name="Text 3"/>
+          <p:cNvSpPr txBox="1"/>
+          <p:nvPr/>
+        </p:nvSpPr>
+        <p:spPr>
+          <a:xfrm>
+            <a:off x="411480" y="804672"/>
+            <a:ext cx="11365992" cy="237744"/>
+          </a:xfrm>
+          <a:prstGeom prst="rect">
+            <a:avLst/>
+          </a:prstGeom>
+          <a:noFill/>
+        </p:spPr>
+        <p:txBody>
+          <a:bodyPr wrap="square" lIns="0" rIns="0" tIns="0" bIns="0" anchor="ctr">
+            <a:spAutoFit/>
+          </a:bodyPr>
+          <a:lstStyle/>
+          <a:p>
+            <a:r>
+              <a:rPr sz="1050" b="0" i="0">
+                <a:solidFill>
+                  <a:srgbClr val="4D4D4D"/>
+                </a:solidFill>
+                <a:latin typeface="Trenda IG Text"/>
+              </a:rPr>
+              <a:t>Delivery, campaigns and the Sierra voice agent share one graph, one governance layer and one approval flow. Each agent is built once and serves every pod at once.</a:t>
+            </a:r>
+          </a:p>
+        </p:txBody>
+      </p:sp>
+      <p:sp>
+        <p:nvSpPr>
+          <p:cNvPr id="5" name="Text 4"/>
+          <p:cNvSpPr txBox="1"/>
+          <p:nvPr/>
+        </p:nvSpPr>
+        <p:spPr>
+          <a:xfrm>
+            <a:off x="411480" y="1188720"/>
+            <a:ext cx="1371600" cy="457200"/>
+          </a:xfrm>
+          <a:prstGeom prst="rect">
+            <a:avLst/>
+          </a:prstGeom>
+          <a:noFill/>
+        </p:spPr>
+        <p:txBody>
+          <a:bodyPr wrap="square" lIns="0" rIns="0" tIns="0" bIns="0" anchor="ctr">
+            <a:spAutoFit/>
+          </a:bodyPr>
+          <a:lstStyle/>
+          <a:p>
+            <a:pPr>
+              <a:spcAft>
+                <a:spcPts val="100"/>
+              </a:spcAft>
+            </a:pPr>
+            <a:r>
+              <a:rPr sz="700" b="1" i="0" spc="120">
+                <a:solidFill>
+                  <a:srgbClr val="1A1A1A"/>
+                </a:solidFill>
+                <a:latin typeface="Trenda IG Text"/>
+              </a:rPr>
+              <a:t>ONE HARNESS</a:t>
+            </a:r>
+          </a:p>
+          <a:p>
+            <a:pPr>
+              <a:spcAft>
+                <a:spcPts val="100"/>
+              </a:spcAft>
+            </a:pPr>
+            <a:r>
+              <a:rPr sz="700" b="0" i="0">
+                <a:solidFill>
+                  <a:srgbClr val="6B6B6B"/>
+                </a:solidFill>
+                <a:latin typeface="Trenda IG Text"/>
+              </a:rPr>
+              <a:t>three jobs</a:t>
+            </a:r>
+          </a:p>
+        </p:txBody>
+      </p:sp>
+      <p:sp>
+        <p:nvSpPr>
+          <p:cNvPr id="6" name="Shape 5"/>
+          <p:cNvSpPr/>
+          <p:nvPr/>
+        </p:nvSpPr>
+        <p:spPr>
+          <a:xfrm>
+            <a:off x="1783080" y="1188720"/>
+            <a:ext cx="2240280" cy="457200"/>
+          </a:xfrm>
+          <a:prstGeom prst="roundRect">
+            <a:avLst>
+              <a:gd name="adj" fmla="val 12000"/>
+            </a:avLst>
+          </a:prstGeom>
+          <a:solidFill>
+            <a:srgbClr val="F5F5F5"/>
+          </a:solidFill>
+          <a:ln w="9525">
+            <a:solidFill>
+              <a:srgbClr val="00B8D4"/>
+            </a:solidFill>
+          </a:ln>
+          <a:effectLst/>
+        </p:spPr>
+        <p:style>
+          <a:lnRef idx="1">
+            <a:schemeClr val="accent1"/>
+          </a:lnRef>
+          <a:fillRef idx="3">
+            <a:schemeClr val="accent1"/>
+          </a:fillRef>
+          <a:effectRef idx="2">
+            <a:schemeClr val="accent1"/>
+          </a:effectRef>
+          <a:fontRef idx="minor">
+            <a:schemeClr val="lt1"/>
+          </a:fontRef>
+        </p:style>
+        <p:txBody>
+          <a:bodyPr rtlCol="0" anchor="ctr"/>
+          <a:lstStyle/>
+          <a:p/>
+        </p:txBody>
+      </p:sp>
+      <p:pic>
+        <p:nvPicPr>
+          <p:cNvPr id="7" name="Picture 6" descr="openai-white.png"/>
+          <p:cNvPicPr>
+            <a:picLocks noChangeAspect="1"/>
+          </p:cNvPicPr>
+          <p:nvPr/>
+        </p:nvPicPr>
+        <p:blipFill>
+          <a:blip r:embed="rId2"/>
+          <a:stretch>
+            <a:fillRect/>
+          </a:stretch>
+        </p:blipFill>
+        <p:spPr>
+          <a:xfrm>
+            <a:off x="1892807" y="1316736"/>
+            <a:ext cx="201168" cy="201168"/>
+          </a:xfrm>
+          <a:prstGeom prst="rect">
+            <a:avLst/>
+          </a:prstGeom>
+        </p:spPr>
+      </p:pic>
+      <p:sp>
+        <p:nvSpPr>
+          <p:cNvPr id="8" name="Text 6"/>
+          <p:cNvSpPr txBox="1"/>
+          <p:nvPr/>
+        </p:nvSpPr>
+        <p:spPr>
+          <a:xfrm>
+            <a:off x="2167127" y="1188720"/>
+            <a:ext cx="1783080" cy="457200"/>
+          </a:xfrm>
+          <a:prstGeom prst="rect">
+            <a:avLst/>
+          </a:prstGeom>
+          <a:noFill/>
+        </p:spPr>
+        <p:txBody>
+          <a:bodyPr wrap="square" lIns="0" rIns="0" tIns="0" bIns="0" anchor="ctr">
+            <a:spAutoFit/>
+          </a:bodyPr>
+          <a:lstStyle/>
+          <a:p>
+            <a:r>
+              <a:rPr sz="720" b="1" i="0">
+                <a:solidFill>
+                  <a:srgbClr val="1A1A1A"/>
+                </a:solidFill>
+                <a:latin typeface="Trenda IG Text"/>
+              </a:rPr>
+              <a:t>Delivery</a:t>
+            </a:r>
+          </a:p>
+          <a:p>
+            <a:r>
+              <a:rPr sz="700" b="0" i="0">
+                <a:solidFill>
+                  <a:srgbClr val="4D4D4D"/>
+                </a:solidFill>
+                <a:latin typeface="Trenda IG Text"/>
+              </a:rPr>
+              <a:t>Codex to production · every pod</a:t>
+            </a:r>
+          </a:p>
+        </p:txBody>
+      </p:sp>
+      <p:sp>
+        <p:nvSpPr>
+          <p:cNvPr id="9" name="Shape 7"/>
+          <p:cNvSpPr/>
+          <p:nvPr/>
+        </p:nvSpPr>
+        <p:spPr>
+          <a:xfrm>
+            <a:off x="4133088" y="1188720"/>
+            <a:ext cx="2240280" cy="457200"/>
+          </a:xfrm>
+          <a:prstGeom prst="roundRect">
+            <a:avLst>
+              <a:gd name="adj" fmla="val 12000"/>
+            </a:avLst>
+          </a:prstGeom>
+          <a:solidFill>
+            <a:srgbClr val="F5F5F5"/>
+          </a:solidFill>
+          <a:ln w="9525">
+            <a:solidFill>
+              <a:srgbClr val="00B8D4"/>
+            </a:solidFill>
+          </a:ln>
+          <a:effectLst/>
+        </p:spPr>
+        <p:style>
+          <a:lnRef idx="1">
+            <a:schemeClr val="accent1"/>
+          </a:lnRef>
+          <a:fillRef idx="3">
+            <a:schemeClr val="accent1"/>
+          </a:fillRef>
+          <a:effectRef idx="2">
+            <a:schemeClr val="accent1"/>
+          </a:effectRef>
+          <a:fontRef idx="minor">
+            <a:schemeClr val="lt1"/>
+          </a:fontRef>
+        </p:style>
+        <p:txBody>
+          <a:bodyPr rtlCol="0" anchor="ctr"/>
+          <a:lstStyle/>
+          <a:p/>
+        </p:txBody>
+      </p:sp>
+      <p:pic>
+        <p:nvPicPr>
+          <p:cNvPr id="10" name="Picture 9" descr="salesforce.png"/>
+          <p:cNvPicPr>
+            <a:picLocks noChangeAspect="1"/>
+          </p:cNvPicPr>
+          <p:nvPr/>
+        </p:nvPicPr>
+        <p:blipFill>
+          <a:blip r:embed="rId3"/>
+          <a:stretch>
+            <a:fillRect/>
+          </a:stretch>
+        </p:blipFill>
+        <p:spPr>
+          <a:xfrm>
+            <a:off x="4242816" y="1316736"/>
+            <a:ext cx="201168" cy="201168"/>
+          </a:xfrm>
+          <a:prstGeom prst="rect">
+            <a:avLst/>
+          </a:prstGeom>
+        </p:spPr>
+      </p:pic>
+      <p:sp>
+        <p:nvSpPr>
+          <p:cNvPr id="11" name="Text 8"/>
+          <p:cNvSpPr txBox="1"/>
+          <p:nvPr/>
+        </p:nvSpPr>
+        <p:spPr>
+          <a:xfrm>
+            <a:off x="4517136" y="1188720"/>
+            <a:ext cx="1783080" cy="457200"/>
+          </a:xfrm>
+          <a:prstGeom prst="rect">
+            <a:avLst/>
+          </a:prstGeom>
+          <a:noFill/>
+        </p:spPr>
+        <p:txBody>
+          <a:bodyPr wrap="square" lIns="0" rIns="0" tIns="0" bIns="0" anchor="ctr">
+            <a:spAutoFit/>
+          </a:bodyPr>
+          <a:lstStyle/>
+          <a:p>
+            <a:r>
+              <a:rPr sz="720" b="1" i="0">
+                <a:solidFill>
+                  <a:srgbClr val="1A1A1A"/>
+                </a:solidFill>
+                <a:latin typeface="Trenda IG Text"/>
+              </a:rPr>
+              <a:t>Campaigns</a:t>
+            </a:r>
+          </a:p>
+          <a:p>
+            <a:r>
+              <a:rPr sz="700" b="0" i="0">
+                <a:solidFill>
+                  <a:srgbClr val="4D4D4D"/>
+                </a:solidFill>
+                <a:latin typeface="Trenda IG Text"/>
+              </a:rPr>
+              <a:t>Marketing Cloud on governed GCP data</a:t>
+            </a:r>
+          </a:p>
+        </p:txBody>
+      </p:sp>
+      <p:sp>
+        <p:nvSpPr>
+          <p:cNvPr id="12" name="Shape 9"/>
+          <p:cNvSpPr/>
+          <p:nvPr/>
+        </p:nvSpPr>
+        <p:spPr>
+          <a:xfrm>
+            <a:off x="6483096" y="1188720"/>
+            <a:ext cx="2240280" cy="457200"/>
+          </a:xfrm>
+          <a:prstGeom prst="roundRect">
+            <a:avLst>
+              <a:gd name="adj" fmla="val 12000"/>
+            </a:avLst>
+          </a:prstGeom>
+          <a:solidFill>
+            <a:srgbClr val="F5F5F5"/>
+          </a:solidFill>
+          <a:ln w="9525">
+            <a:solidFill>
+              <a:srgbClr val="00B8D4"/>
+            </a:solidFill>
+          </a:ln>
+          <a:effectLst/>
+        </p:spPr>
+        <p:style>
+          <a:lnRef idx="1">
+            <a:schemeClr val="accent1"/>
+          </a:lnRef>
+          <a:fillRef idx="3">
+            <a:schemeClr val="accent1"/>
+          </a:fillRef>
+          <a:effectRef idx="2">
+            <a:schemeClr val="accent1"/>
+          </a:effectRef>
+          <a:fontRef idx="minor">
+            <a:schemeClr val="lt1"/>
+          </a:fontRef>
+        </p:style>
+        <p:txBody>
+          <a:bodyPr rtlCol="0" anchor="ctr"/>
+          <a:lstStyle/>
+          <a:p/>
+        </p:txBody>
+      </p:sp>
+      <p:sp>
+        <p:nvSpPr>
+          <p:cNvPr id="13" name="Text 10"/>
+          <p:cNvSpPr txBox="1"/>
+          <p:nvPr/>
+        </p:nvSpPr>
+        <p:spPr>
+          <a:xfrm>
+            <a:off x="6592824" y="1188720"/>
+            <a:ext cx="2057400" cy="457200"/>
+          </a:xfrm>
+          <a:prstGeom prst="rect">
+            <a:avLst/>
+          </a:prstGeom>
+          <a:noFill/>
+        </p:spPr>
+        <p:txBody>
+          <a:bodyPr wrap="square" lIns="0" rIns="0" tIns="0" bIns="0" anchor="ctr">
+            <a:spAutoFit/>
+          </a:bodyPr>
+          <a:lstStyle/>
+          <a:p>
+            <a:r>
+              <a:rPr sz="720" b="1" i="0">
+                <a:solidFill>
+                  <a:srgbClr val="1A1A1A"/>
+                </a:solidFill>
+                <a:latin typeface="Trenda IG Text"/>
+              </a:rPr>
+              <a:t>Sierra voice agent</a:t>
+            </a:r>
+          </a:p>
+          <a:p>
+            <a:r>
+              <a:rPr sz="700" b="0" i="0">
+                <a:solidFill>
+                  <a:srgbClr val="4D4D4D"/>
+                </a:solidFill>
+                <a:latin typeface="Trenda IG Text"/>
+              </a:rPr>
+              <a:t>bookings, reschedules, questions</a:t>
+            </a:r>
+          </a:p>
+        </p:txBody>
+      </p:sp>
+      <p:sp>
+        <p:nvSpPr>
+          <p:cNvPr id="14" name="Text 11"/>
+          <p:cNvSpPr txBox="1"/>
+          <p:nvPr/>
+        </p:nvSpPr>
+        <p:spPr>
+          <a:xfrm>
+            <a:off x="8878824" y="1188720"/>
+            <a:ext cx="2898648" cy="457200"/>
+          </a:xfrm>
+          <a:prstGeom prst="rect">
+            <a:avLst/>
+          </a:prstGeom>
+          <a:noFill/>
+        </p:spPr>
+        <p:txBody>
+          <a:bodyPr wrap="square" lIns="0" rIns="0" tIns="0" bIns="0" anchor="ctr">
+            <a:spAutoFit/>
+          </a:bodyPr>
+          <a:lstStyle/>
+          <a:p>
+            <a:pPr>
+              <a:spcAft>
+                <a:spcPts val="100"/>
+              </a:spcAft>
+            </a:pPr>
+            <a:r>
+              <a:rPr sz="700" b="1" i="0" spc="100">
+                <a:solidFill>
+                  <a:srgbClr val="0089A0"/>
+                </a:solidFill>
+                <a:latin typeface="Trenda IG Text"/>
+              </a:rPr>
+              <a:t>SHARED BY ALL THREE</a:t>
+            </a:r>
+          </a:p>
+          <a:p>
+            <a:pPr>
+              <a:spcAft>
+                <a:spcPts val="100"/>
+              </a:spcAft>
+            </a:pPr>
+            <a:r>
+              <a:rPr sz="700" b="0" i="0">
+                <a:solidFill>
+                  <a:srgbClr val="4D4D4D"/>
+                </a:solidFill>
+                <a:latin typeface="Trenda IG Text"/>
+              </a:rPr>
+              <a:t>knowledge graph · governance · evals · approvals · change passport</a:t>
+            </a:r>
+          </a:p>
+        </p:txBody>
+      </p:sp>
+      <p:sp>
+        <p:nvSpPr>
+          <p:cNvPr id="15" name="Shape 12"/>
+          <p:cNvSpPr/>
+          <p:nvPr/>
+        </p:nvSpPr>
+        <p:spPr>
+          <a:xfrm>
+            <a:off x="411480" y="1783080"/>
+            <a:ext cx="2185415" cy="3310128"/>
+          </a:xfrm>
+          <a:prstGeom prst="roundRect">
+            <a:avLst>
+              <a:gd name="adj" fmla="val 2000"/>
+            </a:avLst>
+          </a:prstGeom>
+          <a:solidFill>
+            <a:srgbClr val="EEEEEE"/>
+          </a:solidFill>
+          <a:ln>
+            <a:noFill/>
+          </a:ln>
+          <a:effectLst/>
+        </p:spPr>
+        <p:style>
+          <a:lnRef idx="1">
+            <a:schemeClr val="accent1"/>
+          </a:lnRef>
+          <a:fillRef idx="3">
+            <a:schemeClr val="accent1"/>
+          </a:fillRef>
+          <a:effectRef idx="2">
+            <a:schemeClr val="accent1"/>
+          </a:effectRef>
+          <a:fontRef idx="minor">
+            <a:schemeClr val="lt1"/>
+          </a:fontRef>
+        </p:style>
+        <p:txBody>
+          <a:bodyPr rtlCol="0" anchor="ctr"/>
+          <a:lstStyle/>
+          <a:p/>
+        </p:txBody>
+      </p:sp>
+      <p:sp>
+        <p:nvSpPr>
+          <p:cNvPr id="16" name="Shape 13"/>
+          <p:cNvSpPr/>
+          <p:nvPr/>
+        </p:nvSpPr>
+        <p:spPr>
+          <a:xfrm>
+            <a:off x="411480" y="1783080"/>
+            <a:ext cx="2185415" cy="256032"/>
+          </a:xfrm>
+          <a:prstGeom prst="rect">
+            <a:avLst/>
+          </a:prstGeom>
+          <a:solidFill>
+            <a:srgbClr val="E6E6E6"/>
+          </a:solidFill>
+          <a:ln>
+            <a:noFill/>
+          </a:ln>
+          <a:effectLst/>
+        </p:spPr>
+        <p:style>
+          <a:lnRef idx="1">
+            <a:schemeClr val="accent1"/>
+          </a:lnRef>
+          <a:fillRef idx="3">
+            <a:schemeClr val="accent1"/>
+          </a:fillRef>
+          <a:effectRef idx="2">
+            <a:schemeClr val="accent1"/>
+          </a:effectRef>
+          <a:fontRef idx="minor">
+            <a:schemeClr val="lt1"/>
+          </a:fontRef>
+        </p:style>
+        <p:txBody>
+          <a:bodyPr rtlCol="0" anchor="ctr"/>
+          <a:lstStyle/>
+          <a:p/>
+        </p:txBody>
+      </p:sp>
+      <p:sp>
+        <p:nvSpPr>
+          <p:cNvPr id="17" name="Text 14"/>
+          <p:cNvSpPr txBox="1"/>
+          <p:nvPr/>
+        </p:nvSpPr>
+        <p:spPr>
+          <a:xfrm>
+            <a:off x="521208" y="1783080"/>
+            <a:ext cx="1965959" cy="256032"/>
+          </a:xfrm>
+          <a:prstGeom prst="rect">
+            <a:avLst/>
+          </a:prstGeom>
+          <a:noFill/>
+        </p:spPr>
+        <p:txBody>
+          <a:bodyPr wrap="square" lIns="0" rIns="0" tIns="0" bIns="0" anchor="ctr">
+            <a:spAutoFit/>
+          </a:bodyPr>
+          <a:lstStyle/>
+          <a:p>
+            <a:r>
+              <a:rPr sz="700" b="1" i="0" spc="120">
+                <a:solidFill>
+                  <a:srgbClr val="1A1A1A"/>
+                </a:solidFill>
+                <a:latin typeface="Trenda IG Text"/>
+              </a:rPr>
+              <a:t>HOW WE BUILD</a:t>
+            </a:r>
+          </a:p>
+        </p:txBody>
+      </p:sp>
+      <p:sp>
+        <p:nvSpPr>
+          <p:cNvPr id="18" name="Shape 15"/>
+          <p:cNvSpPr/>
+          <p:nvPr/>
+        </p:nvSpPr>
+        <p:spPr>
+          <a:xfrm>
+            <a:off x="521208" y="2130552"/>
+            <a:ext cx="1965959" cy="681227"/>
+          </a:xfrm>
+          <a:prstGeom prst="rect">
+            <a:avLst/>
+          </a:prstGeom>
+          <a:solidFill>
+            <a:srgbClr val="F5F5F5"/>
+          </a:solidFill>
+          <a:ln>
+            <a:noFill/>
+          </a:ln>
+          <a:effectLst/>
+        </p:spPr>
+        <p:style>
+          <a:lnRef idx="1">
+            <a:schemeClr val="accent1"/>
+          </a:lnRef>
+          <a:fillRef idx="3">
+            <a:schemeClr val="accent1"/>
+          </a:fillRef>
+          <a:effectRef idx="2">
+            <a:schemeClr val="accent1"/>
+          </a:effectRef>
+          <a:fontRef idx="minor">
+            <a:schemeClr val="lt1"/>
+          </a:fontRef>
+        </p:style>
+        <p:txBody>
+          <a:bodyPr rtlCol="0" anchor="ctr"/>
+          <a:lstStyle/>
+          <a:p/>
+        </p:txBody>
+      </p:sp>
+      <p:sp>
+        <p:nvSpPr>
+          <p:cNvPr id="19" name="Shape 16"/>
+          <p:cNvSpPr/>
+          <p:nvPr/>
+        </p:nvSpPr>
+        <p:spPr>
+          <a:xfrm>
+            <a:off x="521208" y="2130552"/>
+            <a:ext cx="36576" cy="681227"/>
+          </a:xfrm>
+          <a:prstGeom prst="rect">
+            <a:avLst/>
+          </a:prstGeom>
+          <a:solidFill>
+            <a:srgbClr val="00D6F2"/>
+          </a:solidFill>
+          <a:ln>
+            <a:noFill/>
+          </a:ln>
+          <a:effectLst/>
+        </p:spPr>
+        <p:style>
+          <a:lnRef idx="1">
+            <a:schemeClr val="accent1"/>
+          </a:lnRef>
+          <a:fillRef idx="3">
+            <a:schemeClr val="accent1"/>
+          </a:fillRef>
+          <a:effectRef idx="2">
+            <a:schemeClr val="accent1"/>
+          </a:effectRef>
+          <a:fontRef idx="minor">
+            <a:schemeClr val="lt1"/>
+          </a:fontRef>
+        </p:style>
+        <p:txBody>
+          <a:bodyPr rtlCol="0" anchor="ctr"/>
+          <a:lstStyle/>
+          <a:p/>
+        </p:txBody>
+      </p:sp>
+      <p:sp>
+        <p:nvSpPr>
+          <p:cNvPr id="20" name="Text 17"/>
+          <p:cNvSpPr txBox="1"/>
+          <p:nvPr/>
+        </p:nvSpPr>
+        <p:spPr>
+          <a:xfrm>
+            <a:off x="630936" y="2167128"/>
+            <a:ext cx="1819655" cy="608075"/>
+          </a:xfrm>
+          <a:prstGeom prst="rect">
+            <a:avLst/>
+          </a:prstGeom>
+          <a:noFill/>
+        </p:spPr>
+        <p:txBody>
+          <a:bodyPr wrap="square" lIns="0" rIns="0" tIns="0" bIns="0" anchor="ctr">
+            <a:spAutoFit/>
+          </a:bodyPr>
+          <a:lstStyle/>
+          <a:p>
+            <a:pPr>
+              <a:spcAft>
+                <a:spcPts val="200"/>
+              </a:spcAft>
+            </a:pPr>
+            <a:r>
+              <a:rPr sz="720" b="1" i="0">
+                <a:solidFill>
+                  <a:srgbClr val="1A1A1A"/>
+                </a:solidFill>
+                <a:latin typeface="Trenda IG Text"/>
+              </a:rPr>
+              <a:t>One definition per agent</a:t>
+            </a:r>
+          </a:p>
+          <a:p>
+            <a:pPr>
+              <a:spcAft>
+                <a:spcPts val="200"/>
+              </a:spcAft>
+            </a:pPr>
+            <a:r>
+              <a:rPr sz="700" b="0" i="0">
+                <a:solidFill>
+                  <a:srgbClr val="4D4D4D"/>
+                </a:solidFill>
+                <a:latin typeface="Trenda IG Text"/>
+              </a:rPr>
+              <a:t>plus a skill pack per pod; a new pod adds skills, not agents</a:t>
+            </a:r>
+          </a:p>
+        </p:txBody>
+      </p:sp>
+      <p:sp>
+        <p:nvSpPr>
+          <p:cNvPr id="21" name="Shape 18"/>
+          <p:cNvSpPr/>
+          <p:nvPr/>
+        </p:nvSpPr>
+        <p:spPr>
+          <a:xfrm>
+            <a:off x="521208" y="2884932"/>
+            <a:ext cx="1965959" cy="681227"/>
+          </a:xfrm>
+          <a:prstGeom prst="rect">
+            <a:avLst/>
+          </a:prstGeom>
+          <a:solidFill>
+            <a:srgbClr val="F5F5F5"/>
+          </a:solidFill>
+          <a:ln>
+            <a:noFill/>
+          </a:ln>
+          <a:effectLst/>
+        </p:spPr>
+        <p:style>
+          <a:lnRef idx="1">
+            <a:schemeClr val="accent1"/>
+          </a:lnRef>
+          <a:fillRef idx="3">
+            <a:schemeClr val="accent1"/>
+          </a:fillRef>
+          <a:effectRef idx="2">
+            <a:schemeClr val="accent1"/>
+          </a:effectRef>
+          <a:fontRef idx="minor">
+            <a:schemeClr val="lt1"/>
+          </a:fontRef>
+        </p:style>
+        <p:txBody>
+          <a:bodyPr rtlCol="0" anchor="ctr"/>
+          <a:lstStyle/>
+          <a:p/>
+        </p:txBody>
+      </p:sp>
+      <p:sp>
+        <p:nvSpPr>
+          <p:cNvPr id="22" name="Shape 19"/>
+          <p:cNvSpPr/>
+          <p:nvPr/>
+        </p:nvSpPr>
+        <p:spPr>
+          <a:xfrm>
+            <a:off x="521208" y="2884932"/>
+            <a:ext cx="36576" cy="681227"/>
+          </a:xfrm>
+          <a:prstGeom prst="rect">
+            <a:avLst/>
+          </a:prstGeom>
+          <a:solidFill>
+            <a:srgbClr val="00D6F2"/>
+          </a:solidFill>
+          <a:ln>
+            <a:noFill/>
+          </a:ln>
+          <a:effectLst/>
+        </p:spPr>
+        <p:style>
+          <a:lnRef idx="1">
+            <a:schemeClr val="accent1"/>
+          </a:lnRef>
+          <a:fillRef idx="3">
+            <a:schemeClr val="accent1"/>
+          </a:fillRef>
+          <a:effectRef idx="2">
+            <a:schemeClr val="accent1"/>
+          </a:effectRef>
+          <a:fontRef idx="minor">
+            <a:schemeClr val="lt1"/>
+          </a:fontRef>
+        </p:style>
+        <p:txBody>
+          <a:bodyPr rtlCol="0" anchor="ctr"/>
+          <a:lstStyle/>
+          <a:p/>
+        </p:txBody>
+      </p:sp>
+      <p:sp>
+        <p:nvSpPr>
+          <p:cNvPr id="23" name="Text 20"/>
+          <p:cNvSpPr txBox="1"/>
+          <p:nvPr/>
+        </p:nvSpPr>
+        <p:spPr>
+          <a:xfrm>
+            <a:off x="630936" y="2921508"/>
+            <a:ext cx="1819655" cy="608075"/>
+          </a:xfrm>
+          <a:prstGeom prst="rect">
+            <a:avLst/>
+          </a:prstGeom>
+          <a:noFill/>
+        </p:spPr>
+        <p:txBody>
+          <a:bodyPr wrap="square" lIns="0" rIns="0" tIns="0" bIns="0" anchor="ctr">
+            <a:spAutoFit/>
+          </a:bodyPr>
+          <a:lstStyle/>
+          <a:p>
+            <a:pPr>
+              <a:spcAft>
+                <a:spcPts val="200"/>
+              </a:spcAft>
+            </a:pPr>
+            <a:r>
+              <a:rPr sz="720" b="1" i="0">
+                <a:solidFill>
+                  <a:srgbClr val="1A1A1A"/>
+                </a:solidFill>
+                <a:latin typeface="Trenda IG Text"/>
+              </a:rPr>
+              <a:t>Versioned</a:t>
+            </a:r>
+          </a:p>
+          <a:p>
+            <a:pPr>
+              <a:spcAft>
+                <a:spcPts val="200"/>
+              </a:spcAft>
+            </a:pPr>
+            <a:r>
+              <a:rPr sz="700" b="0" i="0">
+                <a:solidFill>
+                  <a:srgbClr val="4D4D4D"/>
+                </a:solidFill>
+                <a:latin typeface="Trenda IG Text"/>
+              </a:rPr>
+              <a:t>prompts, skills and model pinned in config; roll back in one step</a:t>
+            </a:r>
+          </a:p>
+        </p:txBody>
+      </p:sp>
+      <p:sp>
+        <p:nvSpPr>
+          <p:cNvPr id="24" name="Shape 21"/>
+          <p:cNvSpPr/>
+          <p:nvPr/>
+        </p:nvSpPr>
+        <p:spPr>
+          <a:xfrm>
+            <a:off x="521208" y="3639311"/>
+            <a:ext cx="1965959" cy="681227"/>
+          </a:xfrm>
+          <a:prstGeom prst="rect">
+            <a:avLst/>
+          </a:prstGeom>
+          <a:solidFill>
+            <a:srgbClr val="F5F5F5"/>
+          </a:solidFill>
+          <a:ln>
+            <a:noFill/>
+          </a:ln>
+          <a:effectLst/>
+        </p:spPr>
+        <p:style>
+          <a:lnRef idx="1">
+            <a:schemeClr val="accent1"/>
+          </a:lnRef>
+          <a:fillRef idx="3">
+            <a:schemeClr val="accent1"/>
+          </a:fillRef>
+          <a:effectRef idx="2">
+            <a:schemeClr val="accent1"/>
+          </a:effectRef>
+          <a:fontRef idx="minor">
+            <a:schemeClr val="lt1"/>
+          </a:fontRef>
+        </p:style>
+        <p:txBody>
+          <a:bodyPr rtlCol="0" anchor="ctr"/>
+          <a:lstStyle/>
+          <a:p/>
+        </p:txBody>
+      </p:sp>
+      <p:sp>
+        <p:nvSpPr>
+          <p:cNvPr id="25" name="Shape 22"/>
+          <p:cNvSpPr/>
+          <p:nvPr/>
+        </p:nvSpPr>
+        <p:spPr>
+          <a:xfrm>
+            <a:off x="521208" y="3639311"/>
+            <a:ext cx="36576" cy="681227"/>
+          </a:xfrm>
+          <a:prstGeom prst="rect">
+            <a:avLst/>
+          </a:prstGeom>
+          <a:solidFill>
+            <a:srgbClr val="00D6F2"/>
+          </a:solidFill>
+          <a:ln>
+            <a:noFill/>
+          </a:ln>
+          <a:effectLst/>
+        </p:spPr>
+        <p:style>
+          <a:lnRef idx="1">
+            <a:schemeClr val="accent1"/>
+          </a:lnRef>
+          <a:fillRef idx="3">
+            <a:schemeClr val="accent1"/>
+          </a:fillRef>
+          <a:effectRef idx="2">
+            <a:schemeClr val="accent1"/>
+          </a:effectRef>
+          <a:fontRef idx="minor">
+            <a:schemeClr val="lt1"/>
+          </a:fontRef>
+        </p:style>
+        <p:txBody>
+          <a:bodyPr rtlCol="0" anchor="ctr"/>
+          <a:lstStyle/>
+          <a:p/>
+        </p:txBody>
+      </p:sp>
+      <p:sp>
+        <p:nvSpPr>
+          <p:cNvPr id="26" name="Text 23"/>
+          <p:cNvSpPr txBox="1"/>
+          <p:nvPr/>
+        </p:nvSpPr>
+        <p:spPr>
+          <a:xfrm>
+            <a:off x="630936" y="3675887"/>
+            <a:ext cx="1819655" cy="608075"/>
+          </a:xfrm>
+          <a:prstGeom prst="rect">
+            <a:avLst/>
+          </a:prstGeom>
+          <a:noFill/>
+        </p:spPr>
+        <p:txBody>
+          <a:bodyPr wrap="square" lIns="0" rIns="0" tIns="0" bIns="0" anchor="ctr">
+            <a:spAutoFit/>
+          </a:bodyPr>
+          <a:lstStyle/>
+          <a:p>
+            <a:pPr>
+              <a:spcAft>
+                <a:spcPts val="200"/>
+              </a:spcAft>
+            </a:pPr>
+            <a:r>
+              <a:rPr sz="720" b="1" i="0">
+                <a:solidFill>
+                  <a:srgbClr val="1A1A1A"/>
+                </a:solidFill>
+                <a:latin typeface="Trenda IG Text"/>
+              </a:rPr>
+              <a:t>Eval gate</a:t>
+            </a:r>
+          </a:p>
+          <a:p>
+            <a:pPr>
+              <a:spcAft>
+                <a:spcPts val="200"/>
+              </a:spcAft>
+            </a:pPr>
+            <a:r>
+              <a:rPr sz="700" b="0" i="0">
+                <a:solidFill>
+                  <a:srgbClr val="4D4D4D"/>
+                </a:solidFill>
+                <a:latin typeface="Trenda IG Text"/>
+              </a:rPr>
+              <a:t>a new agent version ships only if it passes its eval set</a:t>
+            </a:r>
+          </a:p>
+        </p:txBody>
+      </p:sp>
+      <p:sp>
+        <p:nvSpPr>
+          <p:cNvPr id="27" name="Shape 24"/>
+          <p:cNvSpPr/>
+          <p:nvPr/>
+        </p:nvSpPr>
+        <p:spPr>
+          <a:xfrm>
+            <a:off x="521208" y="4393692"/>
+            <a:ext cx="1965959" cy="681227"/>
+          </a:xfrm>
+          <a:prstGeom prst="rect">
+            <a:avLst/>
+          </a:prstGeom>
+          <a:solidFill>
+            <a:srgbClr val="F5F5F5"/>
+          </a:solidFill>
+          <a:ln>
+            <a:noFill/>
+          </a:ln>
+          <a:effectLst/>
+        </p:spPr>
+        <p:style>
+          <a:lnRef idx="1">
+            <a:schemeClr val="accent1"/>
+          </a:lnRef>
+          <a:fillRef idx="3">
+            <a:schemeClr val="accent1"/>
+          </a:fillRef>
+          <a:effectRef idx="2">
+            <a:schemeClr val="accent1"/>
+          </a:effectRef>
+          <a:fontRef idx="minor">
+            <a:schemeClr val="lt1"/>
+          </a:fontRef>
+        </p:style>
+        <p:txBody>
+          <a:bodyPr rtlCol="0" anchor="ctr"/>
+          <a:lstStyle/>
+          <a:p/>
+        </p:txBody>
+      </p:sp>
+      <p:sp>
+        <p:nvSpPr>
+          <p:cNvPr id="28" name="Shape 25"/>
+          <p:cNvSpPr/>
+          <p:nvPr/>
+        </p:nvSpPr>
+        <p:spPr>
+          <a:xfrm>
+            <a:off x="521208" y="4393692"/>
+            <a:ext cx="36576" cy="681227"/>
+          </a:xfrm>
+          <a:prstGeom prst="rect">
+            <a:avLst/>
+          </a:prstGeom>
+          <a:solidFill>
+            <a:srgbClr val="00D6F2"/>
+          </a:solidFill>
+          <a:ln>
+            <a:noFill/>
+          </a:ln>
+          <a:effectLst/>
+        </p:spPr>
+        <p:style>
+          <a:lnRef idx="1">
+            <a:schemeClr val="accent1"/>
+          </a:lnRef>
+          <a:fillRef idx="3">
+            <a:schemeClr val="accent1"/>
+          </a:fillRef>
+          <a:effectRef idx="2">
+            <a:schemeClr val="accent1"/>
+          </a:effectRef>
+          <a:fontRef idx="minor">
+            <a:schemeClr val="lt1"/>
+          </a:fontRef>
+        </p:style>
+        <p:txBody>
+          <a:bodyPr rtlCol="0" anchor="ctr"/>
+          <a:lstStyle/>
+          <a:p/>
+        </p:txBody>
+      </p:sp>
+      <p:sp>
+        <p:nvSpPr>
+          <p:cNvPr id="29" name="Text 26"/>
+          <p:cNvSpPr txBox="1"/>
+          <p:nvPr/>
+        </p:nvSpPr>
+        <p:spPr>
+          <a:xfrm>
+            <a:off x="630936" y="4430268"/>
+            <a:ext cx="1819655" cy="608075"/>
+          </a:xfrm>
+          <a:prstGeom prst="rect">
+            <a:avLst/>
+          </a:prstGeom>
+          <a:noFill/>
+        </p:spPr>
+        <p:txBody>
+          <a:bodyPr wrap="square" lIns="0" rIns="0" tIns="0" bIns="0" anchor="ctr">
+            <a:spAutoFit/>
+          </a:bodyPr>
+          <a:lstStyle/>
+          <a:p>
+            <a:pPr>
+              <a:spcAft>
+                <a:spcPts val="200"/>
+              </a:spcAft>
+            </a:pPr>
+            <a:r>
+              <a:rPr sz="720" b="1" i="0">
+                <a:solidFill>
+                  <a:srgbClr val="1A1A1A"/>
+                </a:solidFill>
+                <a:latin typeface="Trenda IG Text"/>
+              </a:rPr>
+              <a:t>Pod by pod</a:t>
+            </a:r>
+          </a:p>
+          <a:p>
+            <a:pPr>
+              <a:spcAft>
+                <a:spcPts val="200"/>
+              </a:spcAft>
+            </a:pPr>
+            <a:r>
+              <a:rPr sz="700" b="0" i="0">
+                <a:solidFill>
+                  <a:srgbClr val="4D4D4D"/>
+                </a:solidFill>
+                <a:latin typeface="Trenda IG Text"/>
+              </a:rPr>
+              <a:t>onboard one pod, measure it, then the next</a:t>
+            </a:r>
+          </a:p>
+        </p:txBody>
+      </p:sp>
+      <p:sp>
+        <p:nvSpPr>
+          <p:cNvPr id="30" name="Shape 27"/>
+          <p:cNvSpPr/>
+          <p:nvPr/>
+        </p:nvSpPr>
+        <p:spPr>
+          <a:xfrm>
+            <a:off x="2706624" y="1783080"/>
+            <a:ext cx="2185415" cy="3310128"/>
+          </a:xfrm>
+          <a:prstGeom prst="roundRect">
+            <a:avLst>
+              <a:gd name="adj" fmla="val 2000"/>
+            </a:avLst>
+          </a:prstGeom>
+          <a:solidFill>
+            <a:srgbClr val="EEEEEE"/>
+          </a:solidFill>
+          <a:ln>
+            <a:noFill/>
+          </a:ln>
+          <a:effectLst/>
+        </p:spPr>
+        <p:style>
+          <a:lnRef idx="1">
+            <a:schemeClr val="accent1"/>
+          </a:lnRef>
+          <a:fillRef idx="3">
+            <a:schemeClr val="accent1"/>
+          </a:fillRef>
+          <a:effectRef idx="2">
+            <a:schemeClr val="accent1"/>
+          </a:effectRef>
+          <a:fontRef idx="minor">
+            <a:schemeClr val="lt1"/>
+          </a:fontRef>
+        </p:style>
+        <p:txBody>
+          <a:bodyPr rtlCol="0" anchor="ctr"/>
+          <a:lstStyle/>
+          <a:p/>
+        </p:txBody>
+      </p:sp>
+      <p:sp>
+        <p:nvSpPr>
+          <p:cNvPr id="31" name="Shape 28"/>
+          <p:cNvSpPr/>
+          <p:nvPr/>
+        </p:nvSpPr>
+        <p:spPr>
+          <a:xfrm>
+            <a:off x="2706624" y="1783080"/>
+            <a:ext cx="2185415" cy="256032"/>
+          </a:xfrm>
+          <a:prstGeom prst="rect">
+            <a:avLst/>
+          </a:prstGeom>
+          <a:solidFill>
+            <a:srgbClr val="E6E6E6"/>
+          </a:solidFill>
+          <a:ln>
+            <a:noFill/>
+          </a:ln>
+          <a:effectLst/>
+        </p:spPr>
+        <p:style>
+          <a:lnRef idx="1">
+            <a:schemeClr val="accent1"/>
+          </a:lnRef>
+          <a:fillRef idx="3">
+            <a:schemeClr val="accent1"/>
+          </a:fillRef>
+          <a:effectRef idx="2">
+            <a:schemeClr val="accent1"/>
+          </a:effectRef>
+          <a:fontRef idx="minor">
+            <a:schemeClr val="lt1"/>
+          </a:fontRef>
+        </p:style>
+        <p:txBody>
+          <a:bodyPr rtlCol="0" anchor="ctr"/>
+          <a:lstStyle/>
+          <a:p/>
+        </p:txBody>
+      </p:sp>
+      <p:sp>
+        <p:nvSpPr>
+          <p:cNvPr id="32" name="Text 29"/>
+          <p:cNvSpPr txBox="1"/>
+          <p:nvPr/>
+        </p:nvSpPr>
+        <p:spPr>
+          <a:xfrm>
+            <a:off x="2816352" y="1783080"/>
+            <a:ext cx="1965959" cy="256032"/>
+          </a:xfrm>
+          <a:prstGeom prst="rect">
+            <a:avLst/>
+          </a:prstGeom>
+          <a:noFill/>
+        </p:spPr>
+        <p:txBody>
+          <a:bodyPr wrap="square" lIns="0" rIns="0" tIns="0" bIns="0" anchor="ctr">
+            <a:spAutoFit/>
+          </a:bodyPr>
+          <a:lstStyle/>
+          <a:p>
+            <a:r>
+              <a:rPr sz="700" b="1" i="0" spc="120">
+                <a:solidFill>
+                  <a:srgbClr val="1A1A1A"/>
+                </a:solidFill>
+                <a:latin typeface="Trenda IG Text"/>
+              </a:rPr>
+              <a:t>HOW IT SCALES</a:t>
+            </a:r>
+            <a:r>
+              <a:rPr sz="700" b="0" i="0">
+                <a:solidFill>
+                  <a:srgbClr val="4D4D4D"/>
+                </a:solidFill>
+                <a:latin typeface="Trenda IG Text"/>
+              </a:rPr>
+              <a:t>   concurrency</a:t>
+            </a:r>
+          </a:p>
+        </p:txBody>
+      </p:sp>
+      <p:sp>
+        <p:nvSpPr>
+          <p:cNvPr id="33" name="Shape 30"/>
+          <p:cNvSpPr/>
+          <p:nvPr/>
+        </p:nvSpPr>
+        <p:spPr>
+          <a:xfrm>
+            <a:off x="2816352" y="2130552"/>
+            <a:ext cx="1965959" cy="681227"/>
+          </a:xfrm>
+          <a:prstGeom prst="rect">
+            <a:avLst/>
+          </a:prstGeom>
+          <a:solidFill>
+            <a:srgbClr val="F5F5F5"/>
+          </a:solidFill>
+          <a:ln>
+            <a:noFill/>
+          </a:ln>
+          <a:effectLst/>
+        </p:spPr>
+        <p:style>
+          <a:lnRef idx="1">
+            <a:schemeClr val="accent1"/>
+          </a:lnRef>
+          <a:fillRef idx="3">
+            <a:schemeClr val="accent1"/>
+          </a:fillRef>
+          <a:effectRef idx="2">
+            <a:schemeClr val="accent1"/>
+          </a:effectRef>
+          <a:fontRef idx="minor">
+            <a:schemeClr val="lt1"/>
+          </a:fontRef>
+        </p:style>
+        <p:txBody>
+          <a:bodyPr rtlCol="0" anchor="ctr"/>
+          <a:lstStyle/>
+          <a:p/>
+        </p:txBody>
+      </p:sp>
+      <p:sp>
+        <p:nvSpPr>
+          <p:cNvPr id="34" name="Shape 31"/>
+          <p:cNvSpPr/>
+          <p:nvPr/>
+        </p:nvSpPr>
+        <p:spPr>
+          <a:xfrm>
+            <a:off x="2816352" y="2130552"/>
+            <a:ext cx="36576" cy="681227"/>
+          </a:xfrm>
+          <a:prstGeom prst="rect">
+            <a:avLst/>
+          </a:prstGeom>
+          <a:solidFill>
+            <a:srgbClr val="00D6F2"/>
+          </a:solidFill>
+          <a:ln>
+            <a:noFill/>
+          </a:ln>
+          <a:effectLst/>
+        </p:spPr>
+        <p:style>
+          <a:lnRef idx="1">
+            <a:schemeClr val="accent1"/>
+          </a:lnRef>
+          <a:fillRef idx="3">
+            <a:schemeClr val="accent1"/>
+          </a:fillRef>
+          <a:effectRef idx="2">
+            <a:schemeClr val="accent1"/>
+          </a:effectRef>
+          <a:fontRef idx="minor">
+            <a:schemeClr val="lt1"/>
+          </a:fontRef>
+        </p:style>
+        <p:txBody>
+          <a:bodyPr rtlCol="0" anchor="ctr"/>
+          <a:lstStyle/>
+          <a:p/>
+        </p:txBody>
+      </p:sp>
+      <p:sp>
+        <p:nvSpPr>
+          <p:cNvPr id="35" name="Text 32"/>
+          <p:cNvSpPr txBox="1"/>
+          <p:nvPr/>
+        </p:nvSpPr>
+        <p:spPr>
+          <a:xfrm>
+            <a:off x="2926080" y="2167128"/>
+            <a:ext cx="1819655" cy="608075"/>
+          </a:xfrm>
+          <a:prstGeom prst="rect">
+            <a:avLst/>
+          </a:prstGeom>
+          <a:noFill/>
+        </p:spPr>
+        <p:txBody>
+          <a:bodyPr wrap="square" lIns="0" rIns="0" tIns="0" bIns="0" anchor="ctr">
+            <a:spAutoFit/>
+          </a:bodyPr>
+          <a:lstStyle/>
+          <a:p>
+            <a:pPr>
+              <a:spcAft>
+                <a:spcPts val="200"/>
+              </a:spcAft>
+            </a:pPr>
+            <a:r>
+              <a:rPr sz="720" b="1" i="0">
+                <a:solidFill>
+                  <a:srgbClr val="1A1A1A"/>
+                </a:solidFill>
+                <a:latin typeface="Trenda IG Text"/>
+              </a:rPr>
+              <a:t>One isolated run per request</a:t>
+            </a:r>
+          </a:p>
+          <a:p>
+            <a:pPr>
+              <a:spcAft>
+                <a:spcPts val="200"/>
+              </a:spcAft>
+            </a:pPr>
+            <a:r>
+              <a:rPr sz="700" b="0" i="0">
+                <a:solidFill>
+                  <a:srgbClr val="4D4D4D"/>
+                </a:solidFill>
+                <a:latin typeface="Trenda IG Text"/>
+              </a:rPr>
+              <a:t>own container, context, branch and checkpoint; no shared memory</a:t>
+            </a:r>
+          </a:p>
+        </p:txBody>
+      </p:sp>
+      <p:sp>
+        <p:nvSpPr>
+          <p:cNvPr id="36" name="Shape 33"/>
+          <p:cNvSpPr/>
+          <p:nvPr/>
+        </p:nvSpPr>
+        <p:spPr>
+          <a:xfrm>
+            <a:off x="2816352" y="2884932"/>
+            <a:ext cx="1965959" cy="681227"/>
+          </a:xfrm>
+          <a:prstGeom prst="rect">
+            <a:avLst/>
+          </a:prstGeom>
+          <a:solidFill>
+            <a:srgbClr val="F5F5F5"/>
+          </a:solidFill>
+          <a:ln>
+            <a:noFill/>
+          </a:ln>
+          <a:effectLst/>
+        </p:spPr>
+        <p:style>
+          <a:lnRef idx="1">
+            <a:schemeClr val="accent1"/>
+          </a:lnRef>
+          <a:fillRef idx="3">
+            <a:schemeClr val="accent1"/>
+          </a:fillRef>
+          <a:effectRef idx="2">
+            <a:schemeClr val="accent1"/>
+          </a:effectRef>
+          <a:fontRef idx="minor">
+            <a:schemeClr val="lt1"/>
+          </a:fontRef>
+        </p:style>
+        <p:txBody>
+          <a:bodyPr rtlCol="0" anchor="ctr"/>
+          <a:lstStyle/>
+          <a:p/>
+        </p:txBody>
+      </p:sp>
+      <p:sp>
+        <p:nvSpPr>
+          <p:cNvPr id="37" name="Shape 34"/>
+          <p:cNvSpPr/>
+          <p:nvPr/>
+        </p:nvSpPr>
+        <p:spPr>
+          <a:xfrm>
+            <a:off x="2816352" y="2884932"/>
+            <a:ext cx="36576" cy="681227"/>
+          </a:xfrm>
+          <a:prstGeom prst="rect">
+            <a:avLst/>
+          </a:prstGeom>
+          <a:solidFill>
+            <a:srgbClr val="00D6F2"/>
+          </a:solidFill>
+          <a:ln>
+            <a:noFill/>
+          </a:ln>
+          <a:effectLst/>
+        </p:spPr>
+        <p:style>
+          <a:lnRef idx="1">
+            <a:schemeClr val="accent1"/>
+          </a:lnRef>
+          <a:fillRef idx="3">
+            <a:schemeClr val="accent1"/>
+          </a:fillRef>
+          <a:effectRef idx="2">
+            <a:schemeClr val="accent1"/>
+          </a:effectRef>
+          <a:fontRef idx="minor">
+            <a:schemeClr val="lt1"/>
+          </a:fontRef>
+        </p:style>
+        <p:txBody>
+          <a:bodyPr rtlCol="0" anchor="ctr"/>
+          <a:lstStyle/>
+          <a:p/>
+        </p:txBody>
+      </p:sp>
+      <p:sp>
+        <p:nvSpPr>
+          <p:cNvPr id="38" name="Text 35"/>
+          <p:cNvSpPr txBox="1"/>
+          <p:nvPr/>
+        </p:nvSpPr>
+        <p:spPr>
+          <a:xfrm>
+            <a:off x="2926080" y="2921508"/>
+            <a:ext cx="1819655" cy="608075"/>
+          </a:xfrm>
+          <a:prstGeom prst="rect">
+            <a:avLst/>
+          </a:prstGeom>
+          <a:noFill/>
+        </p:spPr>
+        <p:txBody>
+          <a:bodyPr wrap="square" lIns="0" rIns="0" tIns="0" bIns="0" anchor="ctr">
+            <a:spAutoFit/>
+          </a:bodyPr>
+          <a:lstStyle/>
+          <a:p>
+            <a:pPr>
+              <a:spcAft>
+                <a:spcPts val="200"/>
+              </a:spcAft>
+            </a:pPr>
+            <a:r>
+              <a:rPr sz="720" b="1" i="0">
+                <a:solidFill>
+                  <a:srgbClr val="1A1A1A"/>
+                </a:solidFill>
+                <a:latin typeface="Trenda IG Text"/>
+              </a:rPr>
+              <a:t>Up to 3 runs per pod</a:t>
+            </a:r>
+          </a:p>
+          <a:p>
+            <a:pPr>
+              <a:spcAft>
+                <a:spcPts val="200"/>
+              </a:spcAft>
+            </a:pPr>
+            <a:r>
+              <a:rPr sz="700" b="0" i="0">
+                <a:solidFill>
+                  <a:srgbClr val="4D4D4D"/>
+                </a:solidFill>
+                <a:latin typeface="Trenda IG Text"/>
+              </a:rPr>
+              <a:t>fair share: no pod crowds out another</a:t>
+            </a:r>
+          </a:p>
+        </p:txBody>
+      </p:sp>
+      <p:sp>
+        <p:nvSpPr>
+          <p:cNvPr id="39" name="Shape 36"/>
+          <p:cNvSpPr/>
+          <p:nvPr/>
+        </p:nvSpPr>
+        <p:spPr>
+          <a:xfrm>
+            <a:off x="2816352" y="3639311"/>
+            <a:ext cx="1965959" cy="681227"/>
+          </a:xfrm>
+          <a:prstGeom prst="rect">
+            <a:avLst/>
+          </a:prstGeom>
+          <a:solidFill>
+            <a:srgbClr val="F5F5F5"/>
+          </a:solidFill>
+          <a:ln>
+            <a:noFill/>
+          </a:ln>
+          <a:effectLst/>
+        </p:spPr>
+        <p:style>
+          <a:lnRef idx="1">
+            <a:schemeClr val="accent1"/>
+          </a:lnRef>
+          <a:fillRef idx="3">
+            <a:schemeClr val="accent1"/>
+          </a:fillRef>
+          <a:effectRef idx="2">
+            <a:schemeClr val="accent1"/>
+          </a:effectRef>
+          <a:fontRef idx="minor">
+            <a:schemeClr val="lt1"/>
+          </a:fontRef>
+        </p:style>
+        <p:txBody>
+          <a:bodyPr rtlCol="0" anchor="ctr"/>
+          <a:lstStyle/>
+          <a:p/>
+        </p:txBody>
+      </p:sp>
+      <p:sp>
+        <p:nvSpPr>
+          <p:cNvPr id="40" name="Shape 37"/>
+          <p:cNvSpPr/>
+          <p:nvPr/>
+        </p:nvSpPr>
+        <p:spPr>
+          <a:xfrm>
+            <a:off x="2816352" y="3639311"/>
+            <a:ext cx="36576" cy="681227"/>
+          </a:xfrm>
+          <a:prstGeom prst="rect">
+            <a:avLst/>
+          </a:prstGeom>
+          <a:solidFill>
+            <a:srgbClr val="00D6F2"/>
+          </a:solidFill>
+          <a:ln>
+            <a:noFill/>
+          </a:ln>
+          <a:effectLst/>
+        </p:spPr>
+        <p:style>
+          <a:lnRef idx="1">
+            <a:schemeClr val="accent1"/>
+          </a:lnRef>
+          <a:fillRef idx="3">
+            <a:schemeClr val="accent1"/>
+          </a:fillRef>
+          <a:effectRef idx="2">
+            <a:schemeClr val="accent1"/>
+          </a:effectRef>
+          <a:fontRef idx="minor">
+            <a:schemeClr val="lt1"/>
+          </a:fontRef>
+        </p:style>
+        <p:txBody>
+          <a:bodyPr rtlCol="0" anchor="ctr"/>
+          <a:lstStyle/>
+          <a:p/>
+        </p:txBody>
+      </p:sp>
+      <p:sp>
+        <p:nvSpPr>
+          <p:cNvPr id="41" name="Text 38"/>
+          <p:cNvSpPr txBox="1"/>
+          <p:nvPr/>
+        </p:nvSpPr>
+        <p:spPr>
+          <a:xfrm>
+            <a:off x="2926080" y="3675887"/>
+            <a:ext cx="1819655" cy="608075"/>
+          </a:xfrm>
+          <a:prstGeom prst="rect">
+            <a:avLst/>
+          </a:prstGeom>
+          <a:noFill/>
+        </p:spPr>
+        <p:txBody>
+          <a:bodyPr wrap="square" lIns="0" rIns="0" tIns="0" bIns="0" anchor="ctr">
+            <a:spAutoFit/>
+          </a:bodyPr>
+          <a:lstStyle/>
+          <a:p>
+            <a:pPr>
+              <a:spcAft>
+                <a:spcPts val="200"/>
+              </a:spcAft>
+            </a:pPr>
+            <a:r>
+              <a:rPr sz="720" b="1" i="0">
+                <a:solidFill>
+                  <a:srgbClr val="1A1A1A"/>
+                </a:solidFill>
+                <a:latin typeface="Trenda IG Text"/>
+              </a:rPr>
+              <a:t>About 30 runs at once</a:t>
+            </a:r>
+          </a:p>
+          <a:p>
+            <a:pPr>
+              <a:spcAft>
+                <a:spcPts val="200"/>
+              </a:spcAft>
+            </a:pPr>
+            <a:r>
+              <a:rPr sz="700" b="0" i="0">
+                <a:solidFill>
+                  <a:srgbClr val="4D4D4D"/>
+                </a:solidFill>
+                <a:latin typeface="Trenda IG Text"/>
+              </a:rPr>
+              <a:t>set by model and API quotas; proposed, sized in the Phase 0 load test</a:t>
+            </a:r>
+          </a:p>
+        </p:txBody>
+      </p:sp>
+      <p:sp>
+        <p:nvSpPr>
+          <p:cNvPr id="42" name="Shape 39"/>
+          <p:cNvSpPr/>
+          <p:nvPr/>
+        </p:nvSpPr>
+        <p:spPr>
+          <a:xfrm>
+            <a:off x="2816352" y="4393692"/>
+            <a:ext cx="1965959" cy="681227"/>
+          </a:xfrm>
+          <a:prstGeom prst="rect">
+            <a:avLst/>
+          </a:prstGeom>
+          <a:solidFill>
+            <a:srgbClr val="F5F5F5"/>
+          </a:solidFill>
+          <a:ln>
+            <a:noFill/>
+          </a:ln>
+          <a:effectLst/>
+        </p:spPr>
+        <p:style>
+          <a:lnRef idx="1">
+            <a:schemeClr val="accent1"/>
+          </a:lnRef>
+          <a:fillRef idx="3">
+            <a:schemeClr val="accent1"/>
+          </a:fillRef>
+          <a:effectRef idx="2">
+            <a:schemeClr val="accent1"/>
+          </a:effectRef>
+          <a:fontRef idx="minor">
+            <a:schemeClr val="lt1"/>
+          </a:fontRef>
+        </p:style>
+        <p:txBody>
+          <a:bodyPr rtlCol="0" anchor="ctr"/>
+          <a:lstStyle/>
+          <a:p/>
+        </p:txBody>
+      </p:sp>
+      <p:sp>
+        <p:nvSpPr>
+          <p:cNvPr id="43" name="Shape 40"/>
+          <p:cNvSpPr/>
+          <p:nvPr/>
+        </p:nvSpPr>
+        <p:spPr>
+          <a:xfrm>
+            <a:off x="2816352" y="4393692"/>
+            <a:ext cx="36576" cy="681227"/>
+          </a:xfrm>
+          <a:prstGeom prst="rect">
+            <a:avLst/>
+          </a:prstGeom>
+          <a:solidFill>
+            <a:srgbClr val="00D6F2"/>
+          </a:solidFill>
+          <a:ln>
+            <a:noFill/>
+          </a:ln>
+          <a:effectLst/>
+        </p:spPr>
+        <p:style>
+          <a:lnRef idx="1">
+            <a:schemeClr val="accent1"/>
+          </a:lnRef>
+          <a:fillRef idx="3">
+            <a:schemeClr val="accent1"/>
+          </a:fillRef>
+          <a:effectRef idx="2">
+            <a:schemeClr val="accent1"/>
+          </a:effectRef>
+          <a:fontRef idx="minor">
+            <a:schemeClr val="lt1"/>
+          </a:fontRef>
+        </p:style>
+        <p:txBody>
+          <a:bodyPr rtlCol="0" anchor="ctr"/>
+          <a:lstStyle/>
+          <a:p/>
+        </p:txBody>
+      </p:sp>
+      <p:sp>
+        <p:nvSpPr>
+          <p:cNvPr id="44" name="Text 41"/>
+          <p:cNvSpPr txBox="1"/>
+          <p:nvPr/>
+        </p:nvSpPr>
+        <p:spPr>
+          <a:xfrm>
+            <a:off x="2926080" y="4430268"/>
+            <a:ext cx="1819655" cy="608075"/>
+          </a:xfrm>
+          <a:prstGeom prst="rect">
+            <a:avLst/>
+          </a:prstGeom>
+          <a:noFill/>
+        </p:spPr>
+        <p:txBody>
+          <a:bodyPr wrap="square" lIns="0" rIns="0" tIns="0" bIns="0" anchor="ctr">
+            <a:spAutoFit/>
+          </a:bodyPr>
+          <a:lstStyle/>
+          <a:p>
+            <a:pPr>
+              <a:spcAft>
+                <a:spcPts val="200"/>
+              </a:spcAft>
+            </a:pPr>
+            <a:r>
+              <a:rPr sz="720" b="1" i="0">
+                <a:solidFill>
+                  <a:srgbClr val="1A1A1A"/>
+                </a:solidFill>
+                <a:latin typeface="Trenda IG Text"/>
+              </a:rPr>
+              <a:t>Queued, never dropped</a:t>
+            </a:r>
+          </a:p>
+          <a:p>
+            <a:pPr>
+              <a:spcAft>
+                <a:spcPts val="200"/>
+              </a:spcAft>
+            </a:pPr>
+            <a:r>
+              <a:rPr sz="700" b="0" i="0">
+                <a:solidFill>
+                  <a:srgbClr val="4D4D4D"/>
+                </a:solidFill>
+                <a:latin typeface="Trenda IG Text"/>
+              </a:rPr>
+              <a:t>waits its turn, resumes from checkpoints; the wait time is measured</a:t>
+            </a:r>
+          </a:p>
+        </p:txBody>
+      </p:sp>
+      <p:sp>
+        <p:nvSpPr>
+          <p:cNvPr id="45" name="Shape 42"/>
+          <p:cNvSpPr/>
+          <p:nvPr/>
+        </p:nvSpPr>
+        <p:spPr>
+          <a:xfrm>
+            <a:off x="5001768" y="1783080"/>
+            <a:ext cx="2185415" cy="3310128"/>
+          </a:xfrm>
+          <a:prstGeom prst="roundRect">
+            <a:avLst>
+              <a:gd name="adj" fmla="val 2000"/>
+            </a:avLst>
+          </a:prstGeom>
+          <a:solidFill>
+            <a:srgbClr val="EEEEEE"/>
+          </a:solidFill>
+          <a:ln>
+            <a:noFill/>
+          </a:ln>
+          <a:effectLst/>
+        </p:spPr>
+        <p:style>
+          <a:lnRef idx="1">
+            <a:schemeClr val="accent1"/>
+          </a:lnRef>
+          <a:fillRef idx="3">
+            <a:schemeClr val="accent1"/>
+          </a:fillRef>
+          <a:effectRef idx="2">
+            <a:schemeClr val="accent1"/>
+          </a:effectRef>
+          <a:fontRef idx="minor">
+            <a:schemeClr val="lt1"/>
+          </a:fontRef>
+        </p:style>
+        <p:txBody>
+          <a:bodyPr rtlCol="0" anchor="ctr"/>
+          <a:lstStyle/>
+          <a:p/>
+        </p:txBody>
+      </p:sp>
+      <p:sp>
+        <p:nvSpPr>
+          <p:cNvPr id="46" name="Shape 43"/>
+          <p:cNvSpPr/>
+          <p:nvPr/>
+        </p:nvSpPr>
+        <p:spPr>
+          <a:xfrm>
+            <a:off x="5001768" y="1783080"/>
+            <a:ext cx="2185415" cy="256032"/>
+          </a:xfrm>
+          <a:prstGeom prst="rect">
+            <a:avLst/>
+          </a:prstGeom>
+          <a:solidFill>
+            <a:srgbClr val="E6E6E6"/>
+          </a:solidFill>
+          <a:ln>
+            <a:noFill/>
+          </a:ln>
+          <a:effectLst/>
+        </p:spPr>
+        <p:style>
+          <a:lnRef idx="1">
+            <a:schemeClr val="accent1"/>
+          </a:lnRef>
+          <a:fillRef idx="3">
+            <a:schemeClr val="accent1"/>
+          </a:fillRef>
+          <a:effectRef idx="2">
+            <a:schemeClr val="accent1"/>
+          </a:effectRef>
+          <a:fontRef idx="minor">
+            <a:schemeClr val="lt1"/>
+          </a:fontRef>
+        </p:style>
+        <p:txBody>
+          <a:bodyPr rtlCol="0" anchor="ctr"/>
+          <a:lstStyle/>
+          <a:p/>
+        </p:txBody>
+      </p:sp>
+      <p:sp>
+        <p:nvSpPr>
+          <p:cNvPr id="47" name="Text 44"/>
+          <p:cNvSpPr txBox="1"/>
+          <p:nvPr/>
+        </p:nvSpPr>
+        <p:spPr>
+          <a:xfrm>
+            <a:off x="5111496" y="1783080"/>
+            <a:ext cx="1965959" cy="256032"/>
+          </a:xfrm>
+          <a:prstGeom prst="rect">
+            <a:avLst/>
+          </a:prstGeom>
+          <a:noFill/>
+        </p:spPr>
+        <p:txBody>
+          <a:bodyPr wrap="square" lIns="0" rIns="0" tIns="0" bIns="0" anchor="ctr">
+            <a:spAutoFit/>
+          </a:bodyPr>
+          <a:lstStyle/>
+          <a:p>
+            <a:r>
+              <a:rPr sz="700" b="1" i="0" spc="120">
+                <a:solidFill>
+                  <a:srgbClr val="1A1A1A"/>
+                </a:solidFill>
+                <a:latin typeface="Trenda IG Text"/>
+              </a:rPr>
+              <a:t>HOW IT STAYS ACCURATE</a:t>
+            </a:r>
+            <a:r>
+              <a:rPr sz="700" b="0" i="0">
+                <a:solidFill>
+                  <a:srgbClr val="4D4D4D"/>
+                </a:solidFill>
+                <a:latin typeface="Trenda IG Text"/>
+              </a:rPr>
+              <a:t>   accuracy</a:t>
+            </a:r>
+          </a:p>
+        </p:txBody>
+      </p:sp>
+      <p:sp>
+        <p:nvSpPr>
+          <p:cNvPr id="48" name="Shape 45"/>
+          <p:cNvSpPr/>
+          <p:nvPr/>
+        </p:nvSpPr>
+        <p:spPr>
+          <a:xfrm>
+            <a:off x="5111496" y="2130552"/>
+            <a:ext cx="1965959" cy="681227"/>
+          </a:xfrm>
+          <a:prstGeom prst="rect">
+            <a:avLst/>
+          </a:prstGeom>
+          <a:solidFill>
+            <a:srgbClr val="F5F5F5"/>
+          </a:solidFill>
+          <a:ln>
+            <a:noFill/>
+          </a:ln>
+          <a:effectLst/>
+        </p:spPr>
+        <p:style>
+          <a:lnRef idx="1">
+            <a:schemeClr val="accent1"/>
+          </a:lnRef>
+          <a:fillRef idx="3">
+            <a:schemeClr val="accent1"/>
+          </a:fillRef>
+          <a:effectRef idx="2">
+            <a:schemeClr val="accent1"/>
+          </a:effectRef>
+          <a:fontRef idx="minor">
+            <a:schemeClr val="lt1"/>
+          </a:fontRef>
+        </p:style>
+        <p:txBody>
+          <a:bodyPr rtlCol="0" anchor="ctr"/>
+          <a:lstStyle/>
+          <a:p/>
+        </p:txBody>
+      </p:sp>
+      <p:sp>
+        <p:nvSpPr>
+          <p:cNvPr id="49" name="Shape 46"/>
+          <p:cNvSpPr/>
+          <p:nvPr/>
+        </p:nvSpPr>
+        <p:spPr>
+          <a:xfrm>
+            <a:off x="5111496" y="2130552"/>
+            <a:ext cx="36576" cy="681227"/>
+          </a:xfrm>
+          <a:prstGeom prst="rect">
+            <a:avLst/>
+          </a:prstGeom>
+          <a:solidFill>
+            <a:srgbClr val="00D6F2"/>
+          </a:solidFill>
+          <a:ln>
+            <a:noFill/>
+          </a:ln>
+          <a:effectLst/>
+        </p:spPr>
+        <p:style>
+          <a:lnRef idx="1">
+            <a:schemeClr val="accent1"/>
+          </a:lnRef>
+          <a:fillRef idx="3">
+            <a:schemeClr val="accent1"/>
+          </a:fillRef>
+          <a:effectRef idx="2">
+            <a:schemeClr val="accent1"/>
+          </a:effectRef>
+          <a:fontRef idx="minor">
+            <a:schemeClr val="lt1"/>
+          </a:fontRef>
+        </p:style>
+        <p:txBody>
+          <a:bodyPr rtlCol="0" anchor="ctr"/>
+          <a:lstStyle/>
+          <a:p/>
+        </p:txBody>
+      </p:sp>
+      <p:sp>
+        <p:nvSpPr>
+          <p:cNvPr id="50" name="Text 47"/>
+          <p:cNvSpPr txBox="1"/>
+          <p:nvPr/>
+        </p:nvSpPr>
+        <p:spPr>
+          <a:xfrm>
+            <a:off x="5221224" y="2167128"/>
+            <a:ext cx="1819655" cy="608075"/>
+          </a:xfrm>
+          <a:prstGeom prst="rect">
+            <a:avLst/>
+          </a:prstGeom>
+          <a:noFill/>
+        </p:spPr>
+        <p:txBody>
+          <a:bodyPr wrap="square" lIns="0" rIns="0" tIns="0" bIns="0" anchor="ctr">
+            <a:spAutoFit/>
+          </a:bodyPr>
+          <a:lstStyle/>
+          <a:p>
+            <a:pPr>
+              <a:spcAft>
+                <a:spcPts val="200"/>
+              </a:spcAft>
+            </a:pPr>
+            <a:r>
+              <a:rPr sz="720" b="1" i="0">
+                <a:solidFill>
+                  <a:srgbClr val="1A1A1A"/>
+                </a:solidFill>
+                <a:latin typeface="Trenda IG Text"/>
+              </a:rPr>
+              <a:t>Cited facts only</a:t>
+            </a:r>
+          </a:p>
+          <a:p>
+            <a:pPr>
+              <a:spcAft>
+                <a:spcPts val="200"/>
+              </a:spcAft>
+            </a:pPr>
+            <a:r>
+              <a:rPr sz="700" b="0" i="0">
+                <a:solidFill>
+                  <a:srgbClr val="4D4D4D"/>
+                </a:solidFill>
+                <a:latin typeface="Trenda IG Text"/>
+              </a:rPr>
+              <a:t>every fact from the graph carries its source; agents never guess</a:t>
+            </a:r>
+          </a:p>
+        </p:txBody>
+      </p:sp>
+      <p:sp>
+        <p:nvSpPr>
+          <p:cNvPr id="51" name="Shape 48"/>
+          <p:cNvSpPr/>
+          <p:nvPr/>
+        </p:nvSpPr>
+        <p:spPr>
+          <a:xfrm>
+            <a:off x="5111496" y="2884932"/>
+            <a:ext cx="1965959" cy="681227"/>
+          </a:xfrm>
+          <a:prstGeom prst="rect">
+            <a:avLst/>
+          </a:prstGeom>
+          <a:solidFill>
+            <a:srgbClr val="F5F5F5"/>
+          </a:solidFill>
+          <a:ln>
+            <a:noFill/>
+          </a:ln>
+          <a:effectLst/>
+        </p:spPr>
+        <p:style>
+          <a:lnRef idx="1">
+            <a:schemeClr val="accent1"/>
+          </a:lnRef>
+          <a:fillRef idx="3">
+            <a:schemeClr val="accent1"/>
+          </a:fillRef>
+          <a:effectRef idx="2">
+            <a:schemeClr val="accent1"/>
+          </a:effectRef>
+          <a:fontRef idx="minor">
+            <a:schemeClr val="lt1"/>
+          </a:fontRef>
+        </p:style>
+        <p:txBody>
+          <a:bodyPr rtlCol="0" anchor="ctr"/>
+          <a:lstStyle/>
+          <a:p/>
+        </p:txBody>
+      </p:sp>
+      <p:sp>
+        <p:nvSpPr>
+          <p:cNvPr id="52" name="Shape 49"/>
+          <p:cNvSpPr/>
+          <p:nvPr/>
+        </p:nvSpPr>
+        <p:spPr>
+          <a:xfrm>
+            <a:off x="5111496" y="2884932"/>
+            <a:ext cx="36576" cy="681227"/>
+          </a:xfrm>
+          <a:prstGeom prst="rect">
+            <a:avLst/>
+          </a:prstGeom>
+          <a:solidFill>
+            <a:srgbClr val="00D6F2"/>
+          </a:solidFill>
+          <a:ln>
+            <a:noFill/>
+          </a:ln>
+          <a:effectLst/>
+        </p:spPr>
+        <p:style>
+          <a:lnRef idx="1">
+            <a:schemeClr val="accent1"/>
+          </a:lnRef>
+          <a:fillRef idx="3">
+            <a:schemeClr val="accent1"/>
+          </a:fillRef>
+          <a:effectRef idx="2">
+            <a:schemeClr val="accent1"/>
+          </a:effectRef>
+          <a:fontRef idx="minor">
+            <a:schemeClr val="lt1"/>
+          </a:fontRef>
+        </p:style>
+        <p:txBody>
+          <a:bodyPr rtlCol="0" anchor="ctr"/>
+          <a:lstStyle/>
+          <a:p/>
+        </p:txBody>
+      </p:sp>
+      <p:sp>
+        <p:nvSpPr>
+          <p:cNvPr id="53" name="Text 50"/>
+          <p:cNvSpPr txBox="1"/>
+          <p:nvPr/>
+        </p:nvSpPr>
+        <p:spPr>
+          <a:xfrm>
+            <a:off x="5221224" y="2921508"/>
+            <a:ext cx="1819655" cy="608075"/>
+          </a:xfrm>
+          <a:prstGeom prst="rect">
+            <a:avLst/>
+          </a:prstGeom>
+          <a:noFill/>
+        </p:spPr>
+        <p:txBody>
+          <a:bodyPr wrap="square" lIns="0" rIns="0" tIns="0" bIns="0" anchor="ctr">
+            <a:spAutoFit/>
+          </a:bodyPr>
+          <a:lstStyle/>
+          <a:p>
+            <a:pPr>
+              <a:spcAft>
+                <a:spcPts val="200"/>
+              </a:spcAft>
+            </a:pPr>
+            <a:r>
+              <a:rPr sz="720" b="1" i="0">
+                <a:solidFill>
+                  <a:srgbClr val="1A1A1A"/>
+                </a:solidFill>
+                <a:latin typeface="Trenda IG Text"/>
+              </a:rPr>
+              <a:t>Same bar for every pod</a:t>
+            </a:r>
+          </a:p>
+          <a:p>
+            <a:pPr>
+              <a:spcAft>
+                <a:spcPts val="200"/>
+              </a:spcAft>
+            </a:pPr>
+            <a:r>
+              <a:rPr sz="700" b="0" i="0">
+                <a:solidFill>
+                  <a:srgbClr val="4D4D4D"/>
+                </a:solidFill>
+                <a:latin typeface="Trenda IG Text"/>
+              </a:rPr>
+              <a:t>every run scored before it moves; max 5 retries, then an owner</a:t>
+            </a:r>
+          </a:p>
+        </p:txBody>
+      </p:sp>
+      <p:sp>
+        <p:nvSpPr>
+          <p:cNvPr id="54" name="Shape 51"/>
+          <p:cNvSpPr/>
+          <p:nvPr/>
+        </p:nvSpPr>
+        <p:spPr>
+          <a:xfrm>
+            <a:off x="5111496" y="3639311"/>
+            <a:ext cx="1965959" cy="681227"/>
+          </a:xfrm>
+          <a:prstGeom prst="rect">
+            <a:avLst/>
+          </a:prstGeom>
+          <a:solidFill>
+            <a:srgbClr val="F5F5F5"/>
+          </a:solidFill>
+          <a:ln>
+            <a:noFill/>
+          </a:ln>
+          <a:effectLst/>
+        </p:spPr>
+        <p:style>
+          <a:lnRef idx="1">
+            <a:schemeClr val="accent1"/>
+          </a:lnRef>
+          <a:fillRef idx="3">
+            <a:schemeClr val="accent1"/>
+          </a:fillRef>
+          <a:effectRef idx="2">
+            <a:schemeClr val="accent1"/>
+          </a:effectRef>
+          <a:fontRef idx="minor">
+            <a:schemeClr val="lt1"/>
+          </a:fontRef>
+        </p:style>
+        <p:txBody>
+          <a:bodyPr rtlCol="0" anchor="ctr"/>
+          <a:lstStyle/>
+          <a:p/>
+        </p:txBody>
+      </p:sp>
+      <p:sp>
+        <p:nvSpPr>
+          <p:cNvPr id="55" name="Shape 52"/>
+          <p:cNvSpPr/>
+          <p:nvPr/>
+        </p:nvSpPr>
+        <p:spPr>
+          <a:xfrm>
+            <a:off x="5111496" y="3639311"/>
+            <a:ext cx="36576" cy="681227"/>
+          </a:xfrm>
+          <a:prstGeom prst="rect">
+            <a:avLst/>
+          </a:prstGeom>
+          <a:solidFill>
+            <a:srgbClr val="00D6F2"/>
+          </a:solidFill>
+          <a:ln>
+            <a:noFill/>
+          </a:ln>
+          <a:effectLst/>
+        </p:spPr>
+        <p:style>
+          <a:lnRef idx="1">
+            <a:schemeClr val="accent1"/>
+          </a:lnRef>
+          <a:fillRef idx="3">
+            <a:schemeClr val="accent1"/>
+          </a:fillRef>
+          <a:effectRef idx="2">
+            <a:schemeClr val="accent1"/>
+          </a:effectRef>
+          <a:fontRef idx="minor">
+            <a:schemeClr val="lt1"/>
+          </a:fontRef>
+        </p:style>
+        <p:txBody>
+          <a:bodyPr rtlCol="0" anchor="ctr"/>
+          <a:lstStyle/>
+          <a:p/>
+        </p:txBody>
+      </p:sp>
+      <p:sp>
+        <p:nvSpPr>
+          <p:cNvPr id="56" name="Text 53"/>
+          <p:cNvSpPr txBox="1"/>
+          <p:nvPr/>
+        </p:nvSpPr>
+        <p:spPr>
+          <a:xfrm>
+            <a:off x="5221224" y="3675887"/>
+            <a:ext cx="1819655" cy="608075"/>
+          </a:xfrm>
+          <a:prstGeom prst="rect">
+            <a:avLst/>
+          </a:prstGeom>
+          <a:noFill/>
+        </p:spPr>
+        <p:txBody>
+          <a:bodyPr wrap="square" lIns="0" rIns="0" tIns="0" bIns="0" anchor="ctr">
+            <a:spAutoFit/>
+          </a:bodyPr>
+          <a:lstStyle/>
+          <a:p>
+            <a:pPr>
+              <a:spcAft>
+                <a:spcPts val="200"/>
+              </a:spcAft>
+            </a:pPr>
+            <a:r>
+              <a:rPr sz="720" b="1" i="0">
+                <a:solidFill>
+                  <a:srgbClr val="1A1A1A"/>
+                </a:solidFill>
+                <a:latin typeface="Trenda IG Text"/>
+              </a:rPr>
+              <a:t>Load changes the wait, not the answer</a:t>
+            </a:r>
+          </a:p>
+          <a:p>
+            <a:pPr>
+              <a:spcAft>
+                <a:spcPts val="200"/>
+              </a:spcAft>
+            </a:pPr>
+            <a:r>
+              <a:rPr sz="700" b="0" i="0">
+                <a:solidFill>
+                  <a:srgbClr val="4D4D4D"/>
+                </a:solidFill>
+                <a:latin typeface="Trenda IG Text"/>
+              </a:rPr>
+              <a:t>runs share no memory; two pods on one object are sequenced</a:t>
+            </a:r>
+          </a:p>
+        </p:txBody>
+      </p:sp>
+      <p:sp>
+        <p:nvSpPr>
+          <p:cNvPr id="57" name="Shape 54"/>
+          <p:cNvSpPr/>
+          <p:nvPr/>
+        </p:nvSpPr>
+        <p:spPr>
+          <a:xfrm>
+            <a:off x="5111496" y="4393692"/>
+            <a:ext cx="1965959" cy="681227"/>
+          </a:xfrm>
+          <a:prstGeom prst="rect">
+            <a:avLst/>
+          </a:prstGeom>
+          <a:solidFill>
+            <a:srgbClr val="F5F5F5"/>
+          </a:solidFill>
+          <a:ln>
+            <a:noFill/>
+          </a:ln>
+          <a:effectLst/>
+        </p:spPr>
+        <p:style>
+          <a:lnRef idx="1">
+            <a:schemeClr val="accent1"/>
+          </a:lnRef>
+          <a:fillRef idx="3">
+            <a:schemeClr val="accent1"/>
+          </a:fillRef>
+          <a:effectRef idx="2">
+            <a:schemeClr val="accent1"/>
+          </a:effectRef>
+          <a:fontRef idx="minor">
+            <a:schemeClr val="lt1"/>
+          </a:fontRef>
+        </p:style>
+        <p:txBody>
+          <a:bodyPr rtlCol="0" anchor="ctr"/>
+          <a:lstStyle/>
+          <a:p/>
+        </p:txBody>
+      </p:sp>
+      <p:sp>
+        <p:nvSpPr>
+          <p:cNvPr id="58" name="Shape 55"/>
+          <p:cNvSpPr/>
+          <p:nvPr/>
+        </p:nvSpPr>
+        <p:spPr>
+          <a:xfrm>
+            <a:off x="5111496" y="4393692"/>
+            <a:ext cx="36576" cy="681227"/>
+          </a:xfrm>
+          <a:prstGeom prst="rect">
+            <a:avLst/>
+          </a:prstGeom>
+          <a:solidFill>
+            <a:srgbClr val="00D6F2"/>
+          </a:solidFill>
+          <a:ln>
+            <a:noFill/>
+          </a:ln>
+          <a:effectLst/>
+        </p:spPr>
+        <p:style>
+          <a:lnRef idx="1">
+            <a:schemeClr val="accent1"/>
+          </a:lnRef>
+          <a:fillRef idx="3">
+            <a:schemeClr val="accent1"/>
+          </a:fillRef>
+          <a:effectRef idx="2">
+            <a:schemeClr val="accent1"/>
+          </a:effectRef>
+          <a:fontRef idx="minor">
+            <a:schemeClr val="lt1"/>
+          </a:fontRef>
+        </p:style>
+        <p:txBody>
+          <a:bodyPr rtlCol="0" anchor="ctr"/>
+          <a:lstStyle/>
+          <a:p/>
+        </p:txBody>
+      </p:sp>
+      <p:sp>
+        <p:nvSpPr>
+          <p:cNvPr id="59" name="Text 56"/>
+          <p:cNvSpPr txBox="1"/>
+          <p:nvPr/>
+        </p:nvSpPr>
+        <p:spPr>
+          <a:xfrm>
+            <a:off x="5221224" y="4430268"/>
+            <a:ext cx="1819655" cy="608075"/>
+          </a:xfrm>
+          <a:prstGeom prst="rect">
+            <a:avLst/>
+          </a:prstGeom>
+          <a:noFill/>
+        </p:spPr>
+        <p:txBody>
+          <a:bodyPr wrap="square" lIns="0" rIns="0" tIns="0" bIns="0" anchor="ctr">
+            <a:spAutoFit/>
+          </a:bodyPr>
+          <a:lstStyle/>
+          <a:p>
+            <a:pPr>
+              <a:spcAft>
+                <a:spcPts val="200"/>
+              </a:spcAft>
+            </a:pPr>
+            <a:r>
+              <a:rPr sz="720" b="1" i="0">
+                <a:solidFill>
+                  <a:srgbClr val="1A1A1A"/>
+                </a:solidFill>
+                <a:latin typeface="Trenda IG Text"/>
+              </a:rPr>
+              <a:t>Measured every run</a:t>
+            </a:r>
+          </a:p>
+          <a:p>
+            <a:pPr>
+              <a:spcAft>
+                <a:spcPts val="200"/>
+              </a:spcAft>
+            </a:pPr>
+            <a:r>
+              <a:rPr sz="700" b="0" i="0">
+                <a:solidFill>
+                  <a:srgbClr val="4D4D4D"/>
+                </a:solidFill>
+                <a:latin typeface="Trenda IG Text"/>
+              </a:rPr>
+              <a:t>eval score per agent and pod, first-pass approval, defects after release</a:t>
+            </a:r>
+          </a:p>
+        </p:txBody>
+      </p:sp>
+      <p:sp>
+        <p:nvSpPr>
+          <p:cNvPr id="60" name="Shape 57"/>
+          <p:cNvSpPr/>
+          <p:nvPr/>
+        </p:nvSpPr>
+        <p:spPr>
+          <a:xfrm>
+            <a:off x="7296912" y="1783080"/>
+            <a:ext cx="2185415" cy="3310128"/>
+          </a:xfrm>
+          <a:prstGeom prst="roundRect">
+            <a:avLst>
+              <a:gd name="adj" fmla="val 2000"/>
+            </a:avLst>
+          </a:prstGeom>
+          <a:solidFill>
+            <a:srgbClr val="EEEEEE"/>
+          </a:solidFill>
+          <a:ln>
+            <a:noFill/>
+          </a:ln>
+          <a:effectLst/>
+        </p:spPr>
+        <p:style>
+          <a:lnRef idx="1">
+            <a:schemeClr val="accent1"/>
+          </a:lnRef>
+          <a:fillRef idx="3">
+            <a:schemeClr val="accent1"/>
+          </a:fillRef>
+          <a:effectRef idx="2">
+            <a:schemeClr val="accent1"/>
+          </a:effectRef>
+          <a:fontRef idx="minor">
+            <a:schemeClr val="lt1"/>
+          </a:fontRef>
+        </p:style>
+        <p:txBody>
+          <a:bodyPr rtlCol="0" anchor="ctr"/>
+          <a:lstStyle/>
+          <a:p/>
+        </p:txBody>
+      </p:sp>
+      <p:sp>
+        <p:nvSpPr>
+          <p:cNvPr id="61" name="Shape 58"/>
+          <p:cNvSpPr/>
+          <p:nvPr/>
+        </p:nvSpPr>
+        <p:spPr>
+          <a:xfrm>
+            <a:off x="7296912" y="1783080"/>
+            <a:ext cx="2185415" cy="256032"/>
+          </a:xfrm>
+          <a:prstGeom prst="rect">
+            <a:avLst/>
+          </a:prstGeom>
+          <a:solidFill>
+            <a:srgbClr val="E6E6E6"/>
+          </a:solidFill>
+          <a:ln>
+            <a:noFill/>
+          </a:ln>
+          <a:effectLst/>
+        </p:spPr>
+        <p:style>
+          <a:lnRef idx="1">
+            <a:schemeClr val="accent1"/>
+          </a:lnRef>
+          <a:fillRef idx="3">
+            <a:schemeClr val="accent1"/>
+          </a:fillRef>
+          <a:effectRef idx="2">
+            <a:schemeClr val="accent1"/>
+          </a:effectRef>
+          <a:fontRef idx="minor">
+            <a:schemeClr val="lt1"/>
+          </a:fontRef>
+        </p:style>
+        <p:txBody>
+          <a:bodyPr rtlCol="0" anchor="ctr"/>
+          <a:lstStyle/>
+          <a:p/>
+        </p:txBody>
+      </p:sp>
+      <p:sp>
+        <p:nvSpPr>
+          <p:cNvPr id="62" name="Text 59"/>
+          <p:cNvSpPr txBox="1"/>
+          <p:nvPr/>
+        </p:nvSpPr>
+        <p:spPr>
+          <a:xfrm>
+            <a:off x="7406640" y="1783080"/>
+            <a:ext cx="1965959" cy="256032"/>
+          </a:xfrm>
+          <a:prstGeom prst="rect">
+            <a:avLst/>
+          </a:prstGeom>
+          <a:noFill/>
+        </p:spPr>
+        <p:txBody>
+          <a:bodyPr wrap="square" lIns="0" rIns="0" tIns="0" bIns="0" anchor="ctr">
+            <a:spAutoFit/>
+          </a:bodyPr>
+          <a:lstStyle/>
+          <a:p>
+            <a:r>
+              <a:rPr sz="700" b="1" i="0" spc="120">
+                <a:solidFill>
+                  <a:srgbClr val="1A1A1A"/>
+                </a:solidFill>
+                <a:latin typeface="Trenda IG Text"/>
+              </a:rPr>
+              <a:t>HOW WE PROTECT DATA</a:t>
+            </a:r>
+            <a:r>
+              <a:rPr sz="700" b="0" i="0">
+                <a:solidFill>
+                  <a:srgbClr val="4D4D4D"/>
+                </a:solidFill>
+                <a:latin typeface="Trenda IG Text"/>
+              </a:rPr>
+              <a:t>   measured</a:t>
+            </a:r>
+          </a:p>
+        </p:txBody>
+      </p:sp>
+      <p:sp>
+        <p:nvSpPr>
+          <p:cNvPr id="63" name="Shape 60"/>
+          <p:cNvSpPr/>
+          <p:nvPr/>
+        </p:nvSpPr>
+        <p:spPr>
+          <a:xfrm>
+            <a:off x="7406640" y="2130552"/>
+            <a:ext cx="1965959" cy="681227"/>
+          </a:xfrm>
+          <a:prstGeom prst="rect">
+            <a:avLst/>
+          </a:prstGeom>
+          <a:solidFill>
+            <a:srgbClr val="F5F5F5"/>
+          </a:solidFill>
+          <a:ln>
+            <a:noFill/>
+          </a:ln>
+          <a:effectLst/>
+        </p:spPr>
+        <p:style>
+          <a:lnRef idx="1">
+            <a:schemeClr val="accent1"/>
+          </a:lnRef>
+          <a:fillRef idx="3">
+            <a:schemeClr val="accent1"/>
+          </a:fillRef>
+          <a:effectRef idx="2">
+            <a:schemeClr val="accent1"/>
+          </a:effectRef>
+          <a:fontRef idx="minor">
+            <a:schemeClr val="lt1"/>
+          </a:fontRef>
+        </p:style>
+        <p:txBody>
+          <a:bodyPr rtlCol="0" anchor="ctr"/>
+          <a:lstStyle/>
+          <a:p/>
+        </p:txBody>
+      </p:sp>
+      <p:sp>
+        <p:nvSpPr>
+          <p:cNvPr id="64" name="Shape 61"/>
+          <p:cNvSpPr/>
+          <p:nvPr/>
+        </p:nvSpPr>
+        <p:spPr>
+          <a:xfrm>
+            <a:off x="7406640" y="2130552"/>
+            <a:ext cx="36576" cy="681227"/>
+          </a:xfrm>
+          <a:prstGeom prst="rect">
+            <a:avLst/>
+          </a:prstGeom>
+          <a:solidFill>
+            <a:srgbClr val="00D6F2"/>
+          </a:solidFill>
+          <a:ln>
+            <a:noFill/>
+          </a:ln>
+          <a:effectLst/>
+        </p:spPr>
+        <p:style>
+          <a:lnRef idx="1">
+            <a:schemeClr val="accent1"/>
+          </a:lnRef>
+          <a:fillRef idx="3">
+            <a:schemeClr val="accent1"/>
+          </a:fillRef>
+          <a:effectRef idx="2">
+            <a:schemeClr val="accent1"/>
+          </a:effectRef>
+          <a:fontRef idx="minor">
+            <a:schemeClr val="lt1"/>
+          </a:fontRef>
+        </p:style>
+        <p:txBody>
+          <a:bodyPr rtlCol="0" anchor="ctr"/>
+          <a:lstStyle/>
+          <a:p/>
+        </p:txBody>
+      </p:sp>
+      <p:sp>
+        <p:nvSpPr>
+          <p:cNvPr id="65" name="Text 62"/>
+          <p:cNvSpPr txBox="1"/>
+          <p:nvPr/>
+        </p:nvSpPr>
+        <p:spPr>
+          <a:xfrm>
+            <a:off x="7516367" y="2167128"/>
+            <a:ext cx="1819655" cy="608075"/>
+          </a:xfrm>
+          <a:prstGeom prst="rect">
+            <a:avLst/>
+          </a:prstGeom>
+          <a:noFill/>
+        </p:spPr>
+        <p:txBody>
+          <a:bodyPr wrap="square" lIns="0" rIns="0" tIns="0" bIns="0" anchor="ctr">
+            <a:spAutoFit/>
+          </a:bodyPr>
+          <a:lstStyle/>
+          <a:p>
+            <a:pPr>
+              <a:spcAft>
+                <a:spcPts val="200"/>
+              </a:spcAft>
+            </a:pPr>
+            <a:r>
+              <a:rPr sz="720" b="1" i="0">
+                <a:solidFill>
+                  <a:srgbClr val="1A1A1A"/>
+                </a:solidFill>
+                <a:latin typeface="Trenda IG Text"/>
+              </a:rPr>
+              <a:t>Classified and approved</a:t>
+            </a:r>
+          </a:p>
+          <a:p>
+            <a:pPr>
+              <a:spcAft>
+                <a:spcPts val="200"/>
+              </a:spcAft>
+            </a:pPr>
+            <a:r>
+              <a:rPr sz="700" b="0" i="0">
+                <a:solidFill>
+                  <a:srgbClr val="4D4D4D"/>
+                </a:solidFill>
+                <a:latin typeface="Trenda IG Text"/>
+              </a:rPr>
+              <a:t>share of in-scope sensitive fields classified by DLP and approved by a Collibra steward; target 100% before use</a:t>
+            </a:r>
+          </a:p>
+        </p:txBody>
+      </p:sp>
+      <p:sp>
+        <p:nvSpPr>
+          <p:cNvPr id="66" name="Shape 63"/>
+          <p:cNvSpPr/>
+          <p:nvPr/>
+        </p:nvSpPr>
+        <p:spPr>
+          <a:xfrm>
+            <a:off x="7406640" y="2884932"/>
+            <a:ext cx="1965959" cy="681227"/>
+          </a:xfrm>
+          <a:prstGeom prst="rect">
+            <a:avLst/>
+          </a:prstGeom>
+          <a:solidFill>
+            <a:srgbClr val="F5F5F5"/>
+          </a:solidFill>
+          <a:ln>
+            <a:noFill/>
+          </a:ln>
+          <a:effectLst/>
+        </p:spPr>
+        <p:style>
+          <a:lnRef idx="1">
+            <a:schemeClr val="accent1"/>
+          </a:lnRef>
+          <a:fillRef idx="3">
+            <a:schemeClr val="accent1"/>
+          </a:fillRef>
+          <a:effectRef idx="2">
+            <a:schemeClr val="accent1"/>
+          </a:effectRef>
+          <a:fontRef idx="minor">
+            <a:schemeClr val="lt1"/>
+          </a:fontRef>
+        </p:style>
+        <p:txBody>
+          <a:bodyPr rtlCol="0" anchor="ctr"/>
+          <a:lstStyle/>
+          <a:p/>
+        </p:txBody>
+      </p:sp>
+      <p:sp>
+        <p:nvSpPr>
+          <p:cNvPr id="67" name="Shape 64"/>
+          <p:cNvSpPr/>
+          <p:nvPr/>
+        </p:nvSpPr>
+        <p:spPr>
+          <a:xfrm>
+            <a:off x="7406640" y="2884932"/>
+            <a:ext cx="36576" cy="681227"/>
+          </a:xfrm>
+          <a:prstGeom prst="rect">
+            <a:avLst/>
+          </a:prstGeom>
+          <a:solidFill>
+            <a:srgbClr val="00D6F2"/>
+          </a:solidFill>
+          <a:ln>
+            <a:noFill/>
+          </a:ln>
+          <a:effectLst/>
+        </p:spPr>
+        <p:style>
+          <a:lnRef idx="1">
+            <a:schemeClr val="accent1"/>
+          </a:lnRef>
+          <a:fillRef idx="3">
+            <a:schemeClr val="accent1"/>
+          </a:fillRef>
+          <a:effectRef idx="2">
+            <a:schemeClr val="accent1"/>
+          </a:effectRef>
+          <a:fontRef idx="minor">
+            <a:schemeClr val="lt1"/>
+          </a:fontRef>
+        </p:style>
+        <p:txBody>
+          <a:bodyPr rtlCol="0" anchor="ctr"/>
+          <a:lstStyle/>
+          <a:p/>
+        </p:txBody>
+      </p:sp>
+      <p:sp>
+        <p:nvSpPr>
+          <p:cNvPr id="68" name="Text 65"/>
+          <p:cNvSpPr txBox="1"/>
+          <p:nvPr/>
+        </p:nvSpPr>
+        <p:spPr>
+          <a:xfrm>
+            <a:off x="7516367" y="2921508"/>
+            <a:ext cx="1819655" cy="608075"/>
+          </a:xfrm>
+          <a:prstGeom prst="rect">
+            <a:avLst/>
+          </a:prstGeom>
+          <a:noFill/>
+        </p:spPr>
+        <p:txBody>
+          <a:bodyPr wrap="square" lIns="0" rIns="0" tIns="0" bIns="0" anchor="ctr">
+            <a:spAutoFit/>
+          </a:bodyPr>
+          <a:lstStyle/>
+          <a:p>
+            <a:pPr>
+              <a:spcAft>
+                <a:spcPts val="200"/>
+              </a:spcAft>
+            </a:pPr>
+            <a:r>
+              <a:rPr sz="720" b="1" i="0">
+                <a:solidFill>
+                  <a:srgbClr val="1A1A1A"/>
+                </a:solidFill>
+                <a:latin typeface="Trenda IG Text"/>
+              </a:rPr>
+              <a:t>Masked and verified</a:t>
+            </a:r>
+          </a:p>
+          <a:p>
+            <a:pPr>
+              <a:spcAft>
+                <a:spcPts val="200"/>
+              </a:spcAft>
+            </a:pPr>
+            <a:r>
+              <a:rPr sz="700" b="0" i="0">
+                <a:solidFill>
+                  <a:srgbClr val="4D4D4D"/>
+                </a:solidFill>
+                <a:latin typeface="Trenda IG Text"/>
+              </a:rPr>
+              <a:t>policy tags applied and checked against the schema every run; drift flagged</a:t>
+            </a:r>
+          </a:p>
+        </p:txBody>
+      </p:sp>
+      <p:sp>
+        <p:nvSpPr>
+          <p:cNvPr id="69" name="Shape 66"/>
+          <p:cNvSpPr/>
+          <p:nvPr/>
+        </p:nvSpPr>
+        <p:spPr>
+          <a:xfrm>
+            <a:off x="7406640" y="3639311"/>
+            <a:ext cx="1965959" cy="681227"/>
+          </a:xfrm>
+          <a:prstGeom prst="rect">
+            <a:avLst/>
+          </a:prstGeom>
+          <a:solidFill>
+            <a:srgbClr val="F5F5F5"/>
+          </a:solidFill>
+          <a:ln>
+            <a:noFill/>
+          </a:ln>
+          <a:effectLst/>
+        </p:spPr>
+        <p:style>
+          <a:lnRef idx="1">
+            <a:schemeClr val="accent1"/>
+          </a:lnRef>
+          <a:fillRef idx="3">
+            <a:schemeClr val="accent1"/>
+          </a:fillRef>
+          <a:effectRef idx="2">
+            <a:schemeClr val="accent1"/>
+          </a:effectRef>
+          <a:fontRef idx="minor">
+            <a:schemeClr val="lt1"/>
+          </a:fontRef>
+        </p:style>
+        <p:txBody>
+          <a:bodyPr rtlCol="0" anchor="ctr"/>
+          <a:lstStyle/>
+          <a:p/>
+        </p:txBody>
+      </p:sp>
+      <p:sp>
+        <p:nvSpPr>
+          <p:cNvPr id="70" name="Shape 67"/>
+          <p:cNvSpPr/>
+          <p:nvPr/>
+        </p:nvSpPr>
+        <p:spPr>
+          <a:xfrm>
+            <a:off x="7406640" y="3639311"/>
+            <a:ext cx="36576" cy="681227"/>
+          </a:xfrm>
+          <a:prstGeom prst="rect">
+            <a:avLst/>
+          </a:prstGeom>
+          <a:solidFill>
+            <a:srgbClr val="00D6F2"/>
+          </a:solidFill>
+          <a:ln>
+            <a:noFill/>
+          </a:ln>
+          <a:effectLst/>
+        </p:spPr>
+        <p:style>
+          <a:lnRef idx="1">
+            <a:schemeClr val="accent1"/>
+          </a:lnRef>
+          <a:fillRef idx="3">
+            <a:schemeClr val="accent1"/>
+          </a:fillRef>
+          <a:effectRef idx="2">
+            <a:schemeClr val="accent1"/>
+          </a:effectRef>
+          <a:fontRef idx="minor">
+            <a:schemeClr val="lt1"/>
+          </a:fontRef>
+        </p:style>
+        <p:txBody>
+          <a:bodyPr rtlCol="0" anchor="ctr"/>
+          <a:lstStyle/>
+          <a:p/>
+        </p:txBody>
+      </p:sp>
+      <p:sp>
+        <p:nvSpPr>
+          <p:cNvPr id="71" name="Text 68"/>
+          <p:cNvSpPr txBox="1"/>
+          <p:nvPr/>
+        </p:nvSpPr>
+        <p:spPr>
+          <a:xfrm>
+            <a:off x="7516367" y="3675887"/>
+            <a:ext cx="1819655" cy="608075"/>
+          </a:xfrm>
+          <a:prstGeom prst="rect">
+            <a:avLst/>
+          </a:prstGeom>
+          <a:noFill/>
+        </p:spPr>
+        <p:txBody>
+          <a:bodyPr wrap="square" lIns="0" rIns="0" tIns="0" bIns="0" anchor="ctr">
+            <a:spAutoFit/>
+          </a:bodyPr>
+          <a:lstStyle/>
+          <a:p>
+            <a:pPr>
+              <a:spcAft>
+                <a:spcPts val="200"/>
+              </a:spcAft>
+            </a:pPr>
+            <a:r>
+              <a:rPr sz="720" b="1" i="0">
+                <a:solidFill>
+                  <a:srgbClr val="1A1A1A"/>
+                </a:solidFill>
+                <a:latin typeface="Trenda IG Text"/>
+              </a:rPr>
+              <a:t>Zero unauthorized access</a:t>
+            </a:r>
+          </a:p>
+          <a:p>
+            <a:pPr>
+              <a:spcAft>
+                <a:spcPts val="200"/>
+              </a:spcAft>
+            </a:pPr>
+            <a:r>
+              <a:rPr sz="700" b="0" i="0">
+                <a:solidFill>
+                  <a:srgbClr val="4D4D4D"/>
+                </a:solidFill>
+                <a:latin typeface="Trenda IG Text"/>
+              </a:rPr>
+              <a:t>negative-access tests each release: agent identities cannot read raw PHI</a:t>
+            </a:r>
+          </a:p>
+        </p:txBody>
+      </p:sp>
+      <p:sp>
+        <p:nvSpPr>
+          <p:cNvPr id="72" name="Shape 69"/>
+          <p:cNvSpPr/>
+          <p:nvPr/>
+        </p:nvSpPr>
+        <p:spPr>
+          <a:xfrm>
+            <a:off x="7406640" y="4393692"/>
+            <a:ext cx="1965959" cy="681227"/>
+          </a:xfrm>
+          <a:prstGeom prst="rect">
+            <a:avLst/>
+          </a:prstGeom>
+          <a:solidFill>
+            <a:srgbClr val="F5F5F5"/>
+          </a:solidFill>
+          <a:ln>
+            <a:noFill/>
+          </a:ln>
+          <a:effectLst/>
+        </p:spPr>
+        <p:style>
+          <a:lnRef idx="1">
+            <a:schemeClr val="accent1"/>
+          </a:lnRef>
+          <a:fillRef idx="3">
+            <a:schemeClr val="accent1"/>
+          </a:fillRef>
+          <a:effectRef idx="2">
+            <a:schemeClr val="accent1"/>
+          </a:effectRef>
+          <a:fontRef idx="minor">
+            <a:schemeClr val="lt1"/>
+          </a:fontRef>
+        </p:style>
+        <p:txBody>
+          <a:bodyPr rtlCol="0" anchor="ctr"/>
+          <a:lstStyle/>
+          <a:p/>
+        </p:txBody>
+      </p:sp>
+      <p:sp>
+        <p:nvSpPr>
+          <p:cNvPr id="73" name="Shape 70"/>
+          <p:cNvSpPr/>
+          <p:nvPr/>
+        </p:nvSpPr>
+        <p:spPr>
+          <a:xfrm>
+            <a:off x="7406640" y="4393692"/>
+            <a:ext cx="36576" cy="681227"/>
+          </a:xfrm>
+          <a:prstGeom prst="rect">
+            <a:avLst/>
+          </a:prstGeom>
+          <a:solidFill>
+            <a:srgbClr val="00D6F2"/>
+          </a:solidFill>
+          <a:ln>
+            <a:noFill/>
+          </a:ln>
+          <a:effectLst/>
+        </p:spPr>
+        <p:style>
+          <a:lnRef idx="1">
+            <a:schemeClr val="accent1"/>
+          </a:lnRef>
+          <a:fillRef idx="3">
+            <a:schemeClr val="accent1"/>
+          </a:fillRef>
+          <a:effectRef idx="2">
+            <a:schemeClr val="accent1"/>
+          </a:effectRef>
+          <a:fontRef idx="minor">
+            <a:schemeClr val="lt1"/>
+          </a:fontRef>
+        </p:style>
+        <p:txBody>
+          <a:bodyPr rtlCol="0" anchor="ctr"/>
+          <a:lstStyle/>
+          <a:p/>
+        </p:txBody>
+      </p:sp>
+      <p:sp>
+        <p:nvSpPr>
+          <p:cNvPr id="74" name="Text 71"/>
+          <p:cNvSpPr txBox="1"/>
+          <p:nvPr/>
+        </p:nvSpPr>
+        <p:spPr>
+          <a:xfrm>
+            <a:off x="7516367" y="4430268"/>
+            <a:ext cx="1819655" cy="608075"/>
+          </a:xfrm>
+          <a:prstGeom prst="rect">
+            <a:avLst/>
+          </a:prstGeom>
+          <a:noFill/>
+        </p:spPr>
+        <p:txBody>
+          <a:bodyPr wrap="square" lIns="0" rIns="0" tIns="0" bIns="0" anchor="ctr">
+            <a:spAutoFit/>
+          </a:bodyPr>
+          <a:lstStyle/>
+          <a:p>
+            <a:pPr>
+              <a:spcAft>
+                <a:spcPts val="200"/>
+              </a:spcAft>
+            </a:pPr>
+            <a:r>
+              <a:rPr sz="720" b="1" i="0">
+                <a:solidFill>
+                  <a:srgbClr val="1A1A1A"/>
+                </a:solidFill>
+                <a:latin typeface="Trenda IG Text"/>
+              </a:rPr>
+              <a:t>Every access audited</a:t>
+            </a:r>
+          </a:p>
+          <a:p>
+            <a:pPr>
+              <a:spcAft>
+                <a:spcPts val="200"/>
+              </a:spcAft>
+            </a:pPr>
+            <a:r>
+              <a:rPr sz="700" b="0" i="0">
+                <a:solidFill>
+                  <a:srgbClr val="4D4D4D"/>
+                </a:solidFill>
+                <a:latin typeface="Trenda IG Text"/>
+              </a:rPr>
+              <a:t>PHI access logged, release reconciled, access reviewed each quarter</a:t>
+            </a:r>
+          </a:p>
+        </p:txBody>
+      </p:sp>
+      <p:sp>
+        <p:nvSpPr>
+          <p:cNvPr id="75" name="Shape 72"/>
+          <p:cNvSpPr/>
+          <p:nvPr/>
+        </p:nvSpPr>
+        <p:spPr>
+          <a:xfrm>
+            <a:off x="9592055" y="1783080"/>
+            <a:ext cx="2185415" cy="3310128"/>
+          </a:xfrm>
+          <a:prstGeom prst="roundRect">
+            <a:avLst>
+              <a:gd name="adj" fmla="val 2000"/>
+            </a:avLst>
+          </a:prstGeom>
+          <a:solidFill>
+            <a:srgbClr val="EEEEEE"/>
+          </a:solidFill>
+          <a:ln>
+            <a:noFill/>
+          </a:ln>
+          <a:effectLst/>
+        </p:spPr>
+        <p:style>
+          <a:lnRef idx="1">
+            <a:schemeClr val="accent1"/>
+          </a:lnRef>
+          <a:fillRef idx="3">
+            <a:schemeClr val="accent1"/>
+          </a:fillRef>
+          <a:effectRef idx="2">
+            <a:schemeClr val="accent1"/>
+          </a:effectRef>
+          <a:fontRef idx="minor">
+            <a:schemeClr val="lt1"/>
+          </a:fontRef>
+        </p:style>
+        <p:txBody>
+          <a:bodyPr rtlCol="0" anchor="ctr"/>
+          <a:lstStyle/>
+          <a:p/>
+        </p:txBody>
+      </p:sp>
+      <p:sp>
+        <p:nvSpPr>
+          <p:cNvPr id="76" name="Shape 73"/>
+          <p:cNvSpPr/>
+          <p:nvPr/>
+        </p:nvSpPr>
+        <p:spPr>
+          <a:xfrm>
+            <a:off x="9592055" y="1783080"/>
+            <a:ext cx="2185415" cy="256032"/>
+          </a:xfrm>
+          <a:prstGeom prst="rect">
+            <a:avLst/>
+          </a:prstGeom>
+          <a:solidFill>
+            <a:srgbClr val="E6E6E6"/>
+          </a:solidFill>
+          <a:ln>
+            <a:noFill/>
+          </a:ln>
+          <a:effectLst/>
+        </p:spPr>
+        <p:style>
+          <a:lnRef idx="1">
+            <a:schemeClr val="accent1"/>
+          </a:lnRef>
+          <a:fillRef idx="3">
+            <a:schemeClr val="accent1"/>
+          </a:fillRef>
+          <a:effectRef idx="2">
+            <a:schemeClr val="accent1"/>
+          </a:effectRef>
+          <a:fontRef idx="minor">
+            <a:schemeClr val="lt1"/>
+          </a:fontRef>
+        </p:style>
+        <p:txBody>
+          <a:bodyPr rtlCol="0" anchor="ctr"/>
+          <a:lstStyle/>
+          <a:p/>
+        </p:txBody>
+      </p:sp>
+      <p:sp>
+        <p:nvSpPr>
+          <p:cNvPr id="77" name="Text 74"/>
+          <p:cNvSpPr txBox="1"/>
+          <p:nvPr/>
+        </p:nvSpPr>
+        <p:spPr>
+          <a:xfrm>
+            <a:off x="9701783" y="1783080"/>
+            <a:ext cx="1965959" cy="256032"/>
+          </a:xfrm>
+          <a:prstGeom prst="rect">
+            <a:avLst/>
+          </a:prstGeom>
+          <a:noFill/>
+        </p:spPr>
+        <p:txBody>
+          <a:bodyPr wrap="square" lIns="0" rIns="0" tIns="0" bIns="0" anchor="ctr">
+            <a:spAutoFit/>
+          </a:bodyPr>
+          <a:lstStyle/>
+          <a:p>
+            <a:r>
+              <a:rPr sz="700" b="1" i="0" spc="120">
+                <a:solidFill>
+                  <a:srgbClr val="1A1A1A"/>
+                </a:solidFill>
+                <a:latin typeface="Trenda IG Text"/>
+              </a:rPr>
+              <a:t>HOW WE CONTROL</a:t>
+            </a:r>
+          </a:p>
+        </p:txBody>
+      </p:sp>
+      <p:sp>
+        <p:nvSpPr>
+          <p:cNvPr id="78" name="Shape 75"/>
+          <p:cNvSpPr/>
+          <p:nvPr/>
+        </p:nvSpPr>
+        <p:spPr>
+          <a:xfrm>
+            <a:off x="9701783" y="2130552"/>
+            <a:ext cx="1965959" cy="681227"/>
+          </a:xfrm>
+          <a:prstGeom prst="rect">
+            <a:avLst/>
+          </a:prstGeom>
+          <a:solidFill>
+            <a:srgbClr val="F5F5F5"/>
+          </a:solidFill>
+          <a:ln>
+            <a:noFill/>
+          </a:ln>
+          <a:effectLst/>
+        </p:spPr>
+        <p:style>
+          <a:lnRef idx="1">
+            <a:schemeClr val="accent1"/>
+          </a:lnRef>
+          <a:fillRef idx="3">
+            <a:schemeClr val="accent1"/>
+          </a:fillRef>
+          <a:effectRef idx="2">
+            <a:schemeClr val="accent1"/>
+          </a:effectRef>
+          <a:fontRef idx="minor">
+            <a:schemeClr val="lt1"/>
+          </a:fontRef>
+        </p:style>
+        <p:txBody>
+          <a:bodyPr rtlCol="0" anchor="ctr"/>
+          <a:lstStyle/>
+          <a:p/>
+        </p:txBody>
+      </p:sp>
+      <p:sp>
+        <p:nvSpPr>
+          <p:cNvPr id="79" name="Shape 76"/>
+          <p:cNvSpPr/>
+          <p:nvPr/>
+        </p:nvSpPr>
+        <p:spPr>
+          <a:xfrm>
+            <a:off x="9701783" y="2130552"/>
+            <a:ext cx="36576" cy="681227"/>
+          </a:xfrm>
+          <a:prstGeom prst="rect">
+            <a:avLst/>
+          </a:prstGeom>
+          <a:solidFill>
+            <a:srgbClr val="00D6F2"/>
+          </a:solidFill>
+          <a:ln>
+            <a:noFill/>
+          </a:ln>
+          <a:effectLst/>
+        </p:spPr>
+        <p:style>
+          <a:lnRef idx="1">
+            <a:schemeClr val="accent1"/>
+          </a:lnRef>
+          <a:fillRef idx="3">
+            <a:schemeClr val="accent1"/>
+          </a:fillRef>
+          <a:effectRef idx="2">
+            <a:schemeClr val="accent1"/>
+          </a:effectRef>
+          <a:fontRef idx="minor">
+            <a:schemeClr val="lt1"/>
+          </a:fontRef>
+        </p:style>
+        <p:txBody>
+          <a:bodyPr rtlCol="0" anchor="ctr"/>
+          <a:lstStyle/>
+          <a:p/>
+        </p:txBody>
+      </p:sp>
+      <p:sp>
+        <p:nvSpPr>
+          <p:cNvPr id="80" name="Text 77"/>
+          <p:cNvSpPr txBox="1"/>
+          <p:nvPr/>
+        </p:nvSpPr>
+        <p:spPr>
+          <a:xfrm>
+            <a:off x="9811511" y="2167128"/>
+            <a:ext cx="1819655" cy="608075"/>
+          </a:xfrm>
+          <a:prstGeom prst="rect">
+            <a:avLst/>
+          </a:prstGeom>
+          <a:noFill/>
+        </p:spPr>
+        <p:txBody>
+          <a:bodyPr wrap="square" lIns="0" rIns="0" tIns="0" bIns="0" anchor="ctr">
+            <a:spAutoFit/>
+          </a:bodyPr>
+          <a:lstStyle/>
+          <a:p>
+            <a:pPr>
+              <a:spcAft>
+                <a:spcPts val="200"/>
+              </a:spcAft>
+            </a:pPr>
+            <a:r>
+              <a:rPr sz="720" b="1" i="0">
+                <a:solidFill>
+                  <a:srgbClr val="1A1A1A"/>
+                </a:solidFill>
+                <a:latin typeface="Trenda IG Text"/>
+              </a:rPr>
+              <a:t>No production access</a:t>
+            </a:r>
+          </a:p>
+          <a:p>
+            <a:pPr>
+              <a:spcAft>
+                <a:spcPts val="200"/>
+              </a:spcAft>
+            </a:pPr>
+            <a:r>
+              <a:rPr sz="700" b="0" i="0">
+                <a:solidFill>
+                  <a:srgbClr val="4D4D4D"/>
+                </a:solidFill>
+                <a:latin typeface="Trenda IG Text"/>
+              </a:rPr>
+              <a:t>three identities, tool allowlist</a:t>
+            </a:r>
+          </a:p>
+        </p:txBody>
+      </p:sp>
+      <p:sp>
+        <p:nvSpPr>
+          <p:cNvPr id="81" name="Shape 78"/>
+          <p:cNvSpPr/>
+          <p:nvPr/>
+        </p:nvSpPr>
+        <p:spPr>
+          <a:xfrm>
+            <a:off x="9701783" y="2884932"/>
+            <a:ext cx="1965959" cy="681227"/>
+          </a:xfrm>
+          <a:prstGeom prst="rect">
+            <a:avLst/>
+          </a:prstGeom>
+          <a:solidFill>
+            <a:srgbClr val="F5F5F5"/>
+          </a:solidFill>
+          <a:ln>
+            <a:noFill/>
+          </a:ln>
+          <a:effectLst/>
+        </p:spPr>
+        <p:style>
+          <a:lnRef idx="1">
+            <a:schemeClr val="accent1"/>
+          </a:lnRef>
+          <a:fillRef idx="3">
+            <a:schemeClr val="accent1"/>
+          </a:fillRef>
+          <a:effectRef idx="2">
+            <a:schemeClr val="accent1"/>
+          </a:effectRef>
+          <a:fontRef idx="minor">
+            <a:schemeClr val="lt1"/>
+          </a:fontRef>
+        </p:style>
+        <p:txBody>
+          <a:bodyPr rtlCol="0" anchor="ctr"/>
+          <a:lstStyle/>
+          <a:p/>
+        </p:txBody>
+      </p:sp>
+      <p:sp>
+        <p:nvSpPr>
+          <p:cNvPr id="82" name="Shape 79"/>
+          <p:cNvSpPr/>
+          <p:nvPr/>
+        </p:nvSpPr>
+        <p:spPr>
+          <a:xfrm>
+            <a:off x="9701783" y="2884932"/>
+            <a:ext cx="36576" cy="681227"/>
+          </a:xfrm>
+          <a:prstGeom prst="rect">
+            <a:avLst/>
+          </a:prstGeom>
+          <a:solidFill>
+            <a:srgbClr val="00D6F2"/>
+          </a:solidFill>
+          <a:ln>
+            <a:noFill/>
+          </a:ln>
+          <a:effectLst/>
+        </p:spPr>
+        <p:style>
+          <a:lnRef idx="1">
+            <a:schemeClr val="accent1"/>
+          </a:lnRef>
+          <a:fillRef idx="3">
+            <a:schemeClr val="accent1"/>
+          </a:fillRef>
+          <a:effectRef idx="2">
+            <a:schemeClr val="accent1"/>
+          </a:effectRef>
+          <a:fontRef idx="minor">
+            <a:schemeClr val="lt1"/>
+          </a:fontRef>
+        </p:style>
+        <p:txBody>
+          <a:bodyPr rtlCol="0" anchor="ctr"/>
+          <a:lstStyle/>
+          <a:p/>
+        </p:txBody>
+      </p:sp>
+      <p:sp>
+        <p:nvSpPr>
+          <p:cNvPr id="83" name="Text 80"/>
+          <p:cNvSpPr txBox="1"/>
+          <p:nvPr/>
+        </p:nvSpPr>
+        <p:spPr>
+          <a:xfrm>
+            <a:off x="9811511" y="2921508"/>
+            <a:ext cx="1819655" cy="608075"/>
+          </a:xfrm>
+          <a:prstGeom prst="rect">
+            <a:avLst/>
+          </a:prstGeom>
+          <a:noFill/>
+        </p:spPr>
+        <p:txBody>
+          <a:bodyPr wrap="square" lIns="0" rIns="0" tIns="0" bIns="0" anchor="ctr">
+            <a:spAutoFit/>
+          </a:bodyPr>
+          <a:lstStyle/>
+          <a:p>
+            <a:pPr>
+              <a:spcAft>
+                <a:spcPts val="200"/>
+              </a:spcAft>
+            </a:pPr>
+            <a:r>
+              <a:rPr sz="720" b="1" i="0">
+                <a:solidFill>
+                  <a:srgbClr val="1A1A1A"/>
+                </a:solidFill>
+                <a:latin typeface="Trenda IG Text"/>
+              </a:rPr>
+              <a:t>Guardrails</a:t>
+            </a:r>
+          </a:p>
+          <a:p>
+            <a:pPr>
+              <a:spcAft>
+                <a:spcPts val="200"/>
+              </a:spcAft>
+            </a:pPr>
+            <a:r>
+              <a:rPr sz="700" b="0" i="0">
+                <a:solidFill>
+                  <a:srgbClr val="4D4D4D"/>
+                </a:solidFill>
+                <a:latin typeface="Trenda IG Text"/>
+              </a:rPr>
+              <a:t>Model Armor in and out; no raw PHI for agents</a:t>
+            </a:r>
+          </a:p>
+        </p:txBody>
+      </p:sp>
+      <p:sp>
+        <p:nvSpPr>
+          <p:cNvPr id="84" name="Shape 81"/>
+          <p:cNvSpPr/>
+          <p:nvPr/>
+        </p:nvSpPr>
+        <p:spPr>
+          <a:xfrm>
+            <a:off x="9701783" y="3639311"/>
+            <a:ext cx="1965959" cy="681227"/>
+          </a:xfrm>
+          <a:prstGeom prst="rect">
+            <a:avLst/>
+          </a:prstGeom>
+          <a:solidFill>
+            <a:srgbClr val="F5F5F5"/>
+          </a:solidFill>
+          <a:ln>
+            <a:noFill/>
+          </a:ln>
+          <a:effectLst/>
+        </p:spPr>
+        <p:style>
+          <a:lnRef idx="1">
+            <a:schemeClr val="accent1"/>
+          </a:lnRef>
+          <a:fillRef idx="3">
+            <a:schemeClr val="accent1"/>
+          </a:fillRef>
+          <a:effectRef idx="2">
+            <a:schemeClr val="accent1"/>
+          </a:effectRef>
+          <a:fontRef idx="minor">
+            <a:schemeClr val="lt1"/>
+          </a:fontRef>
+        </p:style>
+        <p:txBody>
+          <a:bodyPr rtlCol="0" anchor="ctr"/>
+          <a:lstStyle/>
+          <a:p/>
+        </p:txBody>
+      </p:sp>
+      <p:sp>
+        <p:nvSpPr>
+          <p:cNvPr id="85" name="Shape 82"/>
+          <p:cNvSpPr/>
+          <p:nvPr/>
+        </p:nvSpPr>
+        <p:spPr>
+          <a:xfrm>
+            <a:off x="9701783" y="3639311"/>
+            <a:ext cx="36576" cy="681227"/>
+          </a:xfrm>
+          <a:prstGeom prst="rect">
+            <a:avLst/>
+          </a:prstGeom>
+          <a:solidFill>
+            <a:srgbClr val="FFD700"/>
+          </a:solidFill>
+          <a:ln>
+            <a:noFill/>
+          </a:ln>
+          <a:effectLst/>
+        </p:spPr>
+        <p:style>
+          <a:lnRef idx="1">
+            <a:schemeClr val="accent1"/>
+          </a:lnRef>
+          <a:fillRef idx="3">
+            <a:schemeClr val="accent1"/>
+          </a:fillRef>
+          <a:effectRef idx="2">
+            <a:schemeClr val="accent1"/>
+          </a:effectRef>
+          <a:fontRef idx="minor">
+            <a:schemeClr val="lt1"/>
+          </a:fontRef>
+        </p:style>
+        <p:txBody>
+          <a:bodyPr rtlCol="0" anchor="ctr"/>
+          <a:lstStyle/>
+          <a:p/>
+        </p:txBody>
+      </p:sp>
+      <p:sp>
+        <p:nvSpPr>
+          <p:cNvPr id="86" name="Text 83"/>
+          <p:cNvSpPr txBox="1"/>
+          <p:nvPr/>
+        </p:nvSpPr>
+        <p:spPr>
+          <a:xfrm>
+            <a:off x="9811511" y="3675887"/>
+            <a:ext cx="1819655" cy="608075"/>
+          </a:xfrm>
+          <a:prstGeom prst="rect">
+            <a:avLst/>
+          </a:prstGeom>
+          <a:noFill/>
+        </p:spPr>
+        <p:txBody>
+          <a:bodyPr wrap="square" lIns="0" rIns="0" tIns="0" bIns="0" anchor="ctr">
+            <a:spAutoFit/>
+          </a:bodyPr>
+          <a:lstStyle/>
+          <a:p>
+            <a:pPr>
+              <a:spcAft>
+                <a:spcPts val="200"/>
+              </a:spcAft>
+            </a:pPr>
+            <a:r>
+              <a:rPr sz="720" b="1" i="0">
+                <a:solidFill>
+                  <a:srgbClr val="8A6D00"/>
+                </a:solidFill>
+                <a:latin typeface="Trenda IG Text"/>
+              </a:rPr>
+              <a:t>People decide</a:t>
+            </a:r>
+          </a:p>
+          <a:p>
+            <a:pPr>
+              <a:spcAft>
+                <a:spcPts val="200"/>
+              </a:spcAft>
+            </a:pPr>
+            <a:r>
+              <a:rPr sz="700" b="0" i="0">
+                <a:solidFill>
+                  <a:srgbClr val="4D4D4D"/>
+                </a:solidFill>
+                <a:latin typeface="Trenda IG Text"/>
+              </a:rPr>
+              <a:t>human gates H1-H4, CAB, G1-G3; change passport</a:t>
+            </a:r>
+          </a:p>
+        </p:txBody>
+      </p:sp>
+      <p:sp>
+        <p:nvSpPr>
+          <p:cNvPr id="87" name="Shape 84"/>
+          <p:cNvSpPr/>
+          <p:nvPr/>
+        </p:nvSpPr>
+        <p:spPr>
+          <a:xfrm>
+            <a:off x="9701783" y="4393692"/>
+            <a:ext cx="1965959" cy="681227"/>
+          </a:xfrm>
+          <a:prstGeom prst="rect">
+            <a:avLst/>
+          </a:prstGeom>
+          <a:solidFill>
+            <a:srgbClr val="F5F5F5"/>
+          </a:solidFill>
+          <a:ln>
+            <a:noFill/>
+          </a:ln>
+          <a:effectLst/>
+        </p:spPr>
+        <p:style>
+          <a:lnRef idx="1">
+            <a:schemeClr val="accent1"/>
+          </a:lnRef>
+          <a:fillRef idx="3">
+            <a:schemeClr val="accent1"/>
+          </a:fillRef>
+          <a:effectRef idx="2">
+            <a:schemeClr val="accent1"/>
+          </a:effectRef>
+          <a:fontRef idx="minor">
+            <a:schemeClr val="lt1"/>
+          </a:fontRef>
+        </p:style>
+        <p:txBody>
+          <a:bodyPr rtlCol="0" anchor="ctr"/>
+          <a:lstStyle/>
+          <a:p/>
+        </p:txBody>
+      </p:sp>
+      <p:sp>
+        <p:nvSpPr>
+          <p:cNvPr id="88" name="Shape 85"/>
+          <p:cNvSpPr/>
+          <p:nvPr/>
+        </p:nvSpPr>
+        <p:spPr>
+          <a:xfrm>
+            <a:off x="9701783" y="4393692"/>
+            <a:ext cx="36576" cy="681227"/>
+          </a:xfrm>
+          <a:prstGeom prst="rect">
+            <a:avLst/>
+          </a:prstGeom>
+          <a:solidFill>
+            <a:srgbClr val="00D6F2"/>
+          </a:solidFill>
+          <a:ln>
+            <a:noFill/>
+          </a:ln>
+          <a:effectLst/>
+        </p:spPr>
+        <p:style>
+          <a:lnRef idx="1">
+            <a:schemeClr val="accent1"/>
+          </a:lnRef>
+          <a:fillRef idx="3">
+            <a:schemeClr val="accent1"/>
+          </a:fillRef>
+          <a:effectRef idx="2">
+            <a:schemeClr val="accent1"/>
+          </a:effectRef>
+          <a:fontRef idx="minor">
+            <a:schemeClr val="lt1"/>
+          </a:fontRef>
+        </p:style>
+        <p:txBody>
+          <a:bodyPr rtlCol="0" anchor="ctr"/>
+          <a:lstStyle/>
+          <a:p/>
+        </p:txBody>
+      </p:sp>
+      <p:sp>
+        <p:nvSpPr>
+          <p:cNvPr id="89" name="Text 86"/>
+          <p:cNvSpPr txBox="1"/>
+          <p:nvPr/>
+        </p:nvSpPr>
+        <p:spPr>
+          <a:xfrm>
+            <a:off x="9811511" y="4430268"/>
+            <a:ext cx="1819655" cy="608075"/>
+          </a:xfrm>
+          <a:prstGeom prst="rect">
+            <a:avLst/>
+          </a:prstGeom>
+          <a:noFill/>
+        </p:spPr>
+        <p:txBody>
+          <a:bodyPr wrap="square" lIns="0" rIns="0" tIns="0" bIns="0" anchor="ctr">
+            <a:spAutoFit/>
+          </a:bodyPr>
+          <a:lstStyle/>
+          <a:p>
+            <a:pPr>
+              <a:spcAft>
+                <a:spcPts val="200"/>
+              </a:spcAft>
+            </a:pPr>
+            <a:r>
+              <a:rPr sz="720" b="1" i="0">
+                <a:solidFill>
+                  <a:srgbClr val="1A1A1A"/>
+                </a:solidFill>
+                <a:latin typeface="Trenda IG Text"/>
+              </a:rPr>
+              <a:t>Quotas + kill switch</a:t>
+            </a:r>
+          </a:p>
+          <a:p>
+            <a:pPr>
+              <a:spcAft>
+                <a:spcPts val="200"/>
+              </a:spcAft>
+            </a:pPr>
+            <a:r>
+              <a:rPr sz="700" b="0" i="0">
+                <a:solidFill>
+                  <a:srgbClr val="4D4D4D"/>
+                </a:solidFill>
+                <a:latin typeface="Trenda IG Text"/>
+              </a:rPr>
+              <a:t>per pod and per agent</a:t>
+            </a:r>
+          </a:p>
+        </p:txBody>
+      </p:sp>
+      <p:sp>
+        <p:nvSpPr>
+          <p:cNvPr id="90" name="Text 87"/>
+          <p:cNvSpPr txBox="1"/>
+          <p:nvPr/>
+        </p:nvSpPr>
+        <p:spPr>
+          <a:xfrm>
+            <a:off x="411480" y="5230368"/>
+            <a:ext cx="1188720" cy="1005840"/>
+          </a:xfrm>
+          <a:prstGeom prst="rect">
+            <a:avLst/>
+          </a:prstGeom>
+          <a:noFill/>
+        </p:spPr>
+        <p:txBody>
+          <a:bodyPr wrap="square" lIns="0" rIns="0" tIns="0" bIns="0" anchor="ctr">
+            <a:spAutoFit/>
+          </a:bodyPr>
+          <a:lstStyle/>
+          <a:p>
+            <a:pPr>
+              <a:spcAft>
+                <a:spcPts val="100"/>
+              </a:spcAft>
+            </a:pPr>
+            <a:r>
+              <a:rPr sz="700" b="1" i="0" spc="120">
+                <a:solidFill>
+                  <a:srgbClr val="1A1A1A"/>
+                </a:solidFill>
+                <a:latin typeface="Trenda IG Text"/>
+              </a:rPr>
+              <a:t>CORE BENEFITS</a:t>
+            </a:r>
+          </a:p>
+          <a:p>
+            <a:pPr>
+              <a:spcAft>
+                <a:spcPts val="100"/>
+              </a:spcAft>
+            </a:pPr>
+            <a:r>
+              <a:rPr sz="700" b="0" i="0">
+                <a:solidFill>
+                  <a:srgbClr val="6B6B6B"/>
+                </a:solidFill>
+                <a:latin typeface="Trenda IG Text"/>
+              </a:rPr>
+              <a:t>beyond cost</a:t>
+            </a:r>
+          </a:p>
+        </p:txBody>
+      </p:sp>
+      <p:sp>
+        <p:nvSpPr>
+          <p:cNvPr id="91" name="Shape 88"/>
+          <p:cNvSpPr/>
+          <p:nvPr/>
+        </p:nvSpPr>
+        <p:spPr>
+          <a:xfrm>
+            <a:off x="1645920" y="5230368"/>
+            <a:ext cx="1612392" cy="1005840"/>
+          </a:xfrm>
+          <a:prstGeom prst="rect">
+            <a:avLst/>
+          </a:prstGeom>
+          <a:solidFill>
+            <a:srgbClr val="F5F5F5"/>
+          </a:solidFill>
+          <a:ln>
+            <a:noFill/>
+          </a:ln>
+          <a:effectLst/>
+        </p:spPr>
+        <p:style>
+          <a:lnRef idx="1">
+            <a:schemeClr val="accent1"/>
+          </a:lnRef>
+          <a:fillRef idx="3">
+            <a:schemeClr val="accent1"/>
+          </a:fillRef>
+          <a:effectRef idx="2">
+            <a:schemeClr val="accent1"/>
+          </a:effectRef>
+          <a:fontRef idx="minor">
+            <a:schemeClr val="lt1"/>
+          </a:fontRef>
+        </p:style>
+        <p:txBody>
+          <a:bodyPr rtlCol="0" anchor="ctr"/>
+          <a:lstStyle/>
+          <a:p/>
+        </p:txBody>
+      </p:sp>
+      <p:sp>
+        <p:nvSpPr>
+          <p:cNvPr id="92" name="Shape 89"/>
+          <p:cNvSpPr/>
+          <p:nvPr/>
+        </p:nvSpPr>
+        <p:spPr>
+          <a:xfrm>
+            <a:off x="1645920" y="5230368"/>
+            <a:ext cx="45720" cy="1005840"/>
+          </a:xfrm>
+          <a:prstGeom prst="rect">
+            <a:avLst/>
+          </a:prstGeom>
+          <a:gradFill rotWithShape="1">
+            <a:gsLst>
+              <a:gs pos="0">
+                <a:srgbClr val="FFD700"/>
+              </a:gs>
+              <a:gs pos="50000">
+                <a:srgbClr val="FF0069"/>
+              </a:gs>
+              <a:gs pos="100000">
+                <a:srgbClr val="00D6F2"/>
+              </a:gs>
+            </a:gsLst>
+            <a:lin ang="5400000" scaled="0"/>
+          </a:gradFill>
+          <a:ln>
+            <a:noFill/>
+          </a:ln>
+          <a:effectLst/>
+        </p:spPr>
+        <p:style>
+          <a:lnRef idx="1">
+            <a:schemeClr val="accent1"/>
+          </a:lnRef>
+          <a:fillRef idx="3">
+            <a:schemeClr val="accent1"/>
+          </a:fillRef>
+          <a:effectRef idx="2">
+            <a:schemeClr val="accent1"/>
+          </a:effectRef>
+          <a:fontRef idx="minor">
+            <a:schemeClr val="lt1"/>
+          </a:fontRef>
+        </p:style>
+        <p:txBody>
+          <a:bodyPr rtlCol="0" anchor="ctr"/>
+          <a:lstStyle/>
+          <a:p/>
+        </p:txBody>
+      </p:sp>
+      <p:sp>
+        <p:nvSpPr>
+          <p:cNvPr id="93" name="Text 90"/>
+          <p:cNvSpPr txBox="1"/>
+          <p:nvPr/>
+        </p:nvSpPr>
+        <p:spPr>
+          <a:xfrm>
+            <a:off x="1792224" y="5266944"/>
+            <a:ext cx="1392936" cy="932688"/>
+          </a:xfrm>
+          <a:prstGeom prst="rect">
+            <a:avLst/>
+          </a:prstGeom>
+          <a:noFill/>
+        </p:spPr>
+        <p:txBody>
+          <a:bodyPr wrap="square" lIns="0" rIns="0" tIns="0" bIns="0" anchor="ctr">
+            <a:spAutoFit/>
+          </a:bodyPr>
+          <a:lstStyle/>
+          <a:p>
+            <a:pPr>
+              <a:spcAft>
+                <a:spcPts val="200"/>
+              </a:spcAft>
+            </a:pPr>
+            <a:r>
+              <a:rPr sz="800" b="1" i="0">
+                <a:solidFill>
+                  <a:srgbClr val="1A1A1A"/>
+                </a:solidFill>
+                <a:latin typeface="Trenda IG Text"/>
+              </a:rPr>
+              <a:t>Consistency</a:t>
+            </a:r>
+          </a:p>
+          <a:p>
+            <a:pPr>
+              <a:spcAft>
+                <a:spcPts val="200"/>
+              </a:spcAft>
+            </a:pPr>
+            <a:r>
+              <a:rPr sz="700" b="0" i="0">
+                <a:solidFill>
+                  <a:srgbClr val="4D4D4D"/>
+                </a:solidFill>
+                <a:latin typeface="Trenda IG Text"/>
+              </a:rPr>
+              <a:t>Same standards and checks in every pod, every time.</a:t>
+            </a:r>
+          </a:p>
+        </p:txBody>
+      </p:sp>
+      <p:sp>
+        <p:nvSpPr>
+          <p:cNvPr id="94" name="Shape 91"/>
+          <p:cNvSpPr/>
+          <p:nvPr/>
+        </p:nvSpPr>
+        <p:spPr>
+          <a:xfrm>
+            <a:off x="3349752" y="5230368"/>
+            <a:ext cx="1612392" cy="1005840"/>
+          </a:xfrm>
+          <a:prstGeom prst="rect">
+            <a:avLst/>
+          </a:prstGeom>
+          <a:solidFill>
+            <a:srgbClr val="F5F5F5"/>
+          </a:solidFill>
+          <a:ln>
+            <a:noFill/>
+          </a:ln>
+          <a:effectLst/>
+        </p:spPr>
+        <p:style>
+          <a:lnRef idx="1">
+            <a:schemeClr val="accent1"/>
+          </a:lnRef>
+          <a:fillRef idx="3">
+            <a:schemeClr val="accent1"/>
+          </a:fillRef>
+          <a:effectRef idx="2">
+            <a:schemeClr val="accent1"/>
+          </a:effectRef>
+          <a:fontRef idx="minor">
+            <a:schemeClr val="lt1"/>
+          </a:fontRef>
+        </p:style>
+        <p:txBody>
+          <a:bodyPr rtlCol="0" anchor="ctr"/>
+          <a:lstStyle/>
+          <a:p/>
+        </p:txBody>
+      </p:sp>
+      <p:sp>
+        <p:nvSpPr>
+          <p:cNvPr id="95" name="Shape 92"/>
+          <p:cNvSpPr/>
+          <p:nvPr/>
+        </p:nvSpPr>
+        <p:spPr>
+          <a:xfrm>
+            <a:off x="3349752" y="5230368"/>
+            <a:ext cx="45720" cy="1005840"/>
+          </a:xfrm>
+          <a:prstGeom prst="rect">
+            <a:avLst/>
+          </a:prstGeom>
+          <a:gradFill rotWithShape="1">
+            <a:gsLst>
+              <a:gs pos="0">
+                <a:srgbClr val="FFD700"/>
+              </a:gs>
+              <a:gs pos="50000">
+                <a:srgbClr val="FF0069"/>
+              </a:gs>
+              <a:gs pos="100000">
+                <a:srgbClr val="00D6F2"/>
+              </a:gs>
+            </a:gsLst>
+            <a:lin ang="5400000" scaled="0"/>
+          </a:gradFill>
+          <a:ln>
+            <a:noFill/>
+          </a:ln>
+          <a:effectLst/>
+        </p:spPr>
+        <p:style>
+          <a:lnRef idx="1">
+            <a:schemeClr val="accent1"/>
+          </a:lnRef>
+          <a:fillRef idx="3">
+            <a:schemeClr val="accent1"/>
+          </a:fillRef>
+          <a:effectRef idx="2">
+            <a:schemeClr val="accent1"/>
+          </a:effectRef>
+          <a:fontRef idx="minor">
+            <a:schemeClr val="lt1"/>
+          </a:fontRef>
+        </p:style>
+        <p:txBody>
+          <a:bodyPr rtlCol="0" anchor="ctr"/>
+          <a:lstStyle/>
+          <a:p/>
+        </p:txBody>
+      </p:sp>
+      <p:sp>
+        <p:nvSpPr>
+          <p:cNvPr id="96" name="Text 93"/>
+          <p:cNvSpPr txBox="1"/>
+          <p:nvPr/>
+        </p:nvSpPr>
+        <p:spPr>
+          <a:xfrm>
+            <a:off x="3496056" y="5266944"/>
+            <a:ext cx="1392936" cy="932688"/>
+          </a:xfrm>
+          <a:prstGeom prst="rect">
+            <a:avLst/>
+          </a:prstGeom>
+          <a:noFill/>
+        </p:spPr>
+        <p:txBody>
+          <a:bodyPr wrap="square" lIns="0" rIns="0" tIns="0" bIns="0" anchor="ctr">
+            <a:spAutoFit/>
+          </a:bodyPr>
+          <a:lstStyle/>
+          <a:p>
+            <a:pPr>
+              <a:spcAft>
+                <a:spcPts val="200"/>
+              </a:spcAft>
+            </a:pPr>
+            <a:r>
+              <a:rPr sz="800" b="1" i="0">
+                <a:solidFill>
+                  <a:srgbClr val="1A1A1A"/>
+                </a:solidFill>
+                <a:latin typeface="Trenda IG Text"/>
+              </a:rPr>
+              <a:t>Reuse</a:t>
+            </a:r>
+          </a:p>
+          <a:p>
+            <a:pPr>
+              <a:spcAft>
+                <a:spcPts val="200"/>
+              </a:spcAft>
+            </a:pPr>
+            <a:r>
+              <a:rPr sz="700" b="0" i="0">
+                <a:solidFill>
+                  <a:srgbClr val="4D4D4D"/>
+                </a:solidFill>
+                <a:latin typeface="Trenda IG Text"/>
+              </a:rPr>
+              <a:t>Build once; a new pod adds skills, not agents.</a:t>
+            </a:r>
+          </a:p>
+        </p:txBody>
+      </p:sp>
+      <p:sp>
+        <p:nvSpPr>
+          <p:cNvPr id="97" name="Shape 94"/>
+          <p:cNvSpPr/>
+          <p:nvPr/>
+        </p:nvSpPr>
+        <p:spPr>
+          <a:xfrm>
+            <a:off x="5053584" y="5230368"/>
+            <a:ext cx="1612392" cy="1005840"/>
+          </a:xfrm>
+          <a:prstGeom prst="rect">
+            <a:avLst/>
+          </a:prstGeom>
+          <a:solidFill>
+            <a:srgbClr val="F5F5F5"/>
+          </a:solidFill>
+          <a:ln>
+            <a:noFill/>
+          </a:ln>
+          <a:effectLst/>
+        </p:spPr>
+        <p:style>
+          <a:lnRef idx="1">
+            <a:schemeClr val="accent1"/>
+          </a:lnRef>
+          <a:fillRef idx="3">
+            <a:schemeClr val="accent1"/>
+          </a:fillRef>
+          <a:effectRef idx="2">
+            <a:schemeClr val="accent1"/>
+          </a:effectRef>
+          <a:fontRef idx="minor">
+            <a:schemeClr val="lt1"/>
+          </a:fontRef>
+        </p:style>
+        <p:txBody>
+          <a:bodyPr rtlCol="0" anchor="ctr"/>
+          <a:lstStyle/>
+          <a:p/>
+        </p:txBody>
+      </p:sp>
+      <p:sp>
+        <p:nvSpPr>
+          <p:cNvPr id="98" name="Shape 95"/>
+          <p:cNvSpPr/>
+          <p:nvPr/>
+        </p:nvSpPr>
+        <p:spPr>
+          <a:xfrm>
+            <a:off x="5053584" y="5230368"/>
+            <a:ext cx="45720" cy="1005840"/>
+          </a:xfrm>
+          <a:prstGeom prst="rect">
+            <a:avLst/>
+          </a:prstGeom>
+          <a:gradFill rotWithShape="1">
+            <a:gsLst>
+              <a:gs pos="0">
+                <a:srgbClr val="FFD700"/>
+              </a:gs>
+              <a:gs pos="50000">
+                <a:srgbClr val="FF0069"/>
+              </a:gs>
+              <a:gs pos="100000">
+                <a:srgbClr val="00D6F2"/>
+              </a:gs>
+            </a:gsLst>
+            <a:lin ang="5400000" scaled="0"/>
+          </a:gradFill>
+          <a:ln>
+            <a:noFill/>
+          </a:ln>
+          <a:effectLst/>
+        </p:spPr>
+        <p:style>
+          <a:lnRef idx="1">
+            <a:schemeClr val="accent1"/>
+          </a:lnRef>
+          <a:fillRef idx="3">
+            <a:schemeClr val="accent1"/>
+          </a:fillRef>
+          <a:effectRef idx="2">
+            <a:schemeClr val="accent1"/>
+          </a:effectRef>
+          <a:fontRef idx="minor">
+            <a:schemeClr val="lt1"/>
+          </a:fontRef>
+        </p:style>
+        <p:txBody>
+          <a:bodyPr rtlCol="0" anchor="ctr"/>
+          <a:lstStyle/>
+          <a:p/>
+        </p:txBody>
+      </p:sp>
+      <p:sp>
+        <p:nvSpPr>
+          <p:cNvPr id="99" name="Text 96"/>
+          <p:cNvSpPr txBox="1"/>
+          <p:nvPr/>
+        </p:nvSpPr>
+        <p:spPr>
+          <a:xfrm>
+            <a:off x="5199888" y="5266944"/>
+            <a:ext cx="1392936" cy="932688"/>
+          </a:xfrm>
+          <a:prstGeom prst="rect">
+            <a:avLst/>
+          </a:prstGeom>
+          <a:noFill/>
+        </p:spPr>
+        <p:txBody>
+          <a:bodyPr wrap="square" lIns="0" rIns="0" tIns="0" bIns="0" anchor="ctr">
+            <a:spAutoFit/>
+          </a:bodyPr>
+          <a:lstStyle/>
+          <a:p>
+            <a:pPr>
+              <a:spcAft>
+                <a:spcPts val="200"/>
+              </a:spcAft>
+            </a:pPr>
+            <a:r>
+              <a:rPr sz="800" b="1" i="0">
+                <a:solidFill>
+                  <a:srgbClr val="1A1A1A"/>
+                </a:solidFill>
+                <a:latin typeface="Trenda IG Text"/>
+              </a:rPr>
+              <a:t>Knowledge kept</a:t>
+            </a:r>
+          </a:p>
+          <a:p>
+            <a:pPr>
+              <a:spcAft>
+                <a:spcPts val="200"/>
+              </a:spcAft>
+            </a:pPr>
+            <a:r>
+              <a:rPr sz="700" b="0" i="0">
+                <a:solidFill>
+                  <a:srgbClr val="4D4D4D"/>
+                </a:solidFill>
+                <a:latin typeface="Trenda IG Text"/>
+              </a:rPr>
+              <a:t>The graph keeps what people know when they move on.</a:t>
+            </a:r>
+          </a:p>
+        </p:txBody>
+      </p:sp>
+      <p:sp>
+        <p:nvSpPr>
+          <p:cNvPr id="100" name="Shape 97"/>
+          <p:cNvSpPr/>
+          <p:nvPr/>
+        </p:nvSpPr>
+        <p:spPr>
+          <a:xfrm>
+            <a:off x="6757416" y="5230368"/>
+            <a:ext cx="1612392" cy="1005840"/>
+          </a:xfrm>
+          <a:prstGeom prst="rect">
+            <a:avLst/>
+          </a:prstGeom>
+          <a:solidFill>
+            <a:srgbClr val="F5F5F5"/>
+          </a:solidFill>
+          <a:ln>
+            <a:noFill/>
+          </a:ln>
+          <a:effectLst/>
+        </p:spPr>
+        <p:style>
+          <a:lnRef idx="1">
+            <a:schemeClr val="accent1"/>
+          </a:lnRef>
+          <a:fillRef idx="3">
+            <a:schemeClr val="accent1"/>
+          </a:fillRef>
+          <a:effectRef idx="2">
+            <a:schemeClr val="accent1"/>
+          </a:effectRef>
+          <a:fontRef idx="minor">
+            <a:schemeClr val="lt1"/>
+          </a:fontRef>
+        </p:style>
+        <p:txBody>
+          <a:bodyPr rtlCol="0" anchor="ctr"/>
+          <a:lstStyle/>
+          <a:p/>
+        </p:txBody>
+      </p:sp>
+      <p:sp>
+        <p:nvSpPr>
+          <p:cNvPr id="101" name="Shape 98"/>
+          <p:cNvSpPr/>
+          <p:nvPr/>
+        </p:nvSpPr>
+        <p:spPr>
+          <a:xfrm>
+            <a:off x="6757416" y="5230368"/>
+            <a:ext cx="45720" cy="1005840"/>
+          </a:xfrm>
+          <a:prstGeom prst="rect">
+            <a:avLst/>
+          </a:prstGeom>
+          <a:gradFill rotWithShape="1">
+            <a:gsLst>
+              <a:gs pos="0">
+                <a:srgbClr val="FFD700"/>
+              </a:gs>
+              <a:gs pos="50000">
+                <a:srgbClr val="FF0069"/>
+              </a:gs>
+              <a:gs pos="100000">
+                <a:srgbClr val="00D6F2"/>
+              </a:gs>
+            </a:gsLst>
+            <a:lin ang="5400000" scaled="0"/>
+          </a:gradFill>
+          <a:ln>
+            <a:noFill/>
+          </a:ln>
+          <a:effectLst/>
+        </p:spPr>
+        <p:style>
+          <a:lnRef idx="1">
+            <a:schemeClr val="accent1"/>
+          </a:lnRef>
+          <a:fillRef idx="3">
+            <a:schemeClr val="accent1"/>
+          </a:fillRef>
+          <a:effectRef idx="2">
+            <a:schemeClr val="accent1"/>
+          </a:effectRef>
+          <a:fontRef idx="minor">
+            <a:schemeClr val="lt1"/>
+          </a:fontRef>
+        </p:style>
+        <p:txBody>
+          <a:bodyPr rtlCol="0" anchor="ctr"/>
+          <a:lstStyle/>
+          <a:p/>
+        </p:txBody>
+      </p:sp>
+      <p:sp>
+        <p:nvSpPr>
+          <p:cNvPr id="102" name="Text 99"/>
+          <p:cNvSpPr txBox="1"/>
+          <p:nvPr/>
+        </p:nvSpPr>
+        <p:spPr>
+          <a:xfrm>
+            <a:off x="6903720" y="5266944"/>
+            <a:ext cx="1392936" cy="932688"/>
+          </a:xfrm>
+          <a:prstGeom prst="rect">
+            <a:avLst/>
+          </a:prstGeom>
+          <a:noFill/>
+        </p:spPr>
+        <p:txBody>
+          <a:bodyPr wrap="square" lIns="0" rIns="0" tIns="0" bIns="0" anchor="ctr">
+            <a:spAutoFit/>
+          </a:bodyPr>
+          <a:lstStyle/>
+          <a:p>
+            <a:pPr>
+              <a:spcAft>
+                <a:spcPts val="200"/>
+              </a:spcAft>
+            </a:pPr>
+            <a:r>
+              <a:rPr sz="800" b="1" i="0">
+                <a:solidFill>
+                  <a:srgbClr val="1A1A1A"/>
+                </a:solidFill>
+                <a:latin typeface="Trenda IG Text"/>
+              </a:rPr>
+              <a:t>Quality</a:t>
+            </a:r>
+          </a:p>
+          <a:p>
+            <a:pPr>
+              <a:spcAft>
+                <a:spcPts val="200"/>
+              </a:spcAft>
+            </a:pPr>
+            <a:r>
+              <a:rPr sz="700" b="0" i="0">
+                <a:solidFill>
+                  <a:srgbClr val="4D4D4D"/>
+                </a:solidFill>
+                <a:latin typeface="Trenda IG Text"/>
+              </a:rPr>
+              <a:t>Every step scored before it moves.</a:t>
+            </a:r>
+          </a:p>
+        </p:txBody>
+      </p:sp>
+      <p:sp>
+        <p:nvSpPr>
+          <p:cNvPr id="103" name="Shape 100"/>
+          <p:cNvSpPr/>
+          <p:nvPr/>
+        </p:nvSpPr>
+        <p:spPr>
+          <a:xfrm>
+            <a:off x="8461248" y="5230368"/>
+            <a:ext cx="1612392" cy="1005840"/>
+          </a:xfrm>
+          <a:prstGeom prst="rect">
+            <a:avLst/>
+          </a:prstGeom>
+          <a:solidFill>
+            <a:srgbClr val="F5F5F5"/>
+          </a:solidFill>
+          <a:ln>
+            <a:noFill/>
+          </a:ln>
+          <a:effectLst/>
+        </p:spPr>
+        <p:style>
+          <a:lnRef idx="1">
+            <a:schemeClr val="accent1"/>
+          </a:lnRef>
+          <a:fillRef idx="3">
+            <a:schemeClr val="accent1"/>
+          </a:fillRef>
+          <a:effectRef idx="2">
+            <a:schemeClr val="accent1"/>
+          </a:effectRef>
+          <a:fontRef idx="minor">
+            <a:schemeClr val="lt1"/>
+          </a:fontRef>
+        </p:style>
+        <p:txBody>
+          <a:bodyPr rtlCol="0" anchor="ctr"/>
+          <a:lstStyle/>
+          <a:p/>
+        </p:txBody>
+      </p:sp>
+      <p:sp>
+        <p:nvSpPr>
+          <p:cNvPr id="104" name="Shape 101"/>
+          <p:cNvSpPr/>
+          <p:nvPr/>
+        </p:nvSpPr>
+        <p:spPr>
+          <a:xfrm>
+            <a:off x="8461248" y="5230368"/>
+            <a:ext cx="45720" cy="1005840"/>
+          </a:xfrm>
+          <a:prstGeom prst="rect">
+            <a:avLst/>
+          </a:prstGeom>
+          <a:gradFill rotWithShape="1">
+            <a:gsLst>
+              <a:gs pos="0">
+                <a:srgbClr val="FFD700"/>
+              </a:gs>
+              <a:gs pos="50000">
+                <a:srgbClr val="FF0069"/>
+              </a:gs>
+              <a:gs pos="100000">
+                <a:srgbClr val="00D6F2"/>
+              </a:gs>
+            </a:gsLst>
+            <a:lin ang="5400000" scaled="0"/>
+          </a:gradFill>
+          <a:ln>
+            <a:noFill/>
+          </a:ln>
+          <a:effectLst/>
+        </p:spPr>
+        <p:style>
+          <a:lnRef idx="1">
+            <a:schemeClr val="accent1"/>
+          </a:lnRef>
+          <a:fillRef idx="3">
+            <a:schemeClr val="accent1"/>
+          </a:fillRef>
+          <a:effectRef idx="2">
+            <a:schemeClr val="accent1"/>
+          </a:effectRef>
+          <a:fontRef idx="minor">
+            <a:schemeClr val="lt1"/>
+          </a:fontRef>
+        </p:style>
+        <p:txBody>
+          <a:bodyPr rtlCol="0" anchor="ctr"/>
+          <a:lstStyle/>
+          <a:p/>
+        </p:txBody>
+      </p:sp>
+      <p:sp>
+        <p:nvSpPr>
+          <p:cNvPr id="105" name="Text 102"/>
+          <p:cNvSpPr txBox="1"/>
+          <p:nvPr/>
+        </p:nvSpPr>
+        <p:spPr>
+          <a:xfrm>
+            <a:off x="8607552" y="5266944"/>
+            <a:ext cx="1392936" cy="932688"/>
+          </a:xfrm>
+          <a:prstGeom prst="rect">
+            <a:avLst/>
+          </a:prstGeom>
+          <a:noFill/>
+        </p:spPr>
+        <p:txBody>
+          <a:bodyPr wrap="square" lIns="0" rIns="0" tIns="0" bIns="0" anchor="ctr">
+            <a:spAutoFit/>
+          </a:bodyPr>
+          <a:lstStyle/>
+          <a:p>
+            <a:pPr>
+              <a:spcAft>
+                <a:spcPts val="200"/>
+              </a:spcAft>
+            </a:pPr>
+            <a:r>
+              <a:rPr sz="800" b="1" i="0">
+                <a:solidFill>
+                  <a:srgbClr val="1A1A1A"/>
+                </a:solidFill>
+                <a:latin typeface="Trenda IG Text"/>
+              </a:rPr>
+              <a:t>Auditability</a:t>
+            </a:r>
+          </a:p>
+          <a:p>
+            <a:pPr>
+              <a:spcAft>
+                <a:spcPts val="200"/>
+              </a:spcAft>
+            </a:pPr>
+            <a:r>
+              <a:rPr sz="700" b="0" i="0">
+                <a:solidFill>
+                  <a:srgbClr val="4D4D4D"/>
+                </a:solidFill>
+                <a:latin typeface="Trenda IG Text"/>
+              </a:rPr>
+              <a:t>Every step, approval and test recorded.</a:t>
+            </a:r>
+          </a:p>
+        </p:txBody>
+      </p:sp>
+      <p:sp>
+        <p:nvSpPr>
+          <p:cNvPr id="106" name="Shape 103"/>
+          <p:cNvSpPr/>
+          <p:nvPr/>
+        </p:nvSpPr>
+        <p:spPr>
+          <a:xfrm>
+            <a:off x="10165080" y="5230368"/>
+            <a:ext cx="1612392" cy="1005840"/>
+          </a:xfrm>
+          <a:prstGeom prst="rect">
+            <a:avLst/>
+          </a:prstGeom>
+          <a:solidFill>
+            <a:srgbClr val="F5F5F5"/>
+          </a:solidFill>
+          <a:ln>
+            <a:noFill/>
+          </a:ln>
+          <a:effectLst/>
+        </p:spPr>
+        <p:style>
+          <a:lnRef idx="1">
+            <a:schemeClr val="accent1"/>
+          </a:lnRef>
+          <a:fillRef idx="3">
+            <a:schemeClr val="accent1"/>
+          </a:fillRef>
+          <a:effectRef idx="2">
+            <a:schemeClr val="accent1"/>
+          </a:effectRef>
+          <a:fontRef idx="minor">
+            <a:schemeClr val="lt1"/>
+          </a:fontRef>
+        </p:style>
+        <p:txBody>
+          <a:bodyPr rtlCol="0" anchor="ctr"/>
+          <a:lstStyle/>
+          <a:p/>
+        </p:txBody>
+      </p:sp>
+      <p:sp>
+        <p:nvSpPr>
+          <p:cNvPr id="107" name="Shape 104"/>
+          <p:cNvSpPr/>
+          <p:nvPr/>
+        </p:nvSpPr>
+        <p:spPr>
+          <a:xfrm>
+            <a:off x="10165080" y="5230368"/>
+            <a:ext cx="45720" cy="1005840"/>
+          </a:xfrm>
+          <a:prstGeom prst="rect">
+            <a:avLst/>
+          </a:prstGeom>
+          <a:gradFill rotWithShape="1">
+            <a:gsLst>
+              <a:gs pos="0">
+                <a:srgbClr val="FFD700"/>
+              </a:gs>
+              <a:gs pos="50000">
+                <a:srgbClr val="FF0069"/>
+              </a:gs>
+              <a:gs pos="100000">
+                <a:srgbClr val="00D6F2"/>
+              </a:gs>
+            </a:gsLst>
+            <a:lin ang="5400000" scaled="0"/>
+          </a:gradFill>
+          <a:ln>
+            <a:noFill/>
+          </a:ln>
+          <a:effectLst/>
+        </p:spPr>
+        <p:style>
+          <a:lnRef idx="1">
+            <a:schemeClr val="accent1"/>
+          </a:lnRef>
+          <a:fillRef idx="3">
+            <a:schemeClr val="accent1"/>
+          </a:fillRef>
+          <a:effectRef idx="2">
+            <a:schemeClr val="accent1"/>
+          </a:effectRef>
+          <a:fontRef idx="minor">
+            <a:schemeClr val="lt1"/>
+          </a:fontRef>
+        </p:style>
+        <p:txBody>
+          <a:bodyPr rtlCol="0" anchor="ctr"/>
+          <a:lstStyle/>
+          <a:p/>
+        </p:txBody>
+      </p:sp>
+      <p:sp>
+        <p:nvSpPr>
+          <p:cNvPr id="108" name="Text 105"/>
+          <p:cNvSpPr txBox="1"/>
+          <p:nvPr/>
+        </p:nvSpPr>
+        <p:spPr>
+          <a:xfrm>
+            <a:off x="10311384" y="5266944"/>
+            <a:ext cx="1392936" cy="932688"/>
+          </a:xfrm>
+          <a:prstGeom prst="rect">
+            <a:avLst/>
+          </a:prstGeom>
+          <a:noFill/>
+        </p:spPr>
+        <p:txBody>
+          <a:bodyPr wrap="square" lIns="0" rIns="0" tIns="0" bIns="0" anchor="ctr">
+            <a:spAutoFit/>
+          </a:bodyPr>
+          <a:lstStyle/>
+          <a:p>
+            <a:pPr>
+              <a:spcAft>
+                <a:spcPts val="200"/>
+              </a:spcAft>
+            </a:pPr>
+            <a:r>
+              <a:rPr sz="800" b="1" i="0">
+                <a:solidFill>
+                  <a:srgbClr val="1A1A1A"/>
+                </a:solidFill>
+                <a:latin typeface="Trenda IG Text"/>
+              </a:rPr>
+              <a:t>Safe by design</a:t>
+            </a:r>
+          </a:p>
+          <a:p>
+            <a:pPr>
+              <a:spcAft>
+                <a:spcPts val="200"/>
+              </a:spcAft>
+            </a:pPr>
+            <a:r>
+              <a:rPr sz="700" b="0" i="0">
+                <a:solidFill>
+                  <a:srgbClr val="4D4D4D"/>
+                </a:solidFill>
+                <a:latin typeface="Trenda IG Text"/>
+              </a:rPr>
+              <a:t>No production credentials, no raw PHI for agents.</a:t>
+            </a:r>
+          </a:p>
+        </p:txBody>
+      </p:sp>
+    </p:spTree>
+  </p:cSld>
+  <p:clrMapOvr>
+    <a:masterClrMapping/>
+  </p:clrMapOvr>
+</p:sld>
+</file>
+
+<file path=ppt/slides/slide11.xml><?xml version="1.0" encoding="utf-8"?>
 <p:sld xmlns:a="http://schemas.openxmlformats.org/drawingml/2006/main" xmlns:p="http://schemas.openxmlformats.org/presentationml/2006/main" xmlns:r="http://schemas.openxmlformats.org/officeDocument/2006/relationships">
   <p:cSld>
     <p:bg>

--- a/poc/data_harness/Ascension Agentic Harness - Data Harness (white).pptx
+++ b/poc/data_harness/Ascension Agentic Harness - Data Harness (white).pptx
@@ -1501,7 +1501,7 @@
           </a:p>
           <a:p>
             <a:r>
-              <a:t>- How it scales (concurrency): each request is its own isolated run; up to 3 runs per pod so no pod crowds out another; about 30 at once, set by model and API quotas (proposed, sized in the Phase 0 load test); extra requests wait, none are dropped.</a:t>
+              <a:t>- How it scales (concurrency): each request is its own isolated run; fair share for every pod, a per-pod cap set in config so no pod crowds out another; scales with demand within model and API quotas, sized in the Phase 0 load test; extra requests wait, none are dropped. If asked for numbers: our starting design is a few runs per pod and a few dozen overall, both settings.</a:t>
             </a:r>
           </a:p>
           <a:p>
@@ -5507,7 +5507,7 @@
                 </a:solidFill>
                 <a:latin typeface="Trenda IG Text"/>
               </a:rPr>
-              <a:t>Up to 3 runs per pod</a:t>
+              <a:t>Fair share for every pod</a:t>
             </a:r>
           </a:p>
           <a:p>
@@ -5523,7 +5523,7 @@
                 </a:solidFill>
                 <a:latin typeface="Trenda IG Text"/>
               </a:rPr>
-              <a:t>fair share: no pod crowds out another</a:t>
+              <a:t>a per-pod cap, set in config: no pod crowds out another</a:t>
             </a:r>
           </a:p>
         </p:txBody>
@@ -5646,7 +5646,7 @@
                 </a:solidFill>
                 <a:latin typeface="Trenda IG Text"/>
               </a:rPr>
-              <a:t>About 30 runs at once</a:t>
+              <a:t>Scales with demand</a:t>
             </a:r>
           </a:p>
           <a:p>
@@ -5662,7 +5662,7 @@
                 </a:solidFill>
                 <a:latin typeface="Trenda IG Text"/>
               </a:rPr>
-              <a:t>set by model and API quotas; proposed, sized in the Phase 0 load test</a:t>
+              <a:t>runs added as load grows, within model and API quotas; sized in Phase 0</a:t>
             </a:r>
           </a:p>
         </p:txBody>

--- a/poc/data_harness/Ascension Agentic Harness - Data Harness (white).pptx
+++ b/poc/data_harness/Ascension Agentic Harness - Data Harness (white).pptx
@@ -1703,7 +1703,7 @@
           </a:p>
           <a:p>
             <a:r>
-              <a:t>- Left: what the agents read. The engineering sources (Jira, Confluence, Salesforce, Git, Copado, Drive) for every pod. For Marketing Cloud pods, governed Google Cloud data: Gold A aggregates and masked views only.</a:t>
+              <a:t>- Left: agent sources. Agents read from and write to these systems, always through the tool gateway and never in production. The engineering sources (Jira, Confluence, Salesforce, Git, Copado, Drive) for every pod. For Marketing Cloud pods, governed Google Cloud data: Gold A aggregates and masked views only.</a:t>
             </a:r>
           </a:p>
           <a:p>
@@ -1723,7 +1723,12 @@
           </a:p>
           <a:p>
             <a:r>
-              <a:t>- Bottom: two governed paths. The delivery path is unchanged; the campaign path builds and tests first, then a masked pre-send review, then release through the gateway.</a:t>
+              <a:t>- Bottom: two governed paths, with who does each step. Delivery: the Developer Agent builds, the Release Agent moves it through Copado, Review and Test Agents run the quality gates; business users sign UAT and the change board approves at CAB. Campaigns: the Orchestrator takes the prompt, Strategist and Analytics plan on Gold A, Design and Readiness build and test, the SME and tech lead review before send, and the policy service releases.</a:t>
+            </a:r>
+          </a:p>
+          <a:p>
+            <a:r>
+              <a:t>- The Change Guardian sits with the Architect Agent: it flags any change that affects another pod before anything is built.</a:t>
             </a:r>
           </a:p>
         </p:txBody>
@@ -13060,7 +13065,16 @@
                 </a:solidFill>
                 <a:latin typeface="Trenda IG Text"/>
               </a:rPr>
-              <a:t>WHAT AGENTS READ</a:t>
+              <a:t>AGENT SOURCES</a:t>
+            </a:r>
+            <a:r>
+              <a:rPr sz="700" b="0" i="0">
+                <a:solidFill>
+                  <a:srgbClr val="1A1A1A"/>
+                </a:solidFill>
+                <a:latin typeface="Trenda IG Text"/>
+              </a:rPr>
+              <a:t>   read + write via the gateway</a:t>
             </a:r>
           </a:p>
         </p:txBody>
@@ -14317,7 +14331,7 @@
                 </a:solidFill>
                 <a:latin typeface="Trenda IG Text"/>
               </a:rPr>
-              <a:t>Jira story and Confluence design into a clear brief</a:t>
+              <a:t>User stories and functional decomposition from the Jira story</a:t>
             </a:r>
           </a:p>
         </p:txBody>
@@ -14583,7 +14597,25 @@
                 </a:solidFill>
                 <a:latin typeface="Trenda IG Text"/>
               </a:rPr>
-              <a:t>Impact, reuse and risk from the graph; the change plan</a:t>
+              <a:t>Impact and reuse from the graph; </a:t>
+            </a:r>
+            <a:r>
+              <a:rPr sz="700" b="1" i="0">
+                <a:solidFill>
+                  <a:srgbClr val="1A1A1A"/>
+                </a:solidFill>
+                <a:latin typeface="Trenda IG Text"/>
+              </a:rPr>
+              <a:t>Change Guardian</a:t>
+            </a:r>
+            <a:r>
+              <a:rPr sz="700" b="0" i="0">
+                <a:solidFill>
+                  <a:srgbClr val="4D4D4D"/>
+                </a:solidFill>
+                <a:latin typeface="Trenda IG Text"/>
+              </a:rPr>
+              <a:t> flags cross-pod risk</a:t>
             </a:r>
           </a:p>
         </p:txBody>
@@ -18484,8 +18516,8 @@
         </p:nvSpPr>
         <p:spPr>
           <a:xfrm>
-            <a:off x="411480" y="5559552"/>
-            <a:ext cx="1188720" cy="292608"/>
+            <a:off x="411480" y="5504688"/>
+            <a:ext cx="1188720" cy="347472"/>
           </a:xfrm>
           <a:prstGeom prst="rect">
             <a:avLst/>
@@ -18518,8 +18550,8 @@
         </p:nvSpPr>
         <p:spPr>
           <a:xfrm>
-            <a:off x="1645920" y="5559552"/>
-            <a:ext cx="1060704" cy="292608"/>
+            <a:off x="1645920" y="5504688"/>
+            <a:ext cx="1202436" cy="347472"/>
           </a:xfrm>
           <a:prstGeom prst="roundRect">
             <a:avLst>
@@ -18564,8 +18596,8 @@
         </p:nvSpPr>
         <p:spPr>
           <a:xfrm>
-            <a:off x="1645920" y="5559552"/>
-            <a:ext cx="1060704" cy="292608"/>
+            <a:off x="1645920" y="5504688"/>
+            <a:ext cx="1202436" cy="347472"/>
           </a:xfrm>
           <a:prstGeom prst="rect">
             <a:avLst/>
@@ -18578,15 +18610,35 @@
           </a:bodyPr>
           <a:lstStyle/>
           <a:p>
-            <a:pPr algn="ctr"/>
+            <a:pPr algn="ctr">
+              <a:lnSpc>
+                <a:spcPct val="90000"/>
+              </a:lnSpc>
+            </a:pPr>
+            <a:r>
+              <a:rPr sz="700" b="1" i="0">
+                <a:solidFill>
+                  <a:srgbClr val="1A1A1A"/>
+                </a:solidFill>
+                <a:latin typeface="Trenda IG Text"/>
+              </a:rPr>
+              <a:t>AI build</a:t>
+            </a:r>
+          </a:p>
+          <a:p>
+            <a:pPr algn="ctr">
+              <a:lnSpc>
+                <a:spcPct val="90000"/>
+              </a:lnSpc>
+            </a:pPr>
             <a:r>
               <a:rPr sz="700" b="0" i="0">
                 <a:solidFill>
-                  <a:srgbClr val="1A1A1A"/>
-                </a:solidFill>
-                <a:latin typeface="Trenda IG Text"/>
-              </a:rPr>
-              <a:t>AI build</a:t>
+                  <a:srgbClr val="4D4D4D"/>
+                </a:solidFill>
+                <a:latin typeface="Trenda IG Text"/>
+              </a:rPr>
+              <a:t>Developer Agent</a:t>
             </a:r>
           </a:p>
         </p:txBody>
@@ -18599,7 +18651,7 @@
         </p:nvCxnSpPr>
         <p:spPr>
           <a:xfrm>
-            <a:off x="2706624" y="5705856"/>
+            <a:off x="2848356" y="5678424"/>
             <a:ext cx="73152" cy="0"/>
           </a:xfrm>
           <a:prstGeom prst="line">
@@ -18635,8 +18687,8 @@
         </p:nvSpPr>
         <p:spPr>
           <a:xfrm>
-            <a:off x="2779776" y="5559552"/>
-            <a:ext cx="1060704" cy="292608"/>
+            <a:off x="2921508" y="5504688"/>
+            <a:ext cx="1202436" cy="347472"/>
           </a:xfrm>
           <a:prstGeom prst="roundRect">
             <a:avLst>
@@ -18681,8 +18733,8 @@
         </p:nvSpPr>
         <p:spPr>
           <a:xfrm>
-            <a:off x="2779776" y="5559552"/>
-            <a:ext cx="1060704" cy="292608"/>
+            <a:off x="2921508" y="5504688"/>
+            <a:ext cx="1202436" cy="347472"/>
           </a:xfrm>
           <a:prstGeom prst="rect">
             <a:avLst/>
@@ -18695,15 +18747,35 @@
           </a:bodyPr>
           <a:lstStyle/>
           <a:p>
-            <a:pPr algn="ctr"/>
+            <a:pPr algn="ctr">
+              <a:lnSpc>
+                <a:spcPct val="90000"/>
+              </a:lnSpc>
+            </a:pPr>
+            <a:r>
+              <a:rPr sz="700" b="1" i="0">
+                <a:solidFill>
+                  <a:srgbClr val="1A1A1A"/>
+                </a:solidFill>
+                <a:latin typeface="Trenda IG Text"/>
+              </a:rPr>
+              <a:t>Copado</a:t>
+            </a:r>
+          </a:p>
+          <a:p>
+            <a:pPr algn="ctr">
+              <a:lnSpc>
+                <a:spcPct val="90000"/>
+              </a:lnSpc>
+            </a:pPr>
             <a:r>
               <a:rPr sz="700" b="0" i="0">
                 <a:solidFill>
-                  <a:srgbClr val="1A1A1A"/>
-                </a:solidFill>
-                <a:latin typeface="Trenda IG Text"/>
-              </a:rPr>
-              <a:t>Copado</a:t>
+                  <a:srgbClr val="4D4D4D"/>
+                </a:solidFill>
+                <a:latin typeface="Trenda IG Text"/>
+              </a:rPr>
+              <a:t>Release Agent</a:t>
             </a:r>
           </a:p>
         </p:txBody>
@@ -18716,7 +18788,7 @@
         </p:nvCxnSpPr>
         <p:spPr>
           <a:xfrm>
-            <a:off x="3840480" y="5705856"/>
+            <a:off x="4123944" y="5678424"/>
             <a:ext cx="73152" cy="0"/>
           </a:xfrm>
           <a:prstGeom prst="line">
@@ -18752,8 +18824,8 @@
         </p:nvSpPr>
         <p:spPr>
           <a:xfrm>
-            <a:off x="3913632" y="5559552"/>
-            <a:ext cx="1060704" cy="292608"/>
+            <a:off x="4197096" y="5504688"/>
+            <a:ext cx="1202436" cy="347472"/>
           </a:xfrm>
           <a:prstGeom prst="roundRect">
             <a:avLst>
@@ -18798,8 +18870,8 @@
         </p:nvSpPr>
         <p:spPr>
           <a:xfrm>
-            <a:off x="3913632" y="5559552"/>
-            <a:ext cx="1060704" cy="292608"/>
+            <a:off x="4197096" y="5504688"/>
+            <a:ext cx="1202436" cy="347472"/>
           </a:xfrm>
           <a:prstGeom prst="rect">
             <a:avLst/>
@@ -18812,15 +18884,35 @@
           </a:bodyPr>
           <a:lstStyle/>
           <a:p>
-            <a:pPr algn="ctr"/>
+            <a:pPr algn="ctr">
+              <a:lnSpc>
+                <a:spcPct val="90000"/>
+              </a:lnSpc>
+            </a:pPr>
+            <a:r>
+              <a:rPr sz="700" b="1" i="0">
+                <a:solidFill>
+                  <a:srgbClr val="1A1A1A"/>
+                </a:solidFill>
+                <a:latin typeface="Trenda IG Text"/>
+              </a:rPr>
+              <a:t>Quality gates</a:t>
+            </a:r>
+          </a:p>
+          <a:p>
+            <a:pPr algn="ctr">
+              <a:lnSpc>
+                <a:spcPct val="90000"/>
+              </a:lnSpc>
+            </a:pPr>
             <a:r>
               <a:rPr sz="700" b="0" i="0">
                 <a:solidFill>
-                  <a:srgbClr val="1A1A1A"/>
-                </a:solidFill>
-                <a:latin typeface="Trenda IG Text"/>
-              </a:rPr>
-              <a:t>Quality gates</a:t>
+                  <a:srgbClr val="4D4D4D"/>
+                </a:solidFill>
+                <a:latin typeface="Trenda IG Text"/>
+              </a:rPr>
+              <a:t>Review + Test Agents</a:t>
             </a:r>
           </a:p>
         </p:txBody>
@@ -18833,7 +18925,7 @@
         </p:nvCxnSpPr>
         <p:spPr>
           <a:xfrm>
-            <a:off x="4974336" y="5705856"/>
+            <a:off x="5399531" y="5678424"/>
             <a:ext cx="73152" cy="0"/>
           </a:xfrm>
           <a:prstGeom prst="line">
@@ -18869,8 +18961,8 @@
         </p:nvSpPr>
         <p:spPr>
           <a:xfrm>
-            <a:off x="5047488" y="5559552"/>
-            <a:ext cx="1060704" cy="292608"/>
+            <a:off x="5472683" y="5504688"/>
+            <a:ext cx="1202436" cy="347472"/>
           </a:xfrm>
           <a:prstGeom prst="roundRect">
             <a:avLst>
@@ -18915,8 +19007,8 @@
         </p:nvSpPr>
         <p:spPr>
           <a:xfrm>
-            <a:off x="5047488" y="5559552"/>
-            <a:ext cx="1060704" cy="292608"/>
+            <a:off x="5472683" y="5504688"/>
+            <a:ext cx="1202436" cy="347472"/>
           </a:xfrm>
           <a:prstGeom prst="rect">
             <a:avLst/>
@@ -18929,15 +19021,35 @@
           </a:bodyPr>
           <a:lstStyle/>
           <a:p>
-            <a:pPr algn="ctr"/>
+            <a:pPr algn="ctr">
+              <a:lnSpc>
+                <a:spcPct val="90000"/>
+              </a:lnSpc>
+            </a:pPr>
+            <a:r>
+              <a:rPr sz="700" b="1" i="0">
+                <a:solidFill>
+                  <a:srgbClr val="1A1A1A"/>
+                </a:solidFill>
+                <a:latin typeface="Trenda IG Text"/>
+              </a:rPr>
+              <a:t>DEV</a:t>
+            </a:r>
+          </a:p>
+          <a:p>
+            <a:pPr algn="ctr">
+              <a:lnSpc>
+                <a:spcPct val="90000"/>
+              </a:lnSpc>
+            </a:pPr>
             <a:r>
               <a:rPr sz="700" b="0" i="0">
                 <a:solidFill>
-                  <a:srgbClr val="1A1A1A"/>
-                </a:solidFill>
-                <a:latin typeface="Trenda IG Text"/>
-              </a:rPr>
-              <a:t>DEV</a:t>
+                  <a:srgbClr val="4D4D4D"/>
+                </a:solidFill>
+                <a:latin typeface="Trenda IG Text"/>
+              </a:rPr>
+              <a:t>Release Agent</a:t>
             </a:r>
           </a:p>
         </p:txBody>
@@ -18950,7 +19062,7 @@
         </p:nvCxnSpPr>
         <p:spPr>
           <a:xfrm>
-            <a:off x="6108192" y="5705856"/>
+            <a:off x="6675119" y="5678424"/>
             <a:ext cx="73152" cy="0"/>
           </a:xfrm>
           <a:prstGeom prst="line">
@@ -18986,8 +19098,8 @@
         </p:nvSpPr>
         <p:spPr>
           <a:xfrm>
-            <a:off x="6181344" y="5559552"/>
-            <a:ext cx="1060704" cy="292608"/>
+            <a:off x="6748271" y="5504688"/>
+            <a:ext cx="1202436" cy="347472"/>
           </a:xfrm>
           <a:prstGeom prst="roundRect">
             <a:avLst>
@@ -19032,8 +19144,8 @@
         </p:nvSpPr>
         <p:spPr>
           <a:xfrm>
-            <a:off x="6181344" y="5559552"/>
-            <a:ext cx="1060704" cy="292608"/>
+            <a:off x="6748271" y="5504688"/>
+            <a:ext cx="1202436" cy="347472"/>
           </a:xfrm>
           <a:prstGeom prst="rect">
             <a:avLst/>
@@ -19046,15 +19158,35 @@
           </a:bodyPr>
           <a:lstStyle/>
           <a:p>
-            <a:pPr algn="ctr"/>
+            <a:pPr algn="ctr">
+              <a:lnSpc>
+                <a:spcPct val="90000"/>
+              </a:lnSpc>
+            </a:pPr>
+            <a:r>
+              <a:rPr sz="700" b="1" i="0">
+                <a:solidFill>
+                  <a:srgbClr val="1A1A1A"/>
+                </a:solidFill>
+                <a:latin typeface="Trenda IG Text"/>
+              </a:rPr>
+              <a:t>SIT</a:t>
+            </a:r>
+          </a:p>
+          <a:p>
+            <a:pPr algn="ctr">
+              <a:lnSpc>
+                <a:spcPct val="90000"/>
+              </a:lnSpc>
+            </a:pPr>
             <a:r>
               <a:rPr sz="700" b="0" i="0">
                 <a:solidFill>
-                  <a:srgbClr val="1A1A1A"/>
-                </a:solidFill>
-                <a:latin typeface="Trenda IG Text"/>
-              </a:rPr>
-              <a:t>SIT</a:t>
+                  <a:srgbClr val="4D4D4D"/>
+                </a:solidFill>
+                <a:latin typeface="Trenda IG Text"/>
+              </a:rPr>
+              <a:t>Test Agent</a:t>
             </a:r>
           </a:p>
         </p:txBody>
@@ -19067,7 +19199,7 @@
         </p:nvCxnSpPr>
         <p:spPr>
           <a:xfrm>
-            <a:off x="7242048" y="5705856"/>
+            <a:off x="7950707" y="5678424"/>
             <a:ext cx="73152" cy="0"/>
           </a:xfrm>
           <a:prstGeom prst="line">
@@ -19103,8 +19235,8 @@
         </p:nvSpPr>
         <p:spPr>
           <a:xfrm>
-            <a:off x="7315200" y="5559552"/>
-            <a:ext cx="1060704" cy="292608"/>
+            <a:off x="8023859" y="5504688"/>
+            <a:ext cx="1202436" cy="347472"/>
           </a:xfrm>
           <a:prstGeom prst="roundRect">
             <a:avLst>
@@ -19149,8 +19281,8 @@
         </p:nvSpPr>
         <p:spPr>
           <a:xfrm>
-            <a:off x="7315200" y="5559552"/>
-            <a:ext cx="1060704" cy="292608"/>
+            <a:off x="8023859" y="5504688"/>
+            <a:ext cx="1202436" cy="347472"/>
           </a:xfrm>
           <a:prstGeom prst="rect">
             <a:avLst/>
@@ -19163,7 +19295,11 @@
           </a:bodyPr>
           <a:lstStyle/>
           <a:p>
-            <a:pPr algn="ctr"/>
+            <a:pPr algn="ctr">
+              <a:lnSpc>
+                <a:spcPct val="90000"/>
+              </a:lnSpc>
+            </a:pPr>
             <a:r>
               <a:rPr sz="700" b="1" i="0">
                 <a:solidFill>
@@ -19172,6 +19308,22 @@
                 <a:latin typeface="Trenda IG Text"/>
               </a:rPr>
               <a:t>UAT</a:t>
+            </a:r>
+          </a:p>
+          <a:p>
+            <a:pPr algn="ctr">
+              <a:lnSpc>
+                <a:spcPct val="90000"/>
+              </a:lnSpc>
+            </a:pPr>
+            <a:r>
+              <a:rPr sz="700" b="0" i="0">
+                <a:solidFill>
+                  <a:srgbClr val="0089A0"/>
+                </a:solidFill>
+                <a:latin typeface="Trenda IG Text"/>
+              </a:rPr>
+              <a:t>business users</a:t>
             </a:r>
           </a:p>
         </p:txBody>
@@ -19184,7 +19336,7 @@
         </p:nvCxnSpPr>
         <p:spPr>
           <a:xfrm>
-            <a:off x="8375904" y="5705856"/>
+            <a:off x="9226295" y="5678424"/>
             <a:ext cx="73152" cy="0"/>
           </a:xfrm>
           <a:prstGeom prst="line">
@@ -19220,8 +19372,8 @@
         </p:nvSpPr>
         <p:spPr>
           <a:xfrm>
-            <a:off x="8449056" y="5559552"/>
-            <a:ext cx="1060704" cy="292608"/>
+            <a:off x="9299447" y="5504688"/>
+            <a:ext cx="1202436" cy="347472"/>
           </a:xfrm>
           <a:prstGeom prst="roundRect">
             <a:avLst>
@@ -19266,8 +19418,8 @@
         </p:nvSpPr>
         <p:spPr>
           <a:xfrm>
-            <a:off x="8449056" y="5559552"/>
-            <a:ext cx="1060704" cy="292608"/>
+            <a:off x="9299447" y="5504688"/>
+            <a:ext cx="1202436" cy="347472"/>
           </a:xfrm>
           <a:prstGeom prst="rect">
             <a:avLst/>
@@ -19280,7 +19432,11 @@
           </a:bodyPr>
           <a:lstStyle/>
           <a:p>
-            <a:pPr algn="ctr"/>
+            <a:pPr algn="ctr">
+              <a:lnSpc>
+                <a:spcPct val="90000"/>
+              </a:lnSpc>
+            </a:pPr>
             <a:r>
               <a:rPr sz="700" b="1" i="0">
                 <a:solidFill>
@@ -19288,7 +19444,23 @@
                 </a:solidFill>
                 <a:latin typeface="Trenda IG Text"/>
               </a:rPr>
-              <a:t>Human approval</a:t>
+              <a:t>CAB</a:t>
+            </a:r>
+          </a:p>
+          <a:p>
+            <a:pPr algn="ctr">
+              <a:lnSpc>
+                <a:spcPct val="90000"/>
+              </a:lnSpc>
+            </a:pPr>
+            <a:r>
+              <a:rPr sz="700" b="0" i="0">
+                <a:solidFill>
+                  <a:srgbClr val="0089A0"/>
+                </a:solidFill>
+                <a:latin typeface="Trenda IG Text"/>
+              </a:rPr>
+              <a:t>change board</a:t>
             </a:r>
           </a:p>
         </p:txBody>
@@ -19301,7 +19473,7 @@
         </p:nvCxnSpPr>
         <p:spPr>
           <a:xfrm>
-            <a:off x="9509760" y="5705856"/>
+            <a:off x="10501883" y="5678424"/>
             <a:ext cx="73152" cy="0"/>
           </a:xfrm>
           <a:prstGeom prst="line">
@@ -19337,8 +19509,143 @@
         </p:nvSpPr>
         <p:spPr>
           <a:xfrm>
-            <a:off x="9582912" y="5559552"/>
-            <a:ext cx="1060704" cy="292608"/>
+            <a:off x="10575035" y="5504688"/>
+            <a:ext cx="1202436" cy="347472"/>
+          </a:xfrm>
+          <a:prstGeom prst="roundRect">
+            <a:avLst>
+              <a:gd name="adj" fmla="val 30000"/>
+            </a:avLst>
+          </a:prstGeom>
+          <a:solidFill>
+            <a:srgbClr val="F5F5F5"/>
+          </a:solidFill>
+          <a:ln w="11430">
+            <a:solidFill>
+              <a:srgbClr val="BDBDBD"/>
+            </a:solidFill>
+          </a:ln>
+          <a:effectLst/>
+        </p:spPr>
+        <p:style>
+          <a:lnRef idx="1">
+            <a:schemeClr val="accent1"/>
+          </a:lnRef>
+          <a:fillRef idx="3">
+            <a:schemeClr val="accent1"/>
+          </a:fillRef>
+          <a:effectRef idx="2">
+            <a:schemeClr val="accent1"/>
+          </a:effectRef>
+          <a:fontRef idx="minor">
+            <a:schemeClr val="lt1"/>
+          </a:fontRef>
+        </p:style>
+        <p:txBody>
+          <a:bodyPr rtlCol="0" anchor="ctr"/>
+          <a:lstStyle/>
+          <a:p/>
+        </p:txBody>
+      </p:sp>
+      <p:sp>
+        <p:nvSpPr>
+          <p:cNvPr id="174" name="Text 165"/>
+          <p:cNvSpPr txBox="1"/>
+          <p:nvPr/>
+        </p:nvSpPr>
+        <p:spPr>
+          <a:xfrm>
+            <a:off x="10575035" y="5504688"/>
+            <a:ext cx="1202436" cy="347472"/>
+          </a:xfrm>
+          <a:prstGeom prst="rect">
+            <a:avLst/>
+          </a:prstGeom>
+          <a:noFill/>
+        </p:spPr>
+        <p:txBody>
+          <a:bodyPr wrap="square" lIns="0" rIns="0" tIns="0" bIns="0" anchor="ctr">
+            <a:spAutoFit/>
+          </a:bodyPr>
+          <a:lstStyle/>
+          <a:p>
+            <a:pPr algn="ctr">
+              <a:lnSpc>
+                <a:spcPct val="90000"/>
+              </a:lnSpc>
+            </a:pPr>
+            <a:r>
+              <a:rPr sz="700" b="1" i="0">
+                <a:solidFill>
+                  <a:srgbClr val="1A1A1A"/>
+                </a:solidFill>
+                <a:latin typeface="Trenda IG Text"/>
+              </a:rPr>
+              <a:t>PROD</a:t>
+            </a:r>
+          </a:p>
+          <a:p>
+            <a:pPr algn="ctr">
+              <a:lnSpc>
+                <a:spcPct val="90000"/>
+              </a:lnSpc>
+            </a:pPr>
+            <a:r>
+              <a:rPr sz="700" b="0" i="0">
+                <a:solidFill>
+                  <a:srgbClr val="4D4D4D"/>
+                </a:solidFill>
+                <a:latin typeface="Trenda IG Text"/>
+              </a:rPr>
+              <a:t>owning team</a:t>
+            </a:r>
+          </a:p>
+        </p:txBody>
+      </p:sp>
+      <p:sp>
+        <p:nvSpPr>
+          <p:cNvPr id="175" name="Text 166"/>
+          <p:cNvSpPr txBox="1"/>
+          <p:nvPr/>
+        </p:nvSpPr>
+        <p:spPr>
+          <a:xfrm>
+            <a:off x="411480" y="5907024"/>
+            <a:ext cx="1188720" cy="347472"/>
+          </a:xfrm>
+          <a:prstGeom prst="rect">
+            <a:avLst/>
+          </a:prstGeom>
+          <a:noFill/>
+        </p:spPr>
+        <p:txBody>
+          <a:bodyPr wrap="square" lIns="0" rIns="0" tIns="0" bIns="0" anchor="ctr">
+            <a:spAutoFit/>
+          </a:bodyPr>
+          <a:lstStyle/>
+          <a:p>
+            <a:r>
+              <a:rPr sz="700" b="1" i="0" spc="120">
+                <a:solidFill>
+                  <a:srgbClr val="0089A0"/>
+                </a:solidFill>
+                <a:latin typeface="Trenda IG Text"/>
+              </a:rPr>
+              <a:t>CAMPAIGN PATH</a:t>
+            </a:r>
+          </a:p>
+        </p:txBody>
+      </p:sp>
+      <p:sp>
+        <p:nvSpPr>
+          <p:cNvPr id="176" name="Shape 167"/>
+          <p:cNvSpPr/>
+          <p:nvPr/>
+        </p:nvSpPr>
+        <p:spPr>
+          <a:xfrm>
+            <a:off x="1645920" y="5907024"/>
+            <a:ext cx="1627632" cy="347472"/>
           </a:xfrm>
           <a:prstGeom prst="roundRect">
             <a:avLst>
@@ -19377,14 +19684,14 @@
       </p:sp>
       <p:sp>
         <p:nvSpPr>
-          <p:cNvPr id="174" name="Text 165"/>
-          <p:cNvSpPr txBox="1"/>
-          <p:nvPr/>
-        </p:nvSpPr>
-        <p:spPr>
-          <a:xfrm>
-            <a:off x="9582912" y="5559552"/>
-            <a:ext cx="1060704" cy="292608"/>
+          <p:cNvPr id="177" name="Text 168"/>
+          <p:cNvSpPr txBox="1"/>
+          <p:nvPr/>
+        </p:nvSpPr>
+        <p:spPr>
+          <a:xfrm>
+            <a:off x="1645920" y="5907024"/>
+            <a:ext cx="1627632" cy="347472"/>
           </a:xfrm>
           <a:prstGeom prst="rect">
             <a:avLst/>
@@ -19397,28 +19704,48 @@
           </a:bodyPr>
           <a:lstStyle/>
           <a:p>
-            <a:pPr algn="ctr"/>
+            <a:pPr algn="ctr">
+              <a:lnSpc>
+                <a:spcPct val="90000"/>
+              </a:lnSpc>
+            </a:pPr>
             <a:r>
               <a:rPr sz="700" b="1" i="0">
                 <a:solidFill>
-                  <a:srgbClr val="0089A0"/>
-                </a:solidFill>
-                <a:latin typeface="Trenda IG Text"/>
-              </a:rPr>
-              <a:t>CAB</a:t>
+                  <a:srgbClr val="1A1A1A"/>
+                </a:solidFill>
+                <a:latin typeface="Trenda IG Text"/>
+              </a:rPr>
+              <a:t>Prompt in Codex</a:t>
+            </a:r>
+          </a:p>
+          <a:p>
+            <a:pPr algn="ctr">
+              <a:lnSpc>
+                <a:spcPct val="90000"/>
+              </a:lnSpc>
+            </a:pPr>
+            <a:r>
+              <a:rPr sz="700" b="0" i="0">
+                <a:solidFill>
+                  <a:srgbClr val="4D4D4D"/>
+                </a:solidFill>
+                <a:latin typeface="Trenda IG Text"/>
+              </a:rPr>
+              <a:t>Orchestrator</a:t>
             </a:r>
           </a:p>
         </p:txBody>
       </p:sp>
       <p:cxnSp>
         <p:nvCxnSpPr>
-          <p:cNvPr id="175" name="Arrow 166"/>
+          <p:cNvPr id="178" name="Arrow 169"/>
           <p:cNvCxnSpPr/>
           <p:nvPr/>
         </p:nvCxnSpPr>
         <p:spPr>
           <a:xfrm>
-            <a:off x="10643616" y="5705856"/>
+            <a:off x="3273552" y="6080760"/>
             <a:ext cx="73152" cy="0"/>
           </a:xfrm>
           <a:prstGeom prst="line">
@@ -19448,129 +19775,14 @@
       </p:cxnSp>
       <p:sp>
         <p:nvSpPr>
-          <p:cNvPr id="176" name="Shape 167"/>
-          <p:cNvSpPr/>
-          <p:nvPr/>
-        </p:nvSpPr>
-        <p:spPr>
-          <a:xfrm>
-            <a:off x="10716768" y="5559552"/>
-            <a:ext cx="1060704" cy="292608"/>
-          </a:xfrm>
-          <a:prstGeom prst="roundRect">
-            <a:avLst>
-              <a:gd name="adj" fmla="val 30000"/>
-            </a:avLst>
-          </a:prstGeom>
-          <a:solidFill>
-            <a:srgbClr val="F5F5F5"/>
-          </a:solidFill>
-          <a:ln w="11430">
-            <a:solidFill>
-              <a:srgbClr val="BDBDBD"/>
-            </a:solidFill>
-          </a:ln>
-          <a:effectLst/>
-        </p:spPr>
-        <p:style>
-          <a:lnRef idx="1">
-            <a:schemeClr val="accent1"/>
-          </a:lnRef>
-          <a:fillRef idx="3">
-            <a:schemeClr val="accent1"/>
-          </a:fillRef>
-          <a:effectRef idx="2">
-            <a:schemeClr val="accent1"/>
-          </a:effectRef>
-          <a:fontRef idx="minor">
-            <a:schemeClr val="lt1"/>
-          </a:fontRef>
-        </p:style>
-        <p:txBody>
-          <a:bodyPr rtlCol="0" anchor="ctr"/>
-          <a:lstStyle/>
-          <a:p/>
-        </p:txBody>
-      </p:sp>
-      <p:sp>
-        <p:nvSpPr>
-          <p:cNvPr id="177" name="Text 168"/>
-          <p:cNvSpPr txBox="1"/>
-          <p:nvPr/>
-        </p:nvSpPr>
-        <p:spPr>
-          <a:xfrm>
-            <a:off x="10716768" y="5559552"/>
-            <a:ext cx="1060704" cy="292608"/>
-          </a:xfrm>
-          <a:prstGeom prst="rect">
-            <a:avLst/>
-          </a:prstGeom>
-          <a:noFill/>
-        </p:spPr>
-        <p:txBody>
-          <a:bodyPr wrap="square" lIns="0" rIns="0" tIns="0" bIns="0" anchor="ctr">
-            <a:spAutoFit/>
-          </a:bodyPr>
-          <a:lstStyle/>
-          <a:p>
-            <a:pPr algn="ctr"/>
-            <a:r>
-              <a:rPr sz="700" b="0" i="0">
-                <a:solidFill>
-                  <a:srgbClr val="1A1A1A"/>
-                </a:solidFill>
-                <a:latin typeface="Trenda IG Text"/>
-              </a:rPr>
-              <a:t>PROD</a:t>
-            </a:r>
-          </a:p>
-        </p:txBody>
-      </p:sp>
-      <p:sp>
-        <p:nvSpPr>
-          <p:cNvPr id="178" name="Text 169"/>
-          <p:cNvSpPr txBox="1"/>
-          <p:nvPr/>
-        </p:nvSpPr>
-        <p:spPr>
-          <a:xfrm>
-            <a:off x="411480" y="5925312"/>
-            <a:ext cx="1188720" cy="292608"/>
-          </a:xfrm>
-          <a:prstGeom prst="rect">
-            <a:avLst/>
-          </a:prstGeom>
-          <a:noFill/>
-        </p:spPr>
-        <p:txBody>
-          <a:bodyPr wrap="square" lIns="0" rIns="0" tIns="0" bIns="0" anchor="ctr">
-            <a:spAutoFit/>
-          </a:bodyPr>
-          <a:lstStyle/>
-          <a:p>
-            <a:r>
-              <a:rPr sz="700" b="1" i="0" spc="120">
-                <a:solidFill>
-                  <a:srgbClr val="0089A0"/>
-                </a:solidFill>
-                <a:latin typeface="Trenda IG Text"/>
-              </a:rPr>
-              <a:t>CAMPAIGN PATH</a:t>
-            </a:r>
-          </a:p>
-        </p:txBody>
-      </p:sp>
-      <p:sp>
-        <p:nvSpPr>
           <p:cNvPr id="179" name="Shape 170"/>
           <p:cNvSpPr/>
           <p:nvPr/>
         </p:nvSpPr>
         <p:spPr>
           <a:xfrm>
-            <a:off x="1645920" y="5925312"/>
-            <a:ext cx="1627632" cy="292608"/>
+            <a:off x="3346704" y="5907024"/>
+            <a:ext cx="1627632" cy="347472"/>
           </a:xfrm>
           <a:prstGeom prst="roundRect">
             <a:avLst>
@@ -19615,8 +19827,8 @@
         </p:nvSpPr>
         <p:spPr>
           <a:xfrm>
-            <a:off x="1645920" y="5925312"/>
-            <a:ext cx="1627632" cy="292608"/>
+            <a:off x="3346704" y="5907024"/>
+            <a:ext cx="1627632" cy="347472"/>
           </a:xfrm>
           <a:prstGeom prst="rect">
             <a:avLst/>
@@ -19629,15 +19841,35 @@
           </a:bodyPr>
           <a:lstStyle/>
           <a:p>
-            <a:pPr algn="ctr"/>
+            <a:pPr algn="ctr">
+              <a:lnSpc>
+                <a:spcPct val="90000"/>
+              </a:lnSpc>
+            </a:pPr>
+            <a:r>
+              <a:rPr sz="700" b="1" i="0">
+                <a:solidFill>
+                  <a:srgbClr val="1A1A1A"/>
+                </a:solidFill>
+                <a:latin typeface="Trenda IG Text"/>
+              </a:rPr>
+              <a:t>Gold A insights</a:t>
+            </a:r>
+          </a:p>
+          <a:p>
+            <a:pPr algn="ctr">
+              <a:lnSpc>
+                <a:spcPct val="90000"/>
+              </a:lnSpc>
+            </a:pPr>
             <a:r>
               <a:rPr sz="700" b="0" i="0">
                 <a:solidFill>
-                  <a:srgbClr val="1A1A1A"/>
-                </a:solidFill>
-                <a:latin typeface="Trenda IG Text"/>
-              </a:rPr>
-              <a:t>Prompt in Codex</a:t>
+                  <a:srgbClr val="4D4D4D"/>
+                </a:solidFill>
+                <a:latin typeface="Trenda IG Text"/>
+              </a:rPr>
+              <a:t>Strategist + Analytics</a:t>
             </a:r>
           </a:p>
         </p:txBody>
@@ -19650,7 +19882,7 @@
         </p:nvCxnSpPr>
         <p:spPr>
           <a:xfrm>
-            <a:off x="3273552" y="6071616"/>
+            <a:off x="4974336" y="6080760"/>
             <a:ext cx="73152" cy="0"/>
           </a:xfrm>
           <a:prstGeom prst="line">
@@ -19686,8 +19918,8 @@
         </p:nvSpPr>
         <p:spPr>
           <a:xfrm>
-            <a:off x="3346704" y="5925312"/>
-            <a:ext cx="1627632" cy="292608"/>
+            <a:off x="5047488" y="5907024"/>
+            <a:ext cx="1627632" cy="347472"/>
           </a:xfrm>
           <a:prstGeom prst="roundRect">
             <a:avLst>
@@ -19732,8 +19964,8 @@
         </p:nvSpPr>
         <p:spPr>
           <a:xfrm>
-            <a:off x="3346704" y="5925312"/>
-            <a:ext cx="1627632" cy="292608"/>
+            <a:off x="5047488" y="5907024"/>
+            <a:ext cx="1627632" cy="347472"/>
           </a:xfrm>
           <a:prstGeom prst="rect">
             <a:avLst/>
@@ -19746,15 +19978,35 @@
           </a:bodyPr>
           <a:lstStyle/>
           <a:p>
-            <a:pPr algn="ctr"/>
+            <a:pPr algn="ctr">
+              <a:lnSpc>
+                <a:spcPct val="90000"/>
+              </a:lnSpc>
+            </a:pPr>
+            <a:r>
+              <a:rPr sz="700" b="1" i="0">
+                <a:solidFill>
+                  <a:srgbClr val="1A1A1A"/>
+                </a:solidFill>
+                <a:latin typeface="Trenda IG Text"/>
+              </a:rPr>
+              <a:t>Build + test</a:t>
+            </a:r>
+          </a:p>
+          <a:p>
+            <a:pPr algn="ctr">
+              <a:lnSpc>
+                <a:spcPct val="90000"/>
+              </a:lnSpc>
+            </a:pPr>
             <a:r>
               <a:rPr sz="700" b="0" i="0">
                 <a:solidFill>
-                  <a:srgbClr val="1A1A1A"/>
-                </a:solidFill>
-                <a:latin typeface="Trenda IG Text"/>
-              </a:rPr>
-              <a:t>Gold A insights</a:t>
+                  <a:srgbClr val="4D4D4D"/>
+                </a:solidFill>
+                <a:latin typeface="Trenda IG Text"/>
+              </a:rPr>
+              <a:t>Design + Readiness</a:t>
             </a:r>
           </a:p>
         </p:txBody>
@@ -19767,7 +20019,7 @@
         </p:nvCxnSpPr>
         <p:spPr>
           <a:xfrm>
-            <a:off x="4974336" y="6071616"/>
+            <a:off x="6675120" y="6080760"/>
             <a:ext cx="73152" cy="0"/>
           </a:xfrm>
           <a:prstGeom prst="line">
@@ -19803,8 +20055,8 @@
         </p:nvSpPr>
         <p:spPr>
           <a:xfrm>
-            <a:off x="5047488" y="5925312"/>
-            <a:ext cx="1627632" cy="292608"/>
+            <a:off x="6748272" y="5907024"/>
+            <a:ext cx="1627632" cy="347472"/>
           </a:xfrm>
           <a:prstGeom prst="roundRect">
             <a:avLst>
@@ -19849,8 +20101,8 @@
         </p:nvSpPr>
         <p:spPr>
           <a:xfrm>
-            <a:off x="5047488" y="5925312"/>
-            <a:ext cx="1627632" cy="292608"/>
+            <a:off x="6748272" y="5907024"/>
+            <a:ext cx="1627632" cy="347472"/>
           </a:xfrm>
           <a:prstGeom prst="rect">
             <a:avLst/>
@@ -19863,15 +20115,35 @@
           </a:bodyPr>
           <a:lstStyle/>
           <a:p>
-            <a:pPr algn="ctr"/>
+            <a:pPr algn="ctr">
+              <a:lnSpc>
+                <a:spcPct val="90000"/>
+              </a:lnSpc>
+            </a:pPr>
+            <a:r>
+              <a:rPr sz="700" b="1" i="0">
+                <a:solidFill>
+                  <a:srgbClr val="0089A0"/>
+                </a:solidFill>
+                <a:latin typeface="Trenda IG Text"/>
+              </a:rPr>
+              <a:t>Pre-send review</a:t>
+            </a:r>
+          </a:p>
+          <a:p>
+            <a:pPr algn="ctr">
+              <a:lnSpc>
+                <a:spcPct val="90000"/>
+              </a:lnSpc>
+            </a:pPr>
             <a:r>
               <a:rPr sz="700" b="0" i="0">
                 <a:solidFill>
-                  <a:srgbClr val="1A1A1A"/>
-                </a:solidFill>
-                <a:latin typeface="Trenda IG Text"/>
-              </a:rPr>
-              <a:t>Build + test</a:t>
+                  <a:srgbClr val="0089A0"/>
+                </a:solidFill>
+                <a:latin typeface="Trenda IG Text"/>
+              </a:rPr>
+              <a:t>SME + tech lead</a:t>
             </a:r>
           </a:p>
         </p:txBody>
@@ -19884,7 +20156,7 @@
         </p:nvCxnSpPr>
         <p:spPr>
           <a:xfrm>
-            <a:off x="6675120" y="6071616"/>
+            <a:off x="8375904" y="6080760"/>
             <a:ext cx="73152" cy="0"/>
           </a:xfrm>
           <a:prstGeom prst="line">
@@ -19920,8 +20192,8 @@
         </p:nvSpPr>
         <p:spPr>
           <a:xfrm>
-            <a:off x="6748272" y="5925312"/>
-            <a:ext cx="1627632" cy="292608"/>
+            <a:off x="8449056" y="5907024"/>
+            <a:ext cx="1627632" cy="347472"/>
           </a:xfrm>
           <a:prstGeom prst="roundRect">
             <a:avLst>
@@ -19966,8 +20238,8 @@
         </p:nvSpPr>
         <p:spPr>
           <a:xfrm>
-            <a:off x="6748272" y="5925312"/>
-            <a:ext cx="1627632" cy="292608"/>
+            <a:off x="8449056" y="5907024"/>
+            <a:ext cx="1627632" cy="347472"/>
           </a:xfrm>
           <a:prstGeom prst="rect">
             <a:avLst/>
@@ -19980,15 +20252,35 @@
           </a:bodyPr>
           <a:lstStyle/>
           <a:p>
-            <a:pPr algn="ctr"/>
+            <a:pPr algn="ctr">
+              <a:lnSpc>
+                <a:spcPct val="90000"/>
+              </a:lnSpc>
+            </a:pPr>
             <a:r>
               <a:rPr sz="700" b="1" i="0">
                 <a:solidFill>
-                  <a:srgbClr val="0089A0"/>
-                </a:solidFill>
-                <a:latin typeface="Trenda IG Text"/>
-              </a:rPr>
-              <a:t>Pre-send review</a:t>
+                  <a:srgbClr val="1A1A1A"/>
+                </a:solidFill>
+                <a:latin typeface="Trenda IG Text"/>
+              </a:rPr>
+              <a:t>Gateway release</a:t>
+            </a:r>
+          </a:p>
+          <a:p>
+            <a:pPr algn="ctr">
+              <a:lnSpc>
+                <a:spcPct val="90000"/>
+              </a:lnSpc>
+            </a:pPr>
+            <a:r>
+              <a:rPr sz="700" b="0" i="0">
+                <a:solidFill>
+                  <a:srgbClr val="4D4D4D"/>
+                </a:solidFill>
+                <a:latin typeface="Trenda IG Text"/>
+              </a:rPr>
+              <a:t>policy service</a:t>
             </a:r>
           </a:p>
         </p:txBody>
@@ -20001,7 +20293,7 @@
         </p:nvCxnSpPr>
         <p:spPr>
           <a:xfrm>
-            <a:off x="8375904" y="6071616"/>
+            <a:off x="10076688" y="6080760"/>
             <a:ext cx="73152" cy="0"/>
           </a:xfrm>
           <a:prstGeom prst="line">
@@ -20037,8 +20329,8 @@
         </p:nvSpPr>
         <p:spPr>
           <a:xfrm>
-            <a:off x="8449056" y="5925312"/>
-            <a:ext cx="1627632" cy="292608"/>
+            <a:off x="10149840" y="5907024"/>
+            <a:ext cx="1627632" cy="347472"/>
           </a:xfrm>
           <a:prstGeom prst="roundRect">
             <a:avLst>
@@ -20083,8 +20375,8 @@
         </p:nvSpPr>
         <p:spPr>
           <a:xfrm>
-            <a:off x="8449056" y="5925312"/>
-            <a:ext cx="1627632" cy="292608"/>
+            <a:off x="10149840" y="5907024"/>
+            <a:ext cx="1627632" cy="347472"/>
           </a:xfrm>
           <a:prstGeom prst="rect">
             <a:avLst/>
@@ -20097,132 +20389,35 @@
           </a:bodyPr>
           <a:lstStyle/>
           <a:p>
-            <a:pPr algn="ctr"/>
+            <a:pPr algn="ctr">
+              <a:lnSpc>
+                <a:spcPct val="90000"/>
+              </a:lnSpc>
+            </a:pPr>
+            <a:r>
+              <a:rPr sz="700" b="1" i="0">
+                <a:solidFill>
+                  <a:srgbClr val="1A1A1A"/>
+                </a:solidFill>
+                <a:latin typeface="Trenda IG Text"/>
+              </a:rPr>
+              <a:t>Journey runs</a:t>
+            </a:r>
+          </a:p>
+          <a:p>
+            <a:pPr algn="ctr">
+              <a:lnSpc>
+                <a:spcPct val="90000"/>
+              </a:lnSpc>
+            </a:pPr>
             <a:r>
               <a:rPr sz="700" b="0" i="0">
                 <a:solidFill>
-                  <a:srgbClr val="1A1A1A"/>
-                </a:solidFill>
-                <a:latin typeface="Trenda IG Text"/>
-              </a:rPr>
-              <a:t>Gateway release</a:t>
-            </a:r>
-          </a:p>
-        </p:txBody>
-      </p:sp>
-      <p:cxnSp>
-        <p:nvCxnSpPr>
-          <p:cNvPr id="193" name="Arrow 184"/>
-          <p:cNvCxnSpPr/>
-          <p:nvPr/>
-        </p:nvCxnSpPr>
-        <p:spPr>
-          <a:xfrm>
-            <a:off x="10076688" y="6071616"/>
-            <a:ext cx="73152" cy="0"/>
-          </a:xfrm>
-          <a:prstGeom prst="line">
-            <a:avLst/>
-          </a:prstGeom>
-          <a:ln w="9525">
-            <a:solidFill>
-              <a:srgbClr val="8C8C8C"/>
-            </a:solidFill>
-            <a:tailEnd type="triangle" w="med" len="med"/>
-          </a:ln>
-        </p:spPr>
-        <p:style>
-          <a:lnRef idx="2">
-            <a:schemeClr val="accent1"/>
-          </a:lnRef>
-          <a:fillRef idx="0">
-            <a:schemeClr val="accent1"/>
-          </a:fillRef>
-          <a:effectRef idx="1">
-            <a:schemeClr val="accent1"/>
-          </a:effectRef>
-          <a:fontRef idx="minor">
-            <a:schemeClr val="tx1"/>
-          </a:fontRef>
-        </p:style>
-      </p:cxnSp>
-      <p:sp>
-        <p:nvSpPr>
-          <p:cNvPr id="194" name="Shape 185"/>
-          <p:cNvSpPr/>
-          <p:nvPr/>
-        </p:nvSpPr>
-        <p:spPr>
-          <a:xfrm>
-            <a:off x="10149840" y="5925312"/>
-            <a:ext cx="1627632" cy="292608"/>
-          </a:xfrm>
-          <a:prstGeom prst="roundRect">
-            <a:avLst>
-              <a:gd name="adj" fmla="val 30000"/>
-            </a:avLst>
-          </a:prstGeom>
-          <a:solidFill>
-            <a:srgbClr val="F5F5F5"/>
-          </a:solidFill>
-          <a:ln w="11430">
-            <a:solidFill>
-              <a:srgbClr val="00B8D4"/>
-            </a:solidFill>
-          </a:ln>
-          <a:effectLst/>
-        </p:spPr>
-        <p:style>
-          <a:lnRef idx="1">
-            <a:schemeClr val="accent1"/>
-          </a:lnRef>
-          <a:fillRef idx="3">
-            <a:schemeClr val="accent1"/>
-          </a:fillRef>
-          <a:effectRef idx="2">
-            <a:schemeClr val="accent1"/>
-          </a:effectRef>
-          <a:fontRef idx="minor">
-            <a:schemeClr val="lt1"/>
-          </a:fontRef>
-        </p:style>
-        <p:txBody>
-          <a:bodyPr rtlCol="0" anchor="ctr"/>
-          <a:lstStyle/>
-          <a:p/>
-        </p:txBody>
-      </p:sp>
-      <p:sp>
-        <p:nvSpPr>
-          <p:cNvPr id="195" name="Text 186"/>
-          <p:cNvSpPr txBox="1"/>
-          <p:nvPr/>
-        </p:nvSpPr>
-        <p:spPr>
-          <a:xfrm>
-            <a:off x="10149840" y="5925312"/>
-            <a:ext cx="1627632" cy="292608"/>
-          </a:xfrm>
-          <a:prstGeom prst="rect">
-            <a:avLst/>
-          </a:prstGeom>
-          <a:noFill/>
-        </p:spPr>
-        <p:txBody>
-          <a:bodyPr wrap="square" lIns="0" rIns="0" tIns="0" bIns="0" anchor="ctr">
-            <a:spAutoFit/>
-          </a:bodyPr>
-          <a:lstStyle/>
-          <a:p>
-            <a:pPr algn="ctr"/>
-            <a:r>
-              <a:rPr sz="700" b="0" i="0">
-                <a:solidFill>
-                  <a:srgbClr val="1A1A1A"/>
-                </a:solidFill>
-                <a:latin typeface="Trenda IG Text"/>
-              </a:rPr>
-              <a:t>Journey runs</a:t>
+                  <a:srgbClr val="4D4D4D"/>
+                </a:solidFill>
+                <a:latin typeface="Trenda IG Text"/>
+              </a:rPr>
+              <a:t>Marketing Cloud</a:t>
             </a:r>
           </a:p>
         </p:txBody>
@@ -23404,9 +23599,9 @@
           <a:lstStyle/>
           <a:p>
             <a:r>
-              <a:rPr sz="740" b="1" i="0">
-                <a:solidFill>
-                  <a:srgbClr val="1A1A1A"/>
+              <a:rPr sz="860" b="1" i="0">
+                <a:solidFill>
+                  <a:srgbClr val="8A6D00"/>
                 </a:solidFill>
                 <a:latin typeface="Trenda IG Text"/>
               </a:rPr>
@@ -23417,116 +23612,14 @@
       </p:sp>
       <p:sp>
         <p:nvSpPr>
-          <p:cNvPr id="88" name="Text 81"/>
-          <p:cNvSpPr txBox="1"/>
-          <p:nvPr/>
-        </p:nvSpPr>
-        <p:spPr>
-          <a:xfrm>
-            <a:off x="6528816" y="2688336"/>
-            <a:ext cx="1691640" cy="310896"/>
-          </a:xfrm>
-          <a:prstGeom prst="rect">
-            <a:avLst/>
-          </a:prstGeom>
-          <a:noFill/>
-        </p:spPr>
-        <p:txBody>
-          <a:bodyPr wrap="square" lIns="0" rIns="0" tIns="0" bIns="0" anchor="ctr">
-            <a:spAutoFit/>
-          </a:bodyPr>
-          <a:lstStyle/>
-          <a:p>
-            <a:r>
-              <a:rPr sz="740" b="1" i="0">
-                <a:solidFill>
-                  <a:srgbClr val="1A1A1A"/>
-                </a:solidFill>
-                <a:latin typeface="Trenda IG Text"/>
-              </a:rPr>
-              <a:t>Guardrails in + out · Model Armor</a:t>
-            </a:r>
-          </a:p>
-        </p:txBody>
-      </p:sp>
-      <p:sp>
-        <p:nvSpPr>
-          <p:cNvPr id="89" name="Text 82"/>
-          <p:cNvSpPr txBox="1"/>
-          <p:nvPr/>
-        </p:nvSpPr>
-        <p:spPr>
-          <a:xfrm>
-            <a:off x="6528816" y="3035808"/>
-            <a:ext cx="1691640" cy="310896"/>
-          </a:xfrm>
-          <a:prstGeom prst="rect">
-            <a:avLst/>
-          </a:prstGeom>
-          <a:noFill/>
-        </p:spPr>
-        <p:txBody>
-          <a:bodyPr wrap="square" lIns="0" rIns="0" tIns="0" bIns="0" anchor="ctr">
-            <a:spAutoFit/>
-          </a:bodyPr>
-          <a:lstStyle/>
-          <a:p>
-            <a:r>
-              <a:rPr sz="740" b="1" i="0">
-                <a:solidFill>
-                  <a:srgbClr val="1A1A1A"/>
-                </a:solidFill>
-                <a:latin typeface="Trenda IG Text"/>
-              </a:rPr>
-              <a:t>Identity + access</a:t>
-            </a:r>
-          </a:p>
-        </p:txBody>
-      </p:sp>
-      <p:sp>
-        <p:nvSpPr>
-          <p:cNvPr id="90" name="Text 83"/>
-          <p:cNvSpPr txBox="1"/>
-          <p:nvPr/>
-        </p:nvSpPr>
-        <p:spPr>
-          <a:xfrm>
-            <a:off x="6528816" y="3383279"/>
-            <a:ext cx="1691640" cy="310896"/>
-          </a:xfrm>
-          <a:prstGeom prst="rect">
-            <a:avLst/>
-          </a:prstGeom>
-          <a:noFill/>
-        </p:spPr>
-        <p:txBody>
-          <a:bodyPr wrap="square" lIns="0" rIns="0" tIns="0" bIns="0" anchor="ctr">
-            <a:spAutoFit/>
-          </a:bodyPr>
-          <a:lstStyle/>
-          <a:p>
-            <a:r>
-              <a:rPr sz="740" b="1" i="0">
-                <a:solidFill>
-                  <a:srgbClr val="1A1A1A"/>
-                </a:solidFill>
-                <a:latin typeface="Trenda IG Text"/>
-              </a:rPr>
-              <a:t>Collibra masking + DLP</a:t>
-            </a:r>
-          </a:p>
-        </p:txBody>
-      </p:sp>
-      <p:sp>
-        <p:nvSpPr>
-          <p:cNvPr id="91" name="Shape 84"/>
+          <p:cNvPr id="88" name="Shape 81"/>
           <p:cNvSpPr/>
           <p:nvPr/>
         </p:nvSpPr>
         <p:spPr>
           <a:xfrm>
-            <a:off x="8202167" y="3474720"/>
-            <a:ext cx="329184" cy="137160"/>
+            <a:off x="7854696" y="2423160"/>
+            <a:ext cx="694944" cy="155448"/>
           </a:xfrm>
           <a:prstGeom prst="roundRect">
             <a:avLst>
@@ -23565,82 +23658,150 @@
       </p:sp>
       <p:sp>
         <p:nvSpPr>
+          <p:cNvPr id="89" name="Text 82"/>
+          <p:cNvSpPr txBox="1"/>
+          <p:nvPr/>
+        </p:nvSpPr>
+        <p:spPr>
+          <a:xfrm>
+            <a:off x="7854696" y="2423160"/>
+            <a:ext cx="694944" cy="155448"/>
+          </a:xfrm>
+          <a:prstGeom prst="rect">
+            <a:avLst/>
+          </a:prstGeom>
+          <a:noFill/>
+        </p:spPr>
+        <p:txBody>
+          <a:bodyPr wrap="square" lIns="0" rIns="0" tIns="0" bIns="0" anchor="ctr">
+            <a:spAutoFit/>
+          </a:bodyPr>
+          <a:lstStyle/>
+          <a:p>
+            <a:pPr algn="ctr"/>
+            <a:r>
+              <a:rPr sz="700" b="1" i="0" spc="80">
+                <a:solidFill>
+                  <a:srgbClr val="1A1A1A"/>
+                </a:solidFill>
+                <a:latin typeface="Trenda IG Text"/>
+              </a:rPr>
+              <a:t>WE BUILD IT</a:t>
+            </a:r>
+          </a:p>
+        </p:txBody>
+      </p:sp>
+      <p:sp>
+        <p:nvSpPr>
+          <p:cNvPr id="90" name="Text 83"/>
+          <p:cNvSpPr txBox="1"/>
+          <p:nvPr/>
+        </p:nvSpPr>
+        <p:spPr>
+          <a:xfrm>
+            <a:off x="6528816" y="2688336"/>
+            <a:ext cx="1691640" cy="310896"/>
+          </a:xfrm>
+          <a:prstGeom prst="rect">
+            <a:avLst/>
+          </a:prstGeom>
+          <a:noFill/>
+        </p:spPr>
+        <p:txBody>
+          <a:bodyPr wrap="square" lIns="0" rIns="0" tIns="0" bIns="0" anchor="ctr">
+            <a:spAutoFit/>
+          </a:bodyPr>
+          <a:lstStyle/>
+          <a:p>
+            <a:r>
+              <a:rPr sz="740" b="1" i="0">
+                <a:solidFill>
+                  <a:srgbClr val="1A1A1A"/>
+                </a:solidFill>
+                <a:latin typeface="Trenda IG Text"/>
+              </a:rPr>
+              <a:t>Guardrails in + out · Model Armor</a:t>
+            </a:r>
+          </a:p>
+        </p:txBody>
+      </p:sp>
+      <p:sp>
+        <p:nvSpPr>
+          <p:cNvPr id="91" name="Text 84"/>
+          <p:cNvSpPr txBox="1"/>
+          <p:nvPr/>
+        </p:nvSpPr>
+        <p:spPr>
+          <a:xfrm>
+            <a:off x="6528816" y="3035808"/>
+            <a:ext cx="1691640" cy="310896"/>
+          </a:xfrm>
+          <a:prstGeom prst="rect">
+            <a:avLst/>
+          </a:prstGeom>
+          <a:noFill/>
+        </p:spPr>
+        <p:txBody>
+          <a:bodyPr wrap="square" lIns="0" rIns="0" tIns="0" bIns="0" anchor="ctr">
+            <a:spAutoFit/>
+          </a:bodyPr>
+          <a:lstStyle/>
+          <a:p>
+            <a:r>
+              <a:rPr sz="740" b="1" i="0">
+                <a:solidFill>
+                  <a:srgbClr val="1A1A1A"/>
+                </a:solidFill>
+                <a:latin typeface="Trenda IG Text"/>
+              </a:rPr>
+              <a:t>Identity + access</a:t>
+            </a:r>
+          </a:p>
+        </p:txBody>
+      </p:sp>
+      <p:sp>
+        <p:nvSpPr>
           <p:cNvPr id="92" name="Text 85"/>
           <p:cNvSpPr txBox="1"/>
           <p:nvPr/>
         </p:nvSpPr>
         <p:spPr>
           <a:xfrm>
+            <a:off x="6528816" y="3383279"/>
+            <a:ext cx="1691640" cy="310896"/>
+          </a:xfrm>
+          <a:prstGeom prst="rect">
+            <a:avLst/>
+          </a:prstGeom>
+          <a:noFill/>
+        </p:spPr>
+        <p:txBody>
+          <a:bodyPr wrap="square" lIns="0" rIns="0" tIns="0" bIns="0" anchor="ctr">
+            <a:spAutoFit/>
+          </a:bodyPr>
+          <a:lstStyle/>
+          <a:p>
+            <a:r>
+              <a:rPr sz="740" b="1" i="0">
+                <a:solidFill>
+                  <a:srgbClr val="1A1A1A"/>
+                </a:solidFill>
+                <a:latin typeface="Trenda IG Text"/>
+              </a:rPr>
+              <a:t>Collibra masking + DLP</a:t>
+            </a:r>
+          </a:p>
+        </p:txBody>
+      </p:sp>
+      <p:sp>
+        <p:nvSpPr>
+          <p:cNvPr id="93" name="Shape 86"/>
+          <p:cNvSpPr/>
+          <p:nvPr/>
+        </p:nvSpPr>
+        <p:spPr>
+          <a:xfrm>
             <a:off x="8202167" y="3474720"/>
-            <a:ext cx="329184" cy="137160"/>
-          </a:xfrm>
-          <a:prstGeom prst="rect">
-            <a:avLst/>
-          </a:prstGeom>
-          <a:noFill/>
-        </p:spPr>
-        <p:txBody>
-          <a:bodyPr wrap="square" lIns="0" rIns="0" tIns="0" bIns="0" anchor="ctr">
-            <a:spAutoFit/>
-          </a:bodyPr>
-          <a:lstStyle/>
-          <a:p>
-            <a:pPr algn="ctr"/>
-            <a:r>
-              <a:rPr sz="700" b="1" i="0" spc="80">
-                <a:solidFill>
-                  <a:srgbClr val="1A1A1A"/>
-                </a:solidFill>
-                <a:latin typeface="Trenda IG Text"/>
-              </a:rPr>
-              <a:t>NEW</a:t>
-            </a:r>
-          </a:p>
-        </p:txBody>
-      </p:sp>
-      <p:sp>
-        <p:nvSpPr>
-          <p:cNvPr id="93" name="Text 86"/>
-          <p:cNvSpPr txBox="1"/>
-          <p:nvPr/>
-        </p:nvSpPr>
-        <p:spPr>
-          <a:xfrm>
-            <a:off x="6528816" y="3730752"/>
-            <a:ext cx="1691640" cy="310896"/>
-          </a:xfrm>
-          <a:prstGeom prst="rect">
-            <a:avLst/>
-          </a:prstGeom>
-          <a:noFill/>
-        </p:spPr>
-        <p:txBody>
-          <a:bodyPr wrap="square" lIns="0" rIns="0" tIns="0" bIns="0" anchor="ctr">
-            <a:spAutoFit/>
-          </a:bodyPr>
-          <a:lstStyle/>
-          <a:p>
-            <a:r>
-              <a:rPr sz="740" b="1" i="0">
-                <a:solidFill>
-                  <a:srgbClr val="1A1A1A"/>
-                </a:solidFill>
-                <a:latin typeface="Trenda IG Text"/>
-              </a:rPr>
-              <a:t>Compliance Guardian + policy engine</a:t>
-            </a:r>
-          </a:p>
-        </p:txBody>
-      </p:sp>
-      <p:sp>
-        <p:nvSpPr>
-          <p:cNvPr id="94" name="Shape 87"/>
-          <p:cNvSpPr/>
-          <p:nvPr/>
-        </p:nvSpPr>
-        <p:spPr>
-          <a:xfrm>
-            <a:off x="8202167" y="3822191"/>
             <a:ext cx="329184" cy="137160"/>
           </a:xfrm>
           <a:prstGeom prst="roundRect">
@@ -23680,8 +23841,77 @@
       </p:sp>
       <p:sp>
         <p:nvSpPr>
+          <p:cNvPr id="94" name="Text 87"/>
+          <p:cNvSpPr txBox="1"/>
+          <p:nvPr/>
+        </p:nvSpPr>
+        <p:spPr>
+          <a:xfrm>
+            <a:off x="8202167" y="3474720"/>
+            <a:ext cx="329184" cy="137160"/>
+          </a:xfrm>
+          <a:prstGeom prst="rect">
+            <a:avLst/>
+          </a:prstGeom>
+          <a:noFill/>
+        </p:spPr>
+        <p:txBody>
+          <a:bodyPr wrap="square" lIns="0" rIns="0" tIns="0" bIns="0" anchor="ctr">
+            <a:spAutoFit/>
+          </a:bodyPr>
+          <a:lstStyle/>
+          <a:p>
+            <a:pPr algn="ctr"/>
+            <a:r>
+              <a:rPr sz="700" b="1" i="0" spc="80">
+                <a:solidFill>
+                  <a:srgbClr val="1A1A1A"/>
+                </a:solidFill>
+                <a:latin typeface="Trenda IG Text"/>
+              </a:rPr>
+              <a:t>NEW</a:t>
+            </a:r>
+          </a:p>
+        </p:txBody>
+      </p:sp>
+      <p:sp>
+        <p:nvSpPr>
           <p:cNvPr id="95" name="Text 88"/>
           <p:cNvSpPr txBox="1"/>
+          <p:nvPr/>
+        </p:nvSpPr>
+        <p:spPr>
+          <a:xfrm>
+            <a:off x="6528816" y="3730752"/>
+            <a:ext cx="1691640" cy="310896"/>
+          </a:xfrm>
+          <a:prstGeom prst="rect">
+            <a:avLst/>
+          </a:prstGeom>
+          <a:noFill/>
+        </p:spPr>
+        <p:txBody>
+          <a:bodyPr wrap="square" lIns="0" rIns="0" tIns="0" bIns="0" anchor="ctr">
+            <a:spAutoFit/>
+          </a:bodyPr>
+          <a:lstStyle/>
+          <a:p>
+            <a:r>
+              <a:rPr sz="740" b="1" i="0">
+                <a:solidFill>
+                  <a:srgbClr val="1A1A1A"/>
+                </a:solidFill>
+                <a:latin typeface="Trenda IG Text"/>
+              </a:rPr>
+              <a:t>Compliance Guardian + policy engine</a:t>
+            </a:r>
+          </a:p>
+        </p:txBody>
+      </p:sp>
+      <p:sp>
+        <p:nvSpPr>
+          <p:cNvPr id="96" name="Shape 89"/>
+          <p:cNvSpPr/>
           <p:nvPr/>
         </p:nvSpPr>
         <p:spPr>
@@ -23689,6 +23919,52 @@
             <a:off x="8202167" y="3822191"/>
             <a:ext cx="329184" cy="137160"/>
           </a:xfrm>
+          <a:prstGeom prst="roundRect">
+            <a:avLst>
+              <a:gd name="adj" fmla="val 50000"/>
+            </a:avLst>
+          </a:prstGeom>
+          <a:solidFill>
+            <a:srgbClr val="FFD700"/>
+          </a:solidFill>
+          <a:ln w="6350">
+            <a:solidFill>
+              <a:srgbClr val="C9A100"/>
+            </a:solidFill>
+          </a:ln>
+          <a:effectLst/>
+        </p:spPr>
+        <p:style>
+          <a:lnRef idx="1">
+            <a:schemeClr val="accent1"/>
+          </a:lnRef>
+          <a:fillRef idx="3">
+            <a:schemeClr val="accent1"/>
+          </a:fillRef>
+          <a:effectRef idx="2">
+            <a:schemeClr val="accent1"/>
+          </a:effectRef>
+          <a:fontRef idx="minor">
+            <a:schemeClr val="lt1"/>
+          </a:fontRef>
+        </p:style>
+        <p:txBody>
+          <a:bodyPr rtlCol="0" anchor="ctr"/>
+          <a:lstStyle/>
+          <a:p/>
+        </p:txBody>
+      </p:sp>
+      <p:sp>
+        <p:nvSpPr>
+          <p:cNvPr id="97" name="Text 90"/>
+          <p:cNvSpPr txBox="1"/>
+          <p:nvPr/>
+        </p:nvSpPr>
+        <p:spPr>
+          <a:xfrm>
+            <a:off x="8202167" y="3822191"/>
+            <a:ext cx="329184" cy="137160"/>
+          </a:xfrm>
           <a:prstGeom prst="rect">
             <a:avLst/>
           </a:prstGeom>
@@ -23715,7 +23991,7 @@
       </p:sp>
       <p:sp>
         <p:nvSpPr>
-          <p:cNvPr id="96" name="Text 89"/>
+          <p:cNvPr id="98" name="Text 91"/>
           <p:cNvSpPr txBox="1"/>
           <p:nvPr/>
         </p:nvSpPr>
@@ -23749,7 +24025,7 @@
       </p:sp>
       <p:sp>
         <p:nvSpPr>
-          <p:cNvPr id="97" name="Text 90"/>
+          <p:cNvPr id="99" name="Text 92"/>
           <p:cNvSpPr txBox="1"/>
           <p:nvPr/>
         </p:nvSpPr>
@@ -23783,7 +24059,7 @@
       </p:sp>
       <p:sp>
         <p:nvSpPr>
-          <p:cNvPr id="98" name="Text 91"/>
+          <p:cNvPr id="100" name="Text 93"/>
           <p:cNvSpPr txBox="1"/>
           <p:nvPr/>
         </p:nvSpPr>
@@ -23817,7 +24093,7 @@
       </p:sp>
       <p:sp>
         <p:nvSpPr>
-          <p:cNvPr id="99" name="Text 92"/>
+          <p:cNvPr id="101" name="Text 94"/>
           <p:cNvSpPr txBox="1"/>
           <p:nvPr/>
         </p:nvSpPr>
@@ -23851,7 +24127,7 @@
       </p:sp>
       <p:sp>
         <p:nvSpPr>
-          <p:cNvPr id="100" name="Shape 93"/>
+          <p:cNvPr id="102" name="Shape 95"/>
           <p:cNvSpPr/>
           <p:nvPr/>
         </p:nvSpPr>
@@ -23901,7 +24177,7 @@
       </p:sp>
       <p:sp>
         <p:nvSpPr>
-          <p:cNvPr id="100" name="Shape 93"/>
+          <p:cNvPr id="102" name="Shape 95"/>
           <p:cNvSpPr/>
           <p:nvPr/>
         </p:nvSpPr>
@@ -23945,7 +24221,7 @@
       </p:sp>
       <p:sp>
         <p:nvSpPr>
-          <p:cNvPr id="101" name="Shape 94"/>
+          <p:cNvPr id="103" name="Shape 96"/>
           <p:cNvSpPr/>
           <p:nvPr/>
         </p:nvSpPr>
@@ -23987,7 +24263,7 @@
       </p:sp>
       <p:sp>
         <p:nvSpPr>
-          <p:cNvPr id="102" name="Text 95"/>
+          <p:cNvPr id="104" name="Text 97"/>
           <p:cNvSpPr txBox="1"/>
           <p:nvPr/>
         </p:nvSpPr>
@@ -24022,7 +24298,7 @@
       </p:sp>
       <p:sp>
         <p:nvSpPr>
-          <p:cNvPr id="103" name="Text 96"/>
+          <p:cNvPr id="105" name="Text 98"/>
           <p:cNvSpPr txBox="1"/>
           <p:nvPr/>
         </p:nvSpPr>
@@ -24056,7 +24332,7 @@
       </p:sp>
       <p:sp>
         <p:nvSpPr>
-          <p:cNvPr id="104" name="Text 97"/>
+          <p:cNvPr id="106" name="Text 99"/>
           <p:cNvSpPr txBox="1"/>
           <p:nvPr/>
         </p:nvSpPr>
@@ -24090,7 +24366,7 @@
       </p:sp>
       <p:sp>
         <p:nvSpPr>
-          <p:cNvPr id="105" name="Text 98"/>
+          <p:cNvPr id="107" name="Text 100"/>
           <p:cNvSpPr txBox="1"/>
           <p:nvPr/>
         </p:nvSpPr>
@@ -24124,7 +24400,7 @@
       </p:sp>
       <p:sp>
         <p:nvSpPr>
-          <p:cNvPr id="106" name="Shape 99"/>
+          <p:cNvPr id="108" name="Shape 101"/>
           <p:cNvSpPr/>
           <p:nvPr/>
         </p:nvSpPr>
@@ -24174,7 +24450,7 @@
       </p:sp>
       <p:sp>
         <p:nvSpPr>
-          <p:cNvPr id="106" name="Shape 99"/>
+          <p:cNvPr id="108" name="Shape 101"/>
           <p:cNvSpPr/>
           <p:nvPr/>
         </p:nvSpPr>
@@ -24218,7 +24494,7 @@
       </p:sp>
       <p:sp>
         <p:nvSpPr>
-          <p:cNvPr id="107" name="Shape 100"/>
+          <p:cNvPr id="109" name="Shape 102"/>
           <p:cNvSpPr/>
           <p:nvPr/>
         </p:nvSpPr>
@@ -24260,7 +24536,7 @@
       </p:sp>
       <p:sp>
         <p:nvSpPr>
-          <p:cNvPr id="108" name="Text 101"/>
+          <p:cNvPr id="110" name="Text 103"/>
           <p:cNvSpPr txBox="1"/>
           <p:nvPr/>
         </p:nvSpPr>
@@ -24295,7 +24571,7 @@
       </p:sp>
       <p:sp>
         <p:nvSpPr>
-          <p:cNvPr id="109" name="Text 102"/>
+          <p:cNvPr id="111" name="Text 104"/>
           <p:cNvSpPr txBox="1"/>
           <p:nvPr/>
         </p:nvSpPr>
@@ -24329,7 +24605,7 @@
       </p:sp>
       <p:sp>
         <p:nvSpPr>
-          <p:cNvPr id="110" name="Text 103"/>
+          <p:cNvPr id="112" name="Text 105"/>
           <p:cNvSpPr txBox="1"/>
           <p:nvPr/>
         </p:nvSpPr>
@@ -24356,14 +24632,32 @@
                 </a:solidFill>
                 <a:latin typeface="Trenda IG Text"/>
               </a:rPr>
-              <a:t>The Change Guardian checks every change against who owns and uses it.</a:t>
-            </a:r>
-          </a:p>
-        </p:txBody>
-      </p:sp>
-      <p:sp>
-        <p:nvSpPr>
-          <p:cNvPr id="111" name="Text 104"/>
+              <a:t>The </a:t>
+            </a:r>
+            <a:r>
+              <a:rPr sz="700" b="1" i="0">
+                <a:solidFill>
+                  <a:srgbClr val="8A6D00"/>
+                </a:solidFill>
+                <a:latin typeface="Trenda IG Text"/>
+              </a:rPr>
+              <a:t>Change Guardian</a:t>
+            </a:r>
+            <a:r>
+              <a:rPr sz="700" b="0" i="0">
+                <a:solidFill>
+                  <a:srgbClr val="4D4D4D"/>
+                </a:solidFill>
+                <a:latin typeface="Trenda IG Text"/>
+              </a:rPr>
+              <a:t> checks every change against who owns and uses it.</a:t>
+            </a:r>
+          </a:p>
+        </p:txBody>
+      </p:sp>
+      <p:sp>
+        <p:nvSpPr>
+          <p:cNvPr id="113" name="Text 106"/>
           <p:cNvSpPr txBox="1"/>
           <p:nvPr/>
         </p:nvSpPr>
@@ -24397,7 +24691,7 @@
       </p:sp>
       <p:sp>
         <p:nvSpPr>
-          <p:cNvPr id="112" name="Shape 105"/>
+          <p:cNvPr id="114" name="Shape 107"/>
           <p:cNvSpPr/>
           <p:nvPr/>
         </p:nvSpPr>
@@ -24447,7 +24741,7 @@
       </p:sp>
       <p:sp>
         <p:nvSpPr>
-          <p:cNvPr id="112" name="Shape 105"/>
+          <p:cNvPr id="114" name="Shape 107"/>
           <p:cNvSpPr/>
           <p:nvPr/>
         </p:nvSpPr>
@@ -24491,7 +24785,7 @@
       </p:sp>
       <p:sp>
         <p:nvSpPr>
-          <p:cNvPr id="113" name="Shape 106"/>
+          <p:cNvPr id="115" name="Shape 108"/>
           <p:cNvSpPr/>
           <p:nvPr/>
         </p:nvSpPr>
@@ -24533,7 +24827,7 @@
       </p:sp>
       <p:sp>
         <p:nvSpPr>
-          <p:cNvPr id="114" name="Text 107"/>
+          <p:cNvPr id="116" name="Text 109"/>
           <p:cNvSpPr txBox="1"/>
           <p:nvPr/>
         </p:nvSpPr>
@@ -24568,7 +24862,7 @@
       </p:sp>
       <p:sp>
         <p:nvSpPr>
-          <p:cNvPr id="115" name="Text 108"/>
+          <p:cNvPr id="117" name="Text 110"/>
           <p:cNvSpPr txBox="1"/>
           <p:nvPr/>
         </p:nvSpPr>
@@ -24602,7 +24896,7 @@
       </p:sp>
       <p:sp>
         <p:nvSpPr>
-          <p:cNvPr id="116" name="Text 109"/>
+          <p:cNvPr id="118" name="Text 111"/>
           <p:cNvSpPr txBox="1"/>
           <p:nvPr/>
         </p:nvSpPr>
@@ -24636,7 +24930,7 @@
       </p:sp>
       <p:sp>
         <p:nvSpPr>
-          <p:cNvPr id="117" name="Text 110"/>
+          <p:cNvPr id="119" name="Text 112"/>
           <p:cNvSpPr txBox="1"/>
           <p:nvPr/>
         </p:nvSpPr>
@@ -24670,7 +24964,7 @@
       </p:sp>
       <p:sp>
         <p:nvSpPr>
-          <p:cNvPr id="118" name="Shape 111"/>
+          <p:cNvPr id="120" name="Shape 113"/>
           <p:cNvSpPr/>
           <p:nvPr/>
         </p:nvSpPr>
@@ -24714,7 +25008,7 @@
       </p:sp>
       <p:sp>
         <p:nvSpPr>
-          <p:cNvPr id="119" name="Text 112"/>
+          <p:cNvPr id="121" name="Text 114"/>
           <p:cNvSpPr txBox="1"/>
           <p:nvPr/>
         </p:nvSpPr>
@@ -24748,7 +25042,7 @@
       </p:sp>
       <p:sp>
         <p:nvSpPr>
-          <p:cNvPr id="120" name="Text 113"/>
+          <p:cNvPr id="122" name="Text 115"/>
           <p:cNvSpPr txBox="1"/>
           <p:nvPr/>
         </p:nvSpPr>
@@ -24793,7 +25087,7 @@
       </p:sp>
       <p:pic>
         <p:nvPicPr>
-          <p:cNvPr id="121" name="Picture 120" descr="salesforce.png"/>
+          <p:cNvPr id="123" name="Picture 122" descr="salesforce.png"/>
           <p:cNvPicPr>
             <a:picLocks noChangeAspect="1"/>
           </p:cNvPicPr>
@@ -24817,7 +25111,7 @@
       </p:pic>
       <p:sp>
         <p:nvSpPr>
-          <p:cNvPr id="122" name="Text 114"/>
+          <p:cNvPr id="124" name="Text 116"/>
           <p:cNvSpPr txBox="1"/>
           <p:nvPr/>
         </p:nvSpPr>
@@ -24851,7 +25145,7 @@
       </p:sp>
       <p:sp>
         <p:nvSpPr>
-          <p:cNvPr id="123" name="Text 115"/>
+          <p:cNvPr id="125" name="Text 117"/>
           <p:cNvSpPr txBox="1"/>
           <p:nvPr/>
         </p:nvSpPr>
@@ -24885,7 +25179,7 @@
       </p:sp>
       <p:pic>
         <p:nvPicPr>
-          <p:cNvPr id="124" name="Picture 123" descr="git.png"/>
+          <p:cNvPr id="126" name="Picture 125" descr="git.png"/>
           <p:cNvPicPr>
             <a:picLocks noChangeAspect="1"/>
           </p:cNvPicPr>
@@ -24909,7 +25203,7 @@
       </p:pic>
       <p:sp>
         <p:nvSpPr>
-          <p:cNvPr id="125" name="Text 116"/>
+          <p:cNvPr id="127" name="Text 118"/>
           <p:cNvSpPr txBox="1"/>
           <p:nvPr/>
         </p:nvSpPr>
@@ -24943,7 +25237,7 @@
       </p:sp>
       <p:sp>
         <p:nvSpPr>
-          <p:cNvPr id="126" name="Text 117"/>
+          <p:cNvPr id="128" name="Text 119"/>
           <p:cNvSpPr txBox="1"/>
           <p:nvPr/>
         </p:nvSpPr>
@@ -24977,7 +25271,7 @@
       </p:sp>
       <p:pic>
         <p:nvPicPr>
-          <p:cNvPr id="127" name="Picture 126" descr="googlebigquery.png"/>
+          <p:cNvPr id="129" name="Picture 128" descr="googlebigquery.png"/>
           <p:cNvPicPr>
             <a:picLocks noChangeAspect="1"/>
           </p:cNvPicPr>
@@ -25001,7 +25295,7 @@
       </p:pic>
       <p:sp>
         <p:nvSpPr>
-          <p:cNvPr id="128" name="Text 118"/>
+          <p:cNvPr id="130" name="Text 120"/>
           <p:cNvSpPr txBox="1"/>
           <p:nvPr/>
         </p:nvSpPr>
@@ -25035,7 +25329,7 @@
       </p:sp>
       <p:sp>
         <p:nvSpPr>
-          <p:cNvPr id="129" name="Text 119"/>
+          <p:cNvPr id="131" name="Text 121"/>
           <p:cNvSpPr txBox="1"/>
           <p:nvPr/>
         </p:nvSpPr>
@@ -25069,7 +25363,7 @@
       </p:sp>
       <p:pic>
         <p:nvPicPr>
-          <p:cNvPr id="130" name="Picture 129" descr="openai-white.png"/>
+          <p:cNvPr id="132" name="Picture 131" descr="openai-white.png"/>
           <p:cNvPicPr>
             <a:picLocks noChangeAspect="1"/>
           </p:cNvPicPr>
@@ -25093,7 +25387,7 @@
       </p:pic>
       <p:sp>
         <p:nvSpPr>
-          <p:cNvPr id="131" name="Text 120"/>
+          <p:cNvPr id="133" name="Text 122"/>
           <p:cNvSpPr txBox="1"/>
           <p:nvPr/>
         </p:nvSpPr>
@@ -25127,7 +25421,7 @@
       </p:sp>
       <p:sp>
         <p:nvSpPr>
-          <p:cNvPr id="132" name="Text 121"/>
+          <p:cNvPr id="134" name="Text 123"/>
           <p:cNvSpPr txBox="1"/>
           <p:nvPr/>
         </p:nvSpPr>
@@ -25161,7 +25455,7 @@
       </p:sp>
       <p:pic>
         <p:nvPicPr>
-          <p:cNvPr id="133" name="Picture 132" descr="googlecloud.png"/>
+          <p:cNvPr id="135" name="Picture 134" descr="googlecloud.png"/>
           <p:cNvPicPr>
             <a:picLocks noChangeAspect="1"/>
           </p:cNvPicPr>
@@ -25185,7 +25479,7 @@
       </p:pic>
       <p:sp>
         <p:nvSpPr>
-          <p:cNvPr id="134" name="Text 122"/>
+          <p:cNvPr id="136" name="Text 124"/>
           <p:cNvSpPr txBox="1"/>
           <p:nvPr/>
         </p:nvSpPr>
@@ -25219,7 +25513,7 @@
       </p:sp>
       <p:sp>
         <p:nvSpPr>
-          <p:cNvPr id="135" name="Text 123"/>
+          <p:cNvPr id="137" name="Text 125"/>
           <p:cNvSpPr txBox="1"/>
           <p:nvPr/>
         </p:nvSpPr>
@@ -26178,7 +26472,7 @@
                 </a:solidFill>
                 <a:latin typeface="Trenda IG Text"/>
               </a:rPr>
-              <a:t>Brief from the Jira story + Confluence design; open questions flagged.</a:t>
+              <a:t>User stories and functional decomposition from the Jira story; open questions flagged.</a:t>
             </a:r>
           </a:p>
         </p:txBody>

--- a/poc/data_harness/Ascension Agentic Harness - Data Harness (white).pptx
+++ b/poc/data_harness/Ascension Agentic Harness - Data Harness (white).pptx
@@ -2152,7 +2152,7 @@
           </a:p>
           <a:p>
             <a:r>
-              <a:t>A typical Health Cloud task on the Network Services pod, from Jira story to UAT sign-off, takes about two weeks today. On the Agentic Harness the same task takes about two days. People still approve at every gate.</a:t>
+              <a:t>A typical Health Cloud task on the Network Services pod takes about two weeks today, from Jira story to UAT sign-off. On the Agentic Harness the same task goes from story to production in about two days. People still approve at every gate.</a:t>
             </a:r>
           </a:p>
           <a:p/>
@@ -2174,7 +2174,17 @@
           </a:p>
           <a:p>
             <a:r>
-              <a:t>The same seven delivery agents as every pod, with Health Cloud skills. Day 1 morning: the Requirements Agent turns the story into a brief and the product owner approves (H1); the Architect Agent reads impact and reuse from the knowledge graph, the Change Guardian names affected pods, and the architect and pod owners approve (H2). Day 1 afternoon and overnight: the Developer Agent builds in DEV. Day 2: the Review and Test Agents check code, security and sharing and run the tests, and the tech lead approves (H3); the Release Agent promotes through Copado to SIT and UAT; the business signs UAT (H4).</a:t>
+              <a:t>The same seven delivery agents as every pod, with Health Cloud skills; about 26 working hours over two days.</a:t>
+            </a:r>
+          </a:p>
+          <a:p>
+            <a:r>
+              <a:t>Day 1: the Requirements Agent turns the story into a brief in about 3 hours and the product owner approves (H1); the Architect Agent reads impact and reuse from the knowledge graph in about 5 hours, the Change Guardian names affected pods, and the architect and pod owners approve (H2). The Developer Agent builds in DEV in about 4 hours; the Review and Test Agents check code, security and sharing and run the tests in about 4 hours, and the tech lead approves (H3); the Release Agent promotes through Copado to SIT and UAT in about 2 hours.</a:t>
+            </a:r>
+          </a:p>
+          <a:p>
+            <a:r>
+              <a:t>Day 2: about 8 hours of business UAT (H4), CAB approval and the owning team's deployment to production.</a:t>
             </a:r>
           </a:p>
           <a:p/>
@@ -2185,7 +2195,7 @@
           </a:p>
           <a:p>
             <a:r>
-              <a:t>About 80% faster: 10 working days to about 2 days. Already measured with agent-assisted delivery: 1-2 weeks down to 2-4 days. The graph, the overnight build and the automated tests take it to about 2 days: the target, confirmed against the Phase 0 baseline.</a:t>
+              <a:t>About 80% faster: 10 working days to about 2 days. Already measured with agent-assisted delivery: 1-2 weeks down to 2-4 days. The graph, the agent build and the automated tests take it to about 2 days, story to production: the target, confirmed against the Phase 0 baseline.</a:t>
             </a:r>
           </a:p>
           <a:p/>
@@ -2201,7 +2211,12 @@
           </a:p>
           <a:p>
             <a:r>
-              <a:t>- "And production?" It still goes through CAB in its normal window; the two days are story to UAT sign-off.</a:t>
+              <a:t>- "Does CAB meet every day?" Day 2 assumes a CAB slot; otherwise production waits for the next CAB window. The agents never deploy to production.</a:t>
+            </a:r>
+          </a:p>
+          <a:p>
+            <a:r>
+              <a:t>- "Why only 4 hours to build?" A typical Health Cloud task is a validation rule, a Flow or a small Apex change; the agent builds it with the design already approved and the context from the graph.</a:t>
             </a:r>
           </a:p>
         </p:txBody>
@@ -5152,7 +5167,7 @@
             </a:avLst>
           </a:prstGeom>
           <a:solidFill>
-            <a:srgbClr val="E6E6E6"/>
+            <a:srgbClr val="9E9E9E"/>
           </a:solidFill>
           <a:ln>
             <a:noFill/>
@@ -5205,7 +5220,7 @@
             <a:r>
               <a:rPr sz="700" b="1" i="0">
                 <a:solidFill>
-                  <a:srgbClr val="FFFFFE"/>
+                  <a:srgbClr val="000000"/>
                 </a:solidFill>
                 <a:latin typeface="Trenda IG Text"/>
               </a:rPr>
@@ -5318,7 +5333,7 @@
             </a:avLst>
           </a:prstGeom>
           <a:solidFill>
-            <a:srgbClr val="E6E6E6"/>
+            <a:srgbClr val="9E9E9E"/>
           </a:solidFill>
           <a:ln>
             <a:noFill/>
@@ -5371,7 +5386,7 @@
             <a:r>
               <a:rPr sz="700" b="1" i="0">
                 <a:solidFill>
-                  <a:srgbClr val="FFFFFE"/>
+                  <a:srgbClr val="000000"/>
                 </a:solidFill>
                 <a:latin typeface="Trenda IG Text"/>
               </a:rPr>
@@ -5484,7 +5499,7 @@
             </a:avLst>
           </a:prstGeom>
           <a:solidFill>
-            <a:srgbClr val="E6E6E6"/>
+            <a:srgbClr val="9E9E9E"/>
           </a:solidFill>
           <a:ln>
             <a:noFill/>
@@ -5537,7 +5552,7 @@
             <a:r>
               <a:rPr sz="700" b="1" i="0">
                 <a:solidFill>
-                  <a:srgbClr val="FFFFFE"/>
+                  <a:srgbClr val="000000"/>
                 </a:solidFill>
                 <a:latin typeface="Trenda IG Text"/>
               </a:rPr>
@@ -5650,7 +5665,7 @@
             </a:avLst>
           </a:prstGeom>
           <a:solidFill>
-            <a:srgbClr val="E6E6E6"/>
+            <a:srgbClr val="9E9E9E"/>
           </a:solidFill>
           <a:ln>
             <a:noFill/>
@@ -5703,7 +5718,7 @@
             <a:r>
               <a:rPr sz="700" b="1" i="0">
                 <a:solidFill>
-                  <a:srgbClr val="FFFFFE"/>
+                  <a:srgbClr val="000000"/>
                 </a:solidFill>
                 <a:latin typeface="Trenda IG Text"/>
               </a:rPr>
@@ -5816,7 +5831,7 @@
             </a:avLst>
           </a:prstGeom>
           <a:solidFill>
-            <a:srgbClr val="E6E6E6"/>
+            <a:srgbClr val="9E9E9E"/>
           </a:solidFill>
           <a:ln>
             <a:noFill/>
@@ -5869,7 +5884,7 @@
             <a:r>
               <a:rPr sz="700" b="1" i="0">
                 <a:solidFill>
-                  <a:srgbClr val="FFFFFE"/>
+                  <a:srgbClr val="000000"/>
                 </a:solidFill>
                 <a:latin typeface="Trenda IG Text"/>
               </a:rPr>
@@ -41895,7 +41910,7 @@
                 </a:solidFill>
                 <a:latin typeface="Trenda IG Text"/>
               </a:rPr>
-              <a:t>Any Health Cloud task, Jira story to UAT sign-off. The same seven delivery agents with Health Cloud skills; agents build overnight, people approve by day.</a:t>
+              <a:t>Any Health Cloud task. The same seven delivery agents with Health Cloud skills: day 1 takes the story to UAT, day 2 is UAT and production. People approve at every gate.</a:t>
             </a:r>
           </a:p>
         </p:txBody>
@@ -42668,7 +42683,7 @@
             </a:avLst>
           </a:prstGeom>
           <a:solidFill>
-            <a:srgbClr val="E6E6E6"/>
+            <a:srgbClr val="9E9E9E"/>
           </a:solidFill>
           <a:ln>
             <a:noFill/>
@@ -42721,7 +42736,7 @@
             <a:r>
               <a:rPr sz="700" b="1" i="0">
                 <a:solidFill>
-                  <a:srgbClr val="FFFFFE"/>
+                  <a:srgbClr val="000000"/>
                 </a:solidFill>
                 <a:latin typeface="Trenda IG Text"/>
               </a:rPr>
@@ -42834,7 +42849,7 @@
             </a:avLst>
           </a:prstGeom>
           <a:solidFill>
-            <a:srgbClr val="E6E6E6"/>
+            <a:srgbClr val="9E9E9E"/>
           </a:solidFill>
           <a:ln>
             <a:noFill/>
@@ -42887,7 +42902,7 @@
             <a:r>
               <a:rPr sz="700" b="1" i="0">
                 <a:solidFill>
-                  <a:srgbClr val="FFFFFE"/>
+                  <a:srgbClr val="000000"/>
                 </a:solidFill>
                 <a:latin typeface="Trenda IG Text"/>
               </a:rPr>
@@ -43000,7 +43015,7 @@
             </a:avLst>
           </a:prstGeom>
           <a:solidFill>
-            <a:srgbClr val="E6E6E6"/>
+            <a:srgbClr val="9E9E9E"/>
           </a:solidFill>
           <a:ln>
             <a:noFill/>
@@ -43053,7 +43068,7 @@
             <a:r>
               <a:rPr sz="700" b="1" i="0">
                 <a:solidFill>
-                  <a:srgbClr val="FFFFFE"/>
+                  <a:srgbClr val="000000"/>
                 </a:solidFill>
                 <a:latin typeface="Trenda IG Text"/>
               </a:rPr>
@@ -43332,7 +43347,7 @@
             </a:avLst>
           </a:prstGeom>
           <a:solidFill>
-            <a:srgbClr val="E6E6E6"/>
+            <a:srgbClr val="9E9E9E"/>
           </a:solidFill>
           <a:ln>
             <a:noFill/>
@@ -43385,7 +43400,7 @@
             <a:r>
               <a:rPr sz="700" b="1" i="0">
                 <a:solidFill>
-                  <a:srgbClr val="FFFFFE"/>
+                  <a:srgbClr val="000000"/>
                 </a:solidFill>
                 <a:latin typeface="Trenda IG Text"/>
               </a:rPr>
@@ -43498,7 +43513,7 @@
             </a:avLst>
           </a:prstGeom>
           <a:solidFill>
-            <a:srgbClr val="E6E6E6"/>
+            <a:srgbClr val="9E9E9E"/>
           </a:solidFill>
           <a:ln>
             <a:noFill/>
@@ -43551,7 +43566,7 @@
             <a:r>
               <a:rPr sz="700" b="1" i="0">
                 <a:solidFill>
-                  <a:srgbClr val="FFFFFE"/>
+                  <a:srgbClr val="000000"/>
                 </a:solidFill>
                 <a:latin typeface="Trenda IG Text"/>
               </a:rPr>
@@ -43568,7 +43583,7 @@
         </p:nvSpPr>
         <p:spPr>
           <a:xfrm>
-            <a:off x="2331720" y="1865375"/>
+            <a:off x="2494026" y="1865375"/>
             <a:ext cx="548640" cy="146304"/>
           </a:xfrm>
           <a:prstGeom prst="rect">
@@ -43590,7 +43605,7 @@
                 </a:solidFill>
                 <a:latin typeface="Trenda IG Text"/>
               </a:rPr>
-              <a:t>Day 0</a:t>
+              <a:t>Day 1</a:t>
             </a:r>
           </a:p>
         </p:txBody>
@@ -43603,7 +43618,7 @@
         </p:nvSpPr>
         <p:spPr>
           <a:xfrm>
-            <a:off x="3954780" y="1865375"/>
+            <a:off x="3792474" y="1865375"/>
             <a:ext cx="548640" cy="146304"/>
           </a:xfrm>
           <a:prstGeom prst="rect">
@@ -43638,7 +43653,7 @@
         </p:nvSpPr>
         <p:spPr>
           <a:xfrm>
-            <a:off x="5577840" y="1865375"/>
+            <a:off x="5415534" y="1865375"/>
             <a:ext cx="548640" cy="146304"/>
           </a:xfrm>
           <a:prstGeom prst="rect">
@@ -43857,7 +43872,7 @@
                 </a:solidFill>
                 <a:latin typeface="Trenda IG Text"/>
               </a:rPr>
-              <a:t>~48 hours elapsed: agents build overnight, people approve by day</a:t>
+              <a:t>~26 working hours: day 1 story to UAT, day 2 UAT and production</a:t>
             </a:r>
           </a:p>
         </p:txBody>
@@ -43958,7 +43973,7 @@
         <p:spPr>
           <a:xfrm>
             <a:off x="8540496" y="2148839"/>
-            <a:ext cx="274320" cy="201168"/>
+            <a:ext cx="352395" cy="201168"/>
           </a:xfrm>
           <a:prstGeom prst="roundRect">
             <a:avLst>
@@ -44002,7 +44017,7 @@
         <p:spPr>
           <a:xfrm>
             <a:off x="8540496" y="2148839"/>
-            <a:ext cx="274320" cy="201168"/>
+            <a:ext cx="352395" cy="201168"/>
           </a:xfrm>
           <a:prstGeom prst="rect">
             <a:avLst/>
@@ -44123,8 +44138,8 @@
         </p:nvSpPr>
         <p:spPr>
           <a:xfrm>
-            <a:off x="8731377" y="2560320"/>
-            <a:ext cx="318134" cy="201168"/>
+            <a:off x="8892891" y="2560320"/>
+            <a:ext cx="587326" cy="201168"/>
           </a:xfrm>
           <a:prstGeom prst="roundRect">
             <a:avLst>
@@ -44167,8 +44182,8 @@
         </p:nvSpPr>
         <p:spPr>
           <a:xfrm>
-            <a:off x="8731377" y="2560320"/>
-            <a:ext cx="318134" cy="201168"/>
+            <a:off x="8892891" y="2560320"/>
+            <a:ext cx="587326" cy="201168"/>
           </a:xfrm>
           <a:prstGeom prst="rect">
             <a:avLst/>
@@ -44276,7 +44291,7 @@
                 </a:solidFill>
                 <a:latin typeface="Trenda IG Text"/>
               </a:rPr>
-              <a:t>Apex, LWC, Flows, sharing in DEV, overnight</a:t>
+              <a:t>Apex, LWC, Flows, sharing in DEV</a:t>
             </a:r>
           </a:p>
         </p:txBody>
@@ -44289,8 +44304,8 @@
         </p:nvSpPr>
         <p:spPr>
           <a:xfrm>
-            <a:off x="9049512" y="2971799"/>
-            <a:ext cx="1018032" cy="201168"/>
+            <a:off x="9480217" y="2971799"/>
+            <a:ext cx="469860" cy="201168"/>
           </a:xfrm>
           <a:prstGeom prst="roundRect">
             <a:avLst>
@@ -44333,8 +44348,8 @@
         </p:nvSpPr>
         <p:spPr>
           <a:xfrm>
-            <a:off x="9049512" y="2971799"/>
-            <a:ext cx="1018032" cy="201168"/>
+            <a:off x="9480217" y="2971799"/>
+            <a:ext cx="469860" cy="201168"/>
           </a:xfrm>
           <a:prstGeom prst="rect">
             <a:avLst/>
@@ -44355,7 +44370,7 @@
                 </a:solidFill>
                 <a:latin typeface="Trenda IG Text"/>
               </a:rPr>
-              <a:t>16h</a:t>
+              <a:t>4h</a:t>
             </a:r>
           </a:p>
         </p:txBody>
@@ -44455,8 +44470,8 @@
         </p:nvSpPr>
         <p:spPr>
           <a:xfrm>
-            <a:off x="10067544" y="3383279"/>
-            <a:ext cx="509016" cy="201168"/>
+            <a:off x="9950078" y="3383279"/>
+            <a:ext cx="469860" cy="201168"/>
           </a:xfrm>
           <a:prstGeom prst="roundRect">
             <a:avLst>
@@ -44499,8 +44514,8 @@
         </p:nvSpPr>
         <p:spPr>
           <a:xfrm>
-            <a:off x="10067544" y="3383279"/>
-            <a:ext cx="509016" cy="201168"/>
+            <a:off x="9950078" y="3383279"/>
+            <a:ext cx="469860" cy="201168"/>
           </a:xfrm>
           <a:prstGeom prst="rect">
             <a:avLst/>
@@ -44521,7 +44536,7 @@
                 </a:solidFill>
                 <a:latin typeface="Trenda IG Text"/>
               </a:rPr>
-              <a:t>8h</a:t>
+              <a:t>4h</a:t>
             </a:r>
           </a:p>
         </p:txBody>
@@ -44621,8 +44636,8 @@
         </p:nvSpPr>
         <p:spPr>
           <a:xfrm>
-            <a:off x="10576560" y="3794759"/>
-            <a:ext cx="381762" cy="201168"/>
+            <a:off x="10419939" y="3794759"/>
+            <a:ext cx="274320" cy="201168"/>
           </a:xfrm>
           <a:prstGeom prst="roundRect">
             <a:avLst>
@@ -44665,8 +44680,8 @@
         </p:nvSpPr>
         <p:spPr>
           <a:xfrm>
-            <a:off x="10576560" y="3794759"/>
-            <a:ext cx="381762" cy="201168"/>
+            <a:off x="10419939" y="3794759"/>
+            <a:ext cx="274320" cy="201168"/>
           </a:xfrm>
           <a:prstGeom prst="rect">
             <a:avLst/>
@@ -44687,7 +44702,7 @@
                 </a:solidFill>
                 <a:latin typeface="Trenda IG Text"/>
               </a:rPr>
-              <a:t>6h</a:t>
+              <a:t>2h</a:t>
             </a:r>
           </a:p>
         </p:txBody>
@@ -44763,7 +44778,7 @@
                 </a:solidFill>
                 <a:latin typeface="Trenda IG Text"/>
               </a:rPr>
-              <a:t>Business UAT sign-off · H4</a:t>
+              <a:t>UAT + production · H4 · CAB</a:t>
             </a:r>
           </a:p>
           <a:p>
@@ -44774,7 +44789,7 @@
                 </a:solidFill>
                 <a:latin typeface="Trenda IG Text"/>
               </a:rPr>
-              <a:t>the business owner signs UAT</a:t>
+              <a:t>business signs UAT; CAB; the owning team deploys</a:t>
             </a:r>
           </a:p>
         </p:txBody>
@@ -44787,8 +44802,8 @@
         </p:nvSpPr>
         <p:spPr>
           <a:xfrm>
-            <a:off x="10958322" y="4206240"/>
-            <a:ext cx="636269" cy="201168"/>
+            <a:off x="10654870" y="4206240"/>
+            <a:ext cx="939721" cy="201168"/>
           </a:xfrm>
           <a:prstGeom prst="roundRect">
             <a:avLst>
@@ -44831,8 +44846,8 @@
         </p:nvSpPr>
         <p:spPr>
           <a:xfrm>
-            <a:off x="10958322" y="4206240"/>
-            <a:ext cx="636269" cy="201168"/>
+            <a:off x="10654870" y="4206240"/>
+            <a:ext cx="939721" cy="201168"/>
           </a:xfrm>
           <a:prstGeom prst="rect">
             <a:avLst/>
@@ -44853,7 +44868,7 @@
                 </a:solidFill>
                 <a:latin typeface="Trenda IG Text"/>
               </a:rPr>
-              <a:t>10h</a:t>
+              <a:t>8h</a:t>
             </a:r>
           </a:p>
         </p:txBody>
@@ -44866,7 +44881,7 @@
         </p:nvSpPr>
         <p:spPr>
           <a:xfrm>
-            <a:off x="8266175" y="1865375"/>
+            <a:off x="9323363" y="1865375"/>
             <a:ext cx="548640" cy="146304"/>
           </a:xfrm>
           <a:prstGeom prst="rect">
@@ -44888,7 +44903,7 @@
                 </a:solidFill>
                 <a:latin typeface="Trenda IG Text"/>
               </a:rPr>
-              <a:t>Day 0</a:t>
+              <a:t>Day 1</a:t>
             </a:r>
           </a:p>
         </p:txBody>
@@ -44901,7 +44916,7 @@
         </p:nvSpPr>
         <p:spPr>
           <a:xfrm>
-            <a:off x="9793224" y="1865375"/>
+            <a:off x="10850411" y="1865375"/>
             <a:ext cx="548640" cy="146304"/>
           </a:xfrm>
           <a:prstGeom prst="rect">
@@ -44923,44 +44938,51 @@
                 </a:solidFill>
                 <a:latin typeface="Trenda IG Text"/>
               </a:rPr>
-              <a:t>Day 1</a:t>
-            </a:r>
-          </a:p>
-        </p:txBody>
-      </p:sp>
-      <p:sp>
-        <p:nvSpPr>
-          <p:cNvPr id="79" name="Text 79"/>
-          <p:cNvSpPr txBox="1"/>
-          <p:nvPr/>
-        </p:nvSpPr>
-        <p:spPr>
-          <a:xfrm>
-            <a:off x="11320272" y="1865375"/>
-            <a:ext cx="548640" cy="146304"/>
-          </a:xfrm>
-          <a:prstGeom prst="rect">
-            <a:avLst/>
-          </a:prstGeom>
-          <a:noFill/>
-        </p:spPr>
-        <p:txBody>
-          <a:bodyPr wrap="square" lIns="0" rIns="0" tIns="0" bIns="0" anchor="ctr">
-            <a:spAutoFit/>
-          </a:bodyPr>
-          <a:lstStyle/>
-          <a:p>
-            <a:pPr algn="ctr"/>
-            <a:r>
-              <a:rPr sz="700" b="0" i="0">
-                <a:solidFill>
-                  <a:srgbClr val="6B6B6B"/>
-                </a:solidFill>
-                <a:latin typeface="Trenda IG Text"/>
-              </a:rPr>
               <a:t>Day 2</a:t>
             </a:r>
           </a:p>
+        </p:txBody>
+      </p:sp>
+      <p:sp>
+        <p:nvSpPr>
+          <p:cNvPr id="79" name="Shape 79"/>
+          <p:cNvSpPr/>
+          <p:nvPr/>
+        </p:nvSpPr>
+        <p:spPr>
+          <a:xfrm>
+            <a:off x="10707975" y="2011679"/>
+            <a:ext cx="9144" cy="2478024"/>
+          </a:xfrm>
+          <a:prstGeom prst="rect">
+            <a:avLst/>
+          </a:prstGeom>
+          <a:solidFill>
+            <a:srgbClr val="E6E6E6"/>
+          </a:solidFill>
+          <a:ln>
+            <a:noFill/>
+          </a:ln>
+          <a:effectLst/>
+        </p:spPr>
+        <p:style>
+          <a:lnRef idx="1">
+            <a:schemeClr val="accent1"/>
+          </a:lnRef>
+          <a:fillRef idx="3">
+            <a:schemeClr val="accent1"/>
+          </a:fillRef>
+          <a:effectRef idx="2">
+            <a:schemeClr val="accent1"/>
+          </a:effectRef>
+          <a:fontRef idx="minor">
+            <a:schemeClr val="lt1"/>
+          </a:fontRef>
+        </p:style>
+        <p:txBody>
+          <a:bodyPr rtlCol="0" anchor="ctr"/>
+          <a:lstStyle/>
+          <a:p/>
         </p:txBody>
       </p:sp>
       <p:sp>
@@ -44971,7 +44993,7 @@
         </p:nvSpPr>
         <p:spPr>
           <a:xfrm>
-            <a:off x="8860536" y="2148839"/>
+            <a:off x="8938611" y="2148839"/>
             <a:ext cx="310896" cy="201168"/>
           </a:xfrm>
           <a:prstGeom prst="roundRect">
@@ -45015,7 +45037,7 @@
         </p:nvSpPr>
         <p:spPr>
           <a:xfrm>
-            <a:off x="8860536" y="2148839"/>
+            <a:off x="8938611" y="2148839"/>
             <a:ext cx="310896" cy="201168"/>
           </a:xfrm>
           <a:prstGeom prst="rect">
@@ -45050,7 +45072,7 @@
         </p:nvSpPr>
         <p:spPr>
           <a:xfrm>
-            <a:off x="9095232" y="2560320"/>
+            <a:off x="9525937" y="2560320"/>
             <a:ext cx="310896" cy="201168"/>
           </a:xfrm>
           <a:prstGeom prst="roundRect">
@@ -45094,7 +45116,7 @@
         </p:nvSpPr>
         <p:spPr>
           <a:xfrm>
-            <a:off x="9095232" y="2560320"/>
+            <a:off x="9525937" y="2560320"/>
             <a:ext cx="310896" cy="201168"/>
           </a:xfrm>
           <a:prstGeom prst="rect">
@@ -45129,7 +45151,7 @@
         </p:nvSpPr>
         <p:spPr>
           <a:xfrm>
-            <a:off x="10622280" y="3383279"/>
+            <a:off x="10465659" y="3383279"/>
             <a:ext cx="310896" cy="201168"/>
           </a:xfrm>
           <a:prstGeom prst="roundRect">
@@ -45173,7 +45195,7 @@
         </p:nvSpPr>
         <p:spPr>
           <a:xfrm>
-            <a:off x="10622280" y="3383279"/>
+            <a:off x="10465659" y="3383279"/>
             <a:ext cx="310896" cy="201168"/>
           </a:xfrm>
           <a:prstGeom prst="rect">
@@ -45229,7 +45251,7 @@
                 </a:solidFill>
                 <a:latin typeface="Trenda IG Text"/>
               </a:rPr>
-              <a:t>Production follows the normal CAB window. </a:t>
+              <a:t>Day 2 assumes a CAB slot; otherwise the next CAB window. </a:t>
             </a:r>
             <a:r>
               <a:rPr sz="700" b="0" i="0">
@@ -45412,7 +45434,7 @@
                 </a:solidFill>
                 <a:latin typeface="Trenda IG Text"/>
               </a:rPr>
-              <a:t>~10 working days to ~2 days</a:t>
+              <a:t>~10 working days to ~2 days, now to production</a:t>
             </a:r>
           </a:p>
         </p:txBody>
@@ -45934,7 +45956,7 @@
                 </a:solidFill>
                 <a:latin typeface="Trenda IG Text"/>
               </a:rPr>
-              <a:t>H1 brief, H2 design, H3 code, H4 UAT; then CAB</a:t>
+              <a:t>H1 brief, H2 design, H3 code, H4 UAT; plus CAB</a:t>
             </a:r>
           </a:p>
         </p:txBody>
@@ -45968,7 +45990,7 @@
                 </a:solidFill>
                 <a:latin typeface="Trenda IG Text"/>
               </a:rPr>
-              <a:t>Today: a typical Health Cloud task on the Network Services pod, Jira story to UAT sign-off. Measured: agent-assisted delivery at Ascension, 1-2 weeks to 2-4 days. ~2 days is the harness target, confirmed against the Phase 0 baseline.</a:t>
+              <a:t>Today: a typical Health Cloud task on the Network Services pod, Jira story to UAT sign-off. Measured: agent-assisted delivery at Ascension, 1-2 weeks to 2-4 days. ~2 days to production is the harness target, confirmed against the Phase 0 baseline.</a:t>
             </a:r>
           </a:p>
         </p:txBody>
